--- a/7mo Semestre/Redes de Alta Velocidad/Evolucion_Control_Plane_IXP.pptx
+++ b/7mo Semestre/Redes de Alta Velocidad/Evolucion_Control_Plane_IXP.pptx
@@ -50,8 +50,8 @@
         </p:nvSpPr>
         <p:spPr>
           <a:xfrm>
-            <a:off x="0" y="764280"/>
-            <a:ext cx="0" cy="0"/>
+            <a:off x="533520" y="764280"/>
+            <a:ext cx="6704640" cy="3771360"/>
           </a:xfrm>
           <a:prstGeom prst="rect">
             <a:avLst/>
@@ -66,7 +66,11 @@
             <a:noAutofit/>
           </a:bodyPr>
           <a:p>
-            <a:pPr algn="ctr" defTabSz="457200"/>
+            <a:pPr algn="ctr" defTabSz="457200">
+              <a:tabLst>
+                <a:tab pos="0" algn="l"/>
+              </a:tabLst>
+            </a:pPr>
             <a:r>
               <a:rPr lang="en-US" sz="4400" b="0" u="none" strike="noStrike">
                 <a:solidFill>
@@ -371,7 +375,7 @@
             <a:pPr indent="0" algn="r">
               <a:buNone/>
             </a:pPr>
-            <a:fld id="{3D8E9B62-3632-4CF0-9542-29FBB9A4209F}" type="slidenum">
+            <a:fld id="{9BD2F267-4BF1-4931-AB97-4F80AA6A2B1B}" type="slidenum">
               <a:rPr lang="en-US" sz="1400" b="0" u="none" strike="noStrike">
                 <a:solidFill>
                   <a:srgbClr val="000000"/>
@@ -429,7 +433,7 @@
         <p:spPr>
           <a:xfrm>
             <a:off x="1143000" y="685800"/>
-            <a:ext cx="4571640" cy="3428640"/>
+            <a:ext cx="4571280" cy="3428280"/>
           </a:xfrm>
           <a:prstGeom prst="rect">
             <a:avLst/>
@@ -452,7 +456,7 @@
         <p:spPr>
           <a:xfrm>
             <a:off x="685800" y="4343400"/>
-            <a:ext cx="5486040" cy="4114440"/>
+            <a:ext cx="5485680" cy="4114080"/>
           </a:xfrm>
           <a:prstGeom prst="rect">
             <a:avLst/>
@@ -472,6 +476,9 @@
                 <a:spcPct val="100000"/>
               </a:lnSpc>
               <a:buNone/>
+              <a:tabLst>
+                <a:tab pos="0" algn="l"/>
+              </a:tabLst>
             </a:pPr>
             <a:r>
               <a:rPr lang="en-US" sz="2000" b="0" u="none" strike="noStrike">
@@ -508,7 +515,7 @@
         <p:spPr>
           <a:xfrm>
             <a:off x="3884760" y="8685360"/>
-            <a:ext cx="2971440" cy="456840"/>
+            <a:ext cx="2971080" cy="456480"/>
           </a:xfrm>
           <a:prstGeom prst="rect">
             <a:avLst/>
@@ -528,6 +535,9 @@
                 <a:spcPct val="100000"/>
               </a:lnSpc>
               <a:buNone/>
+              <a:tabLst>
+                <a:tab pos="0" algn="l"/>
+              </a:tabLst>
               <a:defRPr lang="en-US" sz="1200" b="0" u="none" strike="noStrike">
                 <a:solidFill>
                   <a:srgbClr val="000000"/>
@@ -544,8 +554,11 @@
                 <a:spcPct val="100000"/>
               </a:lnSpc>
               <a:buNone/>
-            </a:pPr>
-            <a:fld id="{CEC041E5-20A0-424D-8A7D-649FADE6246E}" type="slidenum">
+              <a:tabLst>
+                <a:tab pos="0" algn="l"/>
+              </a:tabLst>
+            </a:pPr>
+            <a:fld id="{284FE48C-4E5C-4981-AFC9-16554F8E7640}" type="slidenum">
               <a:rPr lang="en-US" sz="1200" b="0" u="none" strike="noStrike">
                 <a:solidFill>
                   <a:srgbClr val="000000"/>
@@ -554,7 +567,7 @@
                 <a:uFillTx/>
                 <a:latin typeface="Times New Roman"/>
               </a:rPr>
-              <a:t>7</a:t>
+              <a:t>&lt;number&gt;</a:t>
             </a:fld>
             <a:endParaRPr lang="en-US" sz="1200" b="0" u="none" strike="noStrike">
               <a:solidFill>
@@ -602,7 +615,7 @@
         <p:spPr>
           <a:xfrm>
             <a:off x="1143000" y="685800"/>
-            <a:ext cx="4571640" cy="3428640"/>
+            <a:ext cx="4571280" cy="3428280"/>
           </a:xfrm>
           <a:prstGeom prst="rect">
             <a:avLst/>
@@ -625,7 +638,7 @@
         <p:spPr>
           <a:xfrm>
             <a:off x="685800" y="4343400"/>
-            <a:ext cx="5486040" cy="4114440"/>
+            <a:ext cx="5485680" cy="4114080"/>
           </a:xfrm>
           <a:prstGeom prst="rect">
             <a:avLst/>
@@ -645,6 +658,9 @@
                 <a:spcPct val="100000"/>
               </a:lnSpc>
               <a:buNone/>
+              <a:tabLst>
+                <a:tab pos="0" algn="l"/>
+              </a:tabLst>
             </a:pPr>
             <a:r>
               <a:rPr lang="en-US" sz="2000" b="0" u="none" strike="noStrike">
@@ -681,7 +697,7 @@
         <p:spPr>
           <a:xfrm>
             <a:off x="3884760" y="8685360"/>
-            <a:ext cx="2971440" cy="456840"/>
+            <a:ext cx="2971080" cy="456480"/>
           </a:xfrm>
           <a:prstGeom prst="rect">
             <a:avLst/>
@@ -701,6 +717,9 @@
                 <a:spcPct val="100000"/>
               </a:lnSpc>
               <a:buNone/>
+              <a:tabLst>
+                <a:tab pos="0" algn="l"/>
+              </a:tabLst>
               <a:defRPr lang="en-US" sz="1200" b="0" u="none" strike="noStrike">
                 <a:solidFill>
                   <a:srgbClr val="000000"/>
@@ -717,8 +736,11 @@
                 <a:spcPct val="100000"/>
               </a:lnSpc>
               <a:buNone/>
-            </a:pPr>
-            <a:fld id="{239A282B-9A01-46EA-B41C-0F7145A4FF7C}" type="slidenum">
+              <a:tabLst>
+                <a:tab pos="0" algn="l"/>
+              </a:tabLst>
+            </a:pPr>
+            <a:fld id="{21413870-9DD4-4711-956C-374D5AFE1400}" type="slidenum">
               <a:rPr lang="en-US" sz="1200" b="0" u="none" strike="noStrike">
                 <a:solidFill>
                   <a:srgbClr val="000000"/>
@@ -727,7 +749,7 @@
                 <a:uFillTx/>
                 <a:latin typeface="Times New Roman"/>
               </a:rPr>
-              <a:t>7</a:t>
+              <a:t>&lt;number&gt;</a:t>
             </a:fld>
             <a:endParaRPr lang="en-US" sz="1200" b="0" u="none" strike="noStrike">
               <a:solidFill>
@@ -775,7 +797,7 @@
         <p:spPr>
           <a:xfrm>
             <a:off x="1143000" y="685800"/>
-            <a:ext cx="4571640" cy="3428640"/>
+            <a:ext cx="4571280" cy="3428280"/>
           </a:xfrm>
           <a:prstGeom prst="rect">
             <a:avLst/>
@@ -798,7 +820,7 @@
         <p:spPr>
           <a:xfrm>
             <a:off x="685800" y="4343400"/>
-            <a:ext cx="5486040" cy="4114440"/>
+            <a:ext cx="5485680" cy="4114080"/>
           </a:xfrm>
           <a:prstGeom prst="rect">
             <a:avLst/>
@@ -818,6 +840,9 @@
                 <a:spcPct val="100000"/>
               </a:lnSpc>
               <a:buNone/>
+              <a:tabLst>
+                <a:tab pos="0" algn="l"/>
+              </a:tabLst>
             </a:pPr>
             <a:r>
               <a:rPr lang="en-US" sz="2000" b="0" u="none" strike="noStrike">
@@ -854,7 +879,7 @@
         <p:spPr>
           <a:xfrm>
             <a:off x="3884760" y="8685360"/>
-            <a:ext cx="2971440" cy="456840"/>
+            <a:ext cx="2971080" cy="456480"/>
           </a:xfrm>
           <a:prstGeom prst="rect">
             <a:avLst/>
@@ -874,6 +899,9 @@
                 <a:spcPct val="100000"/>
               </a:lnSpc>
               <a:buNone/>
+              <a:tabLst>
+                <a:tab pos="0" algn="l"/>
+              </a:tabLst>
               <a:defRPr lang="en-US" sz="1200" b="0" u="none" strike="noStrike">
                 <a:solidFill>
                   <a:srgbClr val="000000"/>
@@ -890,8 +918,11 @@
                 <a:spcPct val="100000"/>
               </a:lnSpc>
               <a:buNone/>
-            </a:pPr>
-            <a:fld id="{47106DA0-1F85-4D78-AC38-4A8DFCC4CCE2}" type="slidenum">
+              <a:tabLst>
+                <a:tab pos="0" algn="l"/>
+              </a:tabLst>
+            </a:pPr>
+            <a:fld id="{44C03AEB-C263-4960-9A57-AB9721CC9D3C}" type="slidenum">
               <a:rPr lang="en-US" sz="1200" b="0" u="none" strike="noStrike">
                 <a:solidFill>
                   <a:srgbClr val="000000"/>
@@ -900,7 +931,7 @@
                 <a:uFillTx/>
                 <a:latin typeface="Times New Roman"/>
               </a:rPr>
-              <a:t>7</a:t>
+              <a:t>&lt;number&gt;</a:t>
             </a:fld>
             <a:endParaRPr lang="en-US" sz="1200" b="0" u="none" strike="noStrike">
               <a:solidFill>
@@ -948,7 +979,7 @@
         <p:spPr>
           <a:xfrm>
             <a:off x="1143000" y="685800"/>
-            <a:ext cx="4571640" cy="3428640"/>
+            <a:ext cx="4571280" cy="3428280"/>
           </a:xfrm>
           <a:prstGeom prst="rect">
             <a:avLst/>
@@ -971,7 +1002,7 @@
         <p:spPr>
           <a:xfrm>
             <a:off x="685800" y="4343400"/>
-            <a:ext cx="5486040" cy="4114440"/>
+            <a:ext cx="5485680" cy="4114080"/>
           </a:xfrm>
           <a:prstGeom prst="rect">
             <a:avLst/>
@@ -991,6 +1022,9 @@
                 <a:spcPct val="100000"/>
               </a:lnSpc>
               <a:buNone/>
+              <a:tabLst>
+                <a:tab pos="0" algn="l"/>
+              </a:tabLst>
             </a:pPr>
             <a:r>
               <a:rPr lang="en-US" sz="2000" b="0" u="none" strike="noStrike">
@@ -1027,7 +1061,7 @@
         <p:spPr>
           <a:xfrm>
             <a:off x="3884760" y="8685360"/>
-            <a:ext cx="2971440" cy="456840"/>
+            <a:ext cx="2971080" cy="456480"/>
           </a:xfrm>
           <a:prstGeom prst="rect">
             <a:avLst/>
@@ -1047,6 +1081,9 @@
                 <a:spcPct val="100000"/>
               </a:lnSpc>
               <a:buNone/>
+              <a:tabLst>
+                <a:tab pos="0" algn="l"/>
+              </a:tabLst>
               <a:defRPr lang="en-US" sz="1200" b="0" u="none" strike="noStrike">
                 <a:solidFill>
                   <a:srgbClr val="000000"/>
@@ -1063,8 +1100,11 @@
                 <a:spcPct val="100000"/>
               </a:lnSpc>
               <a:buNone/>
-            </a:pPr>
-            <a:fld id="{F61CB9B1-0C4A-4C56-99A6-BF267B136347}" type="slidenum">
+              <a:tabLst>
+                <a:tab pos="0" algn="l"/>
+              </a:tabLst>
+            </a:pPr>
+            <a:fld id="{8A3C06C1-10CA-4CD0-9001-6F2510B1A56D}" type="slidenum">
               <a:rPr lang="en-US" sz="1200" b="0" u="none" strike="noStrike">
                 <a:solidFill>
                   <a:srgbClr val="000000"/>
@@ -1073,7 +1113,7 @@
                 <a:uFillTx/>
                 <a:latin typeface="Times New Roman"/>
               </a:rPr>
-              <a:t>7</a:t>
+              <a:t>&lt;number&gt;</a:t>
             </a:fld>
             <a:endParaRPr lang="en-US" sz="1200" b="0" u="none" strike="noStrike">
               <a:solidFill>
@@ -1121,7 +1161,7 @@
         <p:spPr>
           <a:xfrm>
             <a:off x="1143000" y="685800"/>
-            <a:ext cx="4571640" cy="3428640"/>
+            <a:ext cx="4571280" cy="3428280"/>
           </a:xfrm>
           <a:prstGeom prst="rect">
             <a:avLst/>
@@ -1144,7 +1184,7 @@
         <p:spPr>
           <a:xfrm>
             <a:off x="685800" y="4343400"/>
-            <a:ext cx="5486040" cy="4114440"/>
+            <a:ext cx="5485680" cy="4114080"/>
           </a:xfrm>
           <a:prstGeom prst="rect">
             <a:avLst/>
@@ -1164,6 +1204,9 @@
                 <a:spcPct val="100000"/>
               </a:lnSpc>
               <a:buNone/>
+              <a:tabLst>
+                <a:tab pos="0" algn="l"/>
+              </a:tabLst>
             </a:pPr>
             <a:r>
               <a:rPr lang="en-US" sz="2000" b="0" u="none" strike="noStrike">
@@ -1200,7 +1243,7 @@
         <p:spPr>
           <a:xfrm>
             <a:off x="3884760" y="8685360"/>
-            <a:ext cx="2971440" cy="456840"/>
+            <a:ext cx="2971080" cy="456480"/>
           </a:xfrm>
           <a:prstGeom prst="rect">
             <a:avLst/>
@@ -1220,6 +1263,9 @@
                 <a:spcPct val="100000"/>
               </a:lnSpc>
               <a:buNone/>
+              <a:tabLst>
+                <a:tab pos="0" algn="l"/>
+              </a:tabLst>
               <a:defRPr lang="en-US" sz="1200" b="0" u="none" strike="noStrike">
                 <a:solidFill>
                   <a:srgbClr val="000000"/>
@@ -1236,8 +1282,11 @@
                 <a:spcPct val="100000"/>
               </a:lnSpc>
               <a:buNone/>
-            </a:pPr>
-            <a:fld id="{2906B607-14E6-42A3-A626-A62E94454FD9}" type="slidenum">
+              <a:tabLst>
+                <a:tab pos="0" algn="l"/>
+              </a:tabLst>
+            </a:pPr>
+            <a:fld id="{F457B148-3FFF-4031-8630-E7F073A640D9}" type="slidenum">
               <a:rPr lang="en-US" sz="1200" b="0" u="none" strike="noStrike">
                 <a:solidFill>
                   <a:srgbClr val="000000"/>
@@ -1246,7 +1295,7 @@
                 <a:uFillTx/>
                 <a:latin typeface="Times New Roman"/>
               </a:rPr>
-              <a:t>7</a:t>
+              <a:t>&lt;number&gt;</a:t>
             </a:fld>
             <a:endParaRPr lang="en-US" sz="1200" b="0" u="none" strike="noStrike">
               <a:solidFill>
@@ -1294,7 +1343,7 @@
         <p:spPr>
           <a:xfrm>
             <a:off x="1143000" y="685800"/>
-            <a:ext cx="4571640" cy="3428640"/>
+            <a:ext cx="4571280" cy="3428280"/>
           </a:xfrm>
           <a:prstGeom prst="rect">
             <a:avLst/>
@@ -1317,7 +1366,7 @@
         <p:spPr>
           <a:xfrm>
             <a:off x="685800" y="4343400"/>
-            <a:ext cx="5486040" cy="4114440"/>
+            <a:ext cx="5485680" cy="4114080"/>
           </a:xfrm>
           <a:prstGeom prst="rect">
             <a:avLst/>
@@ -1337,6 +1386,9 @@
                 <a:spcPct val="100000"/>
               </a:lnSpc>
               <a:buNone/>
+              <a:tabLst>
+                <a:tab pos="0" algn="l"/>
+              </a:tabLst>
             </a:pPr>
             <a:r>
               <a:rPr lang="en-US" sz="2000" b="0" u="none" strike="noStrike">
@@ -1373,7 +1425,7 @@
         <p:spPr>
           <a:xfrm>
             <a:off x="3884760" y="8685360"/>
-            <a:ext cx="2971440" cy="456840"/>
+            <a:ext cx="2971080" cy="456480"/>
           </a:xfrm>
           <a:prstGeom prst="rect">
             <a:avLst/>
@@ -1393,6 +1445,9 @@
                 <a:spcPct val="100000"/>
               </a:lnSpc>
               <a:buNone/>
+              <a:tabLst>
+                <a:tab pos="0" algn="l"/>
+              </a:tabLst>
               <a:defRPr lang="en-US" sz="1200" b="0" u="none" strike="noStrike">
                 <a:solidFill>
                   <a:srgbClr val="000000"/>
@@ -1409,8 +1464,11 @@
                 <a:spcPct val="100000"/>
               </a:lnSpc>
               <a:buNone/>
-            </a:pPr>
-            <a:fld id="{20E6AC18-323D-408D-BE56-135E75F2D10B}" type="slidenum">
+              <a:tabLst>
+                <a:tab pos="0" algn="l"/>
+              </a:tabLst>
+            </a:pPr>
+            <a:fld id="{9CA98CB8-5F02-4492-8B65-C07C52CFF90B}" type="slidenum">
               <a:rPr lang="en-US" sz="1200" b="0" u="none" strike="noStrike">
                 <a:solidFill>
                   <a:srgbClr val="000000"/>
@@ -1419,7 +1477,7 @@
                 <a:uFillTx/>
                 <a:latin typeface="Times New Roman"/>
               </a:rPr>
-              <a:t>7</a:t>
+              <a:t>&lt;number&gt;</a:t>
             </a:fld>
             <a:endParaRPr lang="en-US" sz="1200" b="0" u="none" strike="noStrike">
               <a:solidFill>
@@ -1467,7 +1525,7 @@
         <p:spPr>
           <a:xfrm>
             <a:off x="1143000" y="685800"/>
-            <a:ext cx="4571640" cy="3428640"/>
+            <a:ext cx="4571280" cy="3428280"/>
           </a:xfrm>
           <a:prstGeom prst="rect">
             <a:avLst/>
@@ -1490,7 +1548,7 @@
         <p:spPr>
           <a:xfrm>
             <a:off x="685800" y="4343400"/>
-            <a:ext cx="5486040" cy="4114440"/>
+            <a:ext cx="5485680" cy="4114080"/>
           </a:xfrm>
           <a:prstGeom prst="rect">
             <a:avLst/>
@@ -1510,6 +1568,9 @@
                 <a:spcPct val="100000"/>
               </a:lnSpc>
               <a:buNone/>
+              <a:tabLst>
+                <a:tab pos="0" algn="l"/>
+              </a:tabLst>
             </a:pPr>
             <a:r>
               <a:rPr lang="en-US" sz="2000" b="0" u="none" strike="noStrike">
@@ -1546,7 +1607,7 @@
         <p:spPr>
           <a:xfrm>
             <a:off x="3884760" y="8685360"/>
-            <a:ext cx="2971440" cy="456840"/>
+            <a:ext cx="2971080" cy="456480"/>
           </a:xfrm>
           <a:prstGeom prst="rect">
             <a:avLst/>
@@ -1566,6 +1627,9 @@
                 <a:spcPct val="100000"/>
               </a:lnSpc>
               <a:buNone/>
+              <a:tabLst>
+                <a:tab pos="0" algn="l"/>
+              </a:tabLst>
               <a:defRPr lang="en-US" sz="1200" b="0" u="none" strike="noStrike">
                 <a:solidFill>
                   <a:srgbClr val="000000"/>
@@ -1582,8 +1646,11 @@
                 <a:spcPct val="100000"/>
               </a:lnSpc>
               <a:buNone/>
-            </a:pPr>
-            <a:fld id="{A87DEE69-3DAA-4BA8-9CDA-F8B28F0889EC}" type="slidenum">
+              <a:tabLst>
+                <a:tab pos="0" algn="l"/>
+              </a:tabLst>
+            </a:pPr>
+            <a:fld id="{A82A8F3A-7D21-4CFB-A427-95636829C740}" type="slidenum">
               <a:rPr lang="en-US" sz="1200" b="0" u="none" strike="noStrike">
                 <a:solidFill>
                   <a:srgbClr val="000000"/>
@@ -1592,7 +1659,7 @@
                 <a:uFillTx/>
                 <a:latin typeface="Times New Roman"/>
               </a:rPr>
-              <a:t>7</a:t>
+              <a:t>&lt;number&gt;</a:t>
             </a:fld>
             <a:endParaRPr lang="en-US" sz="1200" b="0" u="none" strike="noStrike">
               <a:solidFill>
@@ -1611,8 +1678,8 @@
 </file>
 
 <file path=ppt/slideLayouts/slideLayout1.xml><?xml version="1.0" encoding="utf-8"?>
-<p:sldLayout xmlns:a="http://schemas.openxmlformats.org/drawingml/2006/main" xmlns:p="http://schemas.openxmlformats.org/presentationml/2006/main" xmlns:r="http://schemas.openxmlformats.org/officeDocument/2006/relationships" xmlns:p14="http://schemas.microsoft.com/office/powerpoint/2010/main" xmlns:p15="http://schemas.microsoft.com/office/powerpoint/2012/main" xmlns:mc="http://schemas.openxmlformats.org/markup-compatibility/2006" type="title" preserve="1">
-  <p:cSld name="Title Slide">
+<p:sldLayout xmlns:a="http://schemas.openxmlformats.org/drawingml/2006/main" xmlns:p="http://schemas.openxmlformats.org/presentationml/2006/main" xmlns:r="http://schemas.openxmlformats.org/officeDocument/2006/relationships" xmlns:p14="http://schemas.microsoft.com/office/powerpoint/2010/main" xmlns:p15="http://schemas.microsoft.com/office/powerpoint/2012/main" xmlns:mc="http://schemas.openxmlformats.org/markup-compatibility/2006" type="blank" preserve="1">
+  <p:cSld name="Blank">
     <p:bg>
       <p:bgPr>
         <a:solidFill>
@@ -1641,96 +1708,13 @@
             <a:spLocks noGrp="1"/>
           </p:cNvSpPr>
           <p:nvPr>
-            <p:ph type="title"/>
-          </p:nvPr>
-        </p:nvSpPr>
-        <p:spPr>
-          <a:xfrm>
-            <a:off x="685800" y="2130480"/>
-            <a:ext cx="7772040" cy="1469520"/>
-          </a:xfrm>
-          <a:prstGeom prst="rect">
-            <a:avLst/>
-          </a:prstGeom>
-          <a:noFill/>
-          <a:ln w="0">
-            <a:noFill/>
-          </a:ln>
-        </p:spPr>
-        <p:txBody>
-          <a:bodyPr lIns="91440" tIns="45720" rIns="91440" bIns="45720" anchor="ctr">
-            <a:noAutofit/>
-          </a:bodyPr>
-          <a:lstStyle>
-            <a:lvl1pPr indent="0" algn="ctr" defTabSz="457200">
-              <a:lnSpc>
-                <a:spcPct val="100000"/>
-              </a:lnSpc>
-              <a:buNone/>
-              <a:defRPr lang="en-US" sz="4400" b="0" u="none" strike="noStrike">
-                <a:solidFill>
-                  <a:schemeClr val="dk1"/>
-                </a:solidFill>
-                <a:effectLst/>
-                <a:uFillTx/>
-                <a:latin typeface="Calibri"/>
-              </a:defRPr>
-            </a:lvl1pPr>
-          </a:lstStyle>
-          <a:p>
-            <a:pPr indent="0" algn="ctr" defTabSz="457200">
-              <a:lnSpc>
-                <a:spcPct val="100000"/>
-              </a:lnSpc>
-              <a:buNone/>
-            </a:pPr>
-            <a:r>
-              <a:rPr lang="en-US" sz="4400" b="0" u="none" strike="noStrike">
-                <a:solidFill>
-                  <a:schemeClr val="dk1"/>
-                </a:solidFill>
-                <a:effectLst/>
-                <a:uFillTx/>
-                <a:latin typeface="Calibri"/>
-              </a:rPr>
-              <a:t>Click to edit Master </a:t>
-            </a:r>
-            <a:r>
-              <a:rPr lang="en-US" sz="4400" b="0" u="none" strike="noStrike">
-                <a:solidFill>
-                  <a:schemeClr val="dk1"/>
-                </a:solidFill>
-                <a:effectLst/>
-                <a:uFillTx/>
-                <a:latin typeface="Calibri"/>
-              </a:rPr>
-              <a:t>title style</a:t>
-            </a:r>
-            <a:endParaRPr lang="en-US" sz="4400" b="0" u="none" strike="noStrike">
-              <a:solidFill>
-                <a:schemeClr val="dk1"/>
-              </a:solidFill>
-              <a:effectLst/>
-              <a:uFillTx/>
-              <a:latin typeface="Calibri"/>
-            </a:endParaRPr>
-          </a:p>
-        </p:txBody>
-      </p:sp>
-      <p:sp>
-        <p:nvSpPr>
-          <p:cNvPr id="3" name="PlaceHolder 2"/>
-          <p:cNvSpPr>
-            <a:spLocks noGrp="1"/>
-          </p:cNvSpPr>
-          <p:nvPr>
             <p:ph type="dt" idx="1"/>
           </p:nvPr>
         </p:nvSpPr>
         <p:spPr>
           <a:xfrm>
             <a:off x="457200" y="6356520"/>
-            <a:ext cx="2133360" cy="364680"/>
+            <a:ext cx="2133000" cy="364320"/>
           </a:xfrm>
           <a:prstGeom prst="rect">
             <a:avLst/>
@@ -1750,6 +1734,9 @@
                 <a:spcPct val="100000"/>
               </a:lnSpc>
               <a:buNone/>
+              <a:tabLst>
+                <a:tab pos="0" algn="l"/>
+              </a:tabLst>
               <a:defRPr lang="en-US" sz="1200" b="0" u="none" strike="noStrike">
                 <a:solidFill>
                   <a:schemeClr val="dk1">
@@ -1768,6 +1755,9 @@
                 <a:spcPct val="100000"/>
               </a:lnSpc>
               <a:buNone/>
+              <a:tabLst>
+                <a:tab pos="0" algn="l"/>
+              </a:tabLst>
             </a:pPr>
             <a:r>
               <a:rPr lang="en-US" sz="1200" b="0" u="none" strike="noStrike">
@@ -1795,7 +1785,7 @@
       </p:sp>
       <p:sp>
         <p:nvSpPr>
-          <p:cNvPr id="4" name="PlaceHolder 3"/>
+          <p:cNvPr id="3" name="PlaceHolder 2"/>
           <p:cNvSpPr>
             <a:spLocks noGrp="1"/>
           </p:cNvSpPr>
@@ -1806,7 +1796,7 @@
         <p:spPr>
           <a:xfrm>
             <a:off x="3124080" y="6356520"/>
-            <a:ext cx="2895120" cy="364680"/>
+            <a:ext cx="2894760" cy="364320"/>
           </a:xfrm>
           <a:prstGeom prst="rect">
             <a:avLst/>
@@ -1822,7 +1812,13 @@
           </a:bodyPr>
           <a:lstStyle>
             <a:lvl1pPr indent="0" algn="ctr">
+              <a:lnSpc>
+                <a:spcPct val="100000"/>
+              </a:lnSpc>
               <a:buNone/>
+              <a:tabLst>
+                <a:tab pos="0" algn="l"/>
+              </a:tabLst>
               <a:defRPr lang="en-US" sz="1400" b="0" u="none" strike="noStrike">
                 <a:solidFill>
                   <a:srgbClr val="000000"/>
@@ -1835,7 +1831,13 @@
           </a:lstStyle>
           <a:p>
             <a:pPr indent="0" algn="ctr">
+              <a:lnSpc>
+                <a:spcPct val="100000"/>
+              </a:lnSpc>
               <a:buNone/>
+              <a:tabLst>
+                <a:tab pos="0" algn="l"/>
+              </a:tabLst>
             </a:pPr>
             <a:r>
               <a:rPr lang="en-US" sz="1400" b="0" u="none" strike="noStrike">
@@ -1861,7 +1863,7 @@
       </p:sp>
       <p:sp>
         <p:nvSpPr>
-          <p:cNvPr id="5" name="PlaceHolder 4"/>
+          <p:cNvPr id="4" name="PlaceHolder 3"/>
           <p:cNvSpPr>
             <a:spLocks noGrp="1"/>
           </p:cNvSpPr>
@@ -1872,7 +1874,7 @@
         <p:spPr>
           <a:xfrm>
             <a:off x="6553080" y="6356520"/>
-            <a:ext cx="2133360" cy="364680"/>
+            <a:ext cx="2133000" cy="364320"/>
           </a:xfrm>
           <a:prstGeom prst="rect">
             <a:avLst/>
@@ -1892,6 +1894,9 @@
                 <a:spcPct val="100000"/>
               </a:lnSpc>
               <a:buNone/>
+              <a:tabLst>
+                <a:tab pos="0" algn="l"/>
+              </a:tabLst>
               <a:defRPr lang="en-US" sz="1200" b="0" u="none" strike="noStrike">
                 <a:solidFill>
                   <a:schemeClr val="dk1">
@@ -1910,8 +1915,11 @@
                 <a:spcPct val="100000"/>
               </a:lnSpc>
               <a:buNone/>
-            </a:pPr>
-            <a:fld id="{D0AF97F1-5C17-4E45-B131-447F6C0998DD}" type="slidenum">
+              <a:tabLst>
+                <a:tab pos="0" algn="l"/>
+              </a:tabLst>
+            </a:pPr>
+            <a:fld id="{FE412C60-76C0-4ADB-BA51-8C8A10A42005}" type="slidenum">
               <a:rPr lang="en-US" sz="1200" b="0" u="none" strike="noStrike">
                 <a:solidFill>
                   <a:schemeClr val="dk1">
@@ -1931,6 +1939,512 @@
               <a:effectLst/>
               <a:uFillTx/>
               <a:latin typeface="Times New Roman"/>
+            </a:endParaRPr>
+          </a:p>
+        </p:txBody>
+      </p:sp>
+      <p:sp>
+        <p:nvSpPr>
+          <p:cNvPr id="5" name="PlaceHolder 4"/>
+          <p:cNvSpPr>
+            <a:spLocks noGrp="1"/>
+          </p:cNvSpPr>
+          <p:nvPr>
+            <p:ph type="title"/>
+          </p:nvPr>
+        </p:nvSpPr>
+        <p:spPr>
+          <a:xfrm>
+            <a:off x="609480" y="273600"/>
+            <a:ext cx="10971720" cy="1144440"/>
+          </a:xfrm>
+          <a:prstGeom prst="rect">
+            <a:avLst/>
+          </a:prstGeom>
+          <a:noFill/>
+          <a:ln w="0">
+            <a:noFill/>
+          </a:ln>
+        </p:spPr>
+        <p:txBody>
+          <a:bodyPr lIns="0" tIns="0" rIns="0" bIns="0" anchor="ctr">
+            <a:noAutofit/>
+          </a:bodyPr>
+          <a:lstStyle>
+            <a:lvl1pPr indent="0" algn="ctr" defTabSz="457200">
+              <a:lnSpc>
+                <a:spcPct val="100000"/>
+              </a:lnSpc>
+              <a:buNone/>
+              <a:tabLst>
+                <a:tab pos="0" algn="l"/>
+              </a:tabLst>
+              <a:defRPr lang="en-US" sz="4400" b="0" u="none" strike="noStrike">
+                <a:solidFill>
+                  <a:schemeClr val="dk1"/>
+                </a:solidFill>
+                <a:effectLst/>
+                <a:uFillTx/>
+                <a:latin typeface="Calibri"/>
+              </a:defRPr>
+            </a:lvl1pPr>
+          </a:lstStyle>
+          <a:p>
+            <a:pPr indent="0" algn="ctr" defTabSz="457200">
+              <a:lnSpc>
+                <a:spcPct val="100000"/>
+              </a:lnSpc>
+              <a:buNone/>
+              <a:tabLst>
+                <a:tab pos="0" algn="l"/>
+              </a:tabLst>
+            </a:pPr>
+            <a:r>
+              <a:rPr lang="en-US" sz="4400" b="0" u="none" strike="noStrike">
+                <a:solidFill>
+                  <a:schemeClr val="dk1"/>
+                </a:solidFill>
+                <a:effectLst/>
+                <a:uFillTx/>
+                <a:latin typeface="Calibri"/>
+              </a:rPr>
+              <a:t>Click to edit the title text format</a:t>
+            </a:r>
+            <a:endParaRPr lang="en-US" sz="4400" b="0" u="none" strike="noStrike">
+              <a:solidFill>
+                <a:schemeClr val="dk1"/>
+              </a:solidFill>
+              <a:effectLst/>
+              <a:uFillTx/>
+              <a:latin typeface="Calibri"/>
+            </a:endParaRPr>
+          </a:p>
+        </p:txBody>
+      </p:sp>
+      <p:sp>
+        <p:nvSpPr>
+          <p:cNvPr id="6" name="PlaceHolder 5"/>
+          <p:cNvSpPr>
+            <a:spLocks noGrp="1"/>
+          </p:cNvSpPr>
+          <p:nvPr>
+            <p:ph type="body"/>
+          </p:nvPr>
+        </p:nvSpPr>
+        <p:spPr>
+          <a:xfrm>
+            <a:off x="609480" y="1604520"/>
+            <a:ext cx="10971720" cy="3976920"/>
+          </a:xfrm>
+          <a:prstGeom prst="rect">
+            <a:avLst/>
+          </a:prstGeom>
+          <a:noFill/>
+          <a:ln w="0">
+            <a:noFill/>
+          </a:ln>
+        </p:spPr>
+        <p:txBody>
+          <a:bodyPr lIns="0" tIns="0" rIns="0" bIns="0" anchor="t">
+            <a:normAutofit/>
+          </a:bodyPr>
+          <a:lstStyle>
+            <a:lvl1pPr algn="l" defTabSz="457200">
+              <a:lnSpc>
+                <a:spcPct val="100000"/>
+              </a:lnSpc>
+              <a:spcBef>
+                <a:spcPts val="641"/>
+              </a:spcBef>
+              <a:buClr>
+                <a:srgbClr val="000000"/>
+              </a:buClr>
+              <a:buFont typeface="Arial"/>
+              <a:buChar char="•"/>
+              <a:defRPr lang="en-US" sz="3200" b="0" u="none" strike="noStrike">
+                <a:solidFill>
+                  <a:schemeClr val="dk1"/>
+                </a:solidFill>
+                <a:effectLst/>
+                <a:uFillTx/>
+                <a:latin typeface="Calibri"/>
+              </a:defRPr>
+            </a:lvl1pPr>
+            <a:lvl2pPr lvl="1" algn="l" defTabSz="457200">
+              <a:lnSpc>
+                <a:spcPct val="100000"/>
+              </a:lnSpc>
+              <a:spcBef>
+                <a:spcPts val="561"/>
+              </a:spcBef>
+              <a:buClr>
+                <a:srgbClr val="000000"/>
+              </a:buClr>
+              <a:buSzPct val="75000"/>
+              <a:buFont typeface="Symbol" charset="2"/>
+              <a:buChar char=""/>
+              <a:defRPr lang="en-US" sz="2800" b="0" u="none" strike="noStrike">
+                <a:solidFill>
+                  <a:schemeClr val="dk1"/>
+                </a:solidFill>
+                <a:effectLst/>
+                <a:uFillTx/>
+                <a:latin typeface="Calibri"/>
+              </a:defRPr>
+            </a:lvl2pPr>
+            <a:lvl3pPr lvl="2" algn="l" defTabSz="457200">
+              <a:lnSpc>
+                <a:spcPct val="100000"/>
+              </a:lnSpc>
+              <a:spcBef>
+                <a:spcPts val="479"/>
+              </a:spcBef>
+              <a:buClr>
+                <a:srgbClr val="000000"/>
+              </a:buClr>
+              <a:buSzPct val="45000"/>
+              <a:buFont typeface="Wingdings" charset="2"/>
+              <a:buChar char=""/>
+              <a:defRPr lang="en-US" sz="2400" b="0" u="none" strike="noStrike">
+                <a:solidFill>
+                  <a:schemeClr val="dk1"/>
+                </a:solidFill>
+                <a:effectLst/>
+                <a:uFillTx/>
+                <a:latin typeface="Calibri"/>
+              </a:defRPr>
+            </a:lvl3pPr>
+            <a:lvl4pPr lvl="3" algn="l" defTabSz="457200">
+              <a:lnSpc>
+                <a:spcPct val="100000"/>
+              </a:lnSpc>
+              <a:spcBef>
+                <a:spcPts val="400"/>
+              </a:spcBef>
+              <a:buClr>
+                <a:srgbClr val="000000"/>
+              </a:buClr>
+              <a:buSzPct val="75000"/>
+              <a:buFont typeface="Symbol" charset="2"/>
+              <a:buChar char=""/>
+              <a:defRPr lang="en-US" sz="2000" b="0" u="none" strike="noStrike">
+                <a:solidFill>
+                  <a:schemeClr val="dk1"/>
+                </a:solidFill>
+                <a:effectLst/>
+                <a:uFillTx/>
+                <a:latin typeface="Calibri"/>
+              </a:defRPr>
+            </a:lvl4pPr>
+            <a:lvl5pPr lvl="4" algn="l" defTabSz="457200">
+              <a:lnSpc>
+                <a:spcPct val="100000"/>
+              </a:lnSpc>
+              <a:spcBef>
+                <a:spcPts val="400"/>
+              </a:spcBef>
+              <a:buClr>
+                <a:srgbClr val="000000"/>
+              </a:buClr>
+              <a:buSzPct val="45000"/>
+              <a:buFont typeface="Wingdings" charset="2"/>
+              <a:buChar char=""/>
+              <a:defRPr lang="en-US" sz="2000" b="0" u="none" strike="noStrike">
+                <a:solidFill>
+                  <a:schemeClr val="dk1"/>
+                </a:solidFill>
+                <a:effectLst/>
+                <a:uFillTx/>
+                <a:latin typeface="Calibri"/>
+              </a:defRPr>
+            </a:lvl5pPr>
+            <a:lvl6pPr lvl="5" algn="l" defTabSz="457200">
+              <a:lnSpc>
+                <a:spcPct val="100000"/>
+              </a:lnSpc>
+              <a:spcBef>
+                <a:spcPts val="283"/>
+              </a:spcBef>
+              <a:buClr>
+                <a:srgbClr val="000000"/>
+              </a:buClr>
+              <a:buSzPct val="45000"/>
+              <a:buFont typeface="Wingdings" charset="2"/>
+              <a:buChar char=""/>
+              <a:defRPr lang="en-US" sz="2000" b="0" u="none" strike="noStrike">
+                <a:solidFill>
+                  <a:schemeClr val="dk1"/>
+                </a:solidFill>
+                <a:effectLst/>
+                <a:uFillTx/>
+                <a:latin typeface="Calibri"/>
+              </a:defRPr>
+            </a:lvl6pPr>
+            <a:lvl7pPr lvl="6" algn="l" defTabSz="457200">
+              <a:lnSpc>
+                <a:spcPct val="100000"/>
+              </a:lnSpc>
+              <a:spcBef>
+                <a:spcPts val="283"/>
+              </a:spcBef>
+              <a:buClr>
+                <a:srgbClr val="000000"/>
+              </a:buClr>
+              <a:buSzPct val="45000"/>
+              <a:buFont typeface="Wingdings" charset="2"/>
+              <a:buChar char=""/>
+              <a:defRPr lang="en-US" sz="2000" b="0" u="none" strike="noStrike">
+                <a:solidFill>
+                  <a:schemeClr val="dk1"/>
+                </a:solidFill>
+                <a:effectLst/>
+                <a:uFillTx/>
+                <a:latin typeface="Calibri"/>
+              </a:defRPr>
+            </a:lvl7pPr>
+          </a:lstStyle>
+          <a:p>
+            <a:pPr marL="343080" indent="-343080" algn="l" defTabSz="457200">
+              <a:lnSpc>
+                <a:spcPct val="100000"/>
+              </a:lnSpc>
+              <a:spcBef>
+                <a:spcPts val="641"/>
+              </a:spcBef>
+              <a:buClr>
+                <a:srgbClr val="000000"/>
+              </a:buClr>
+              <a:buFont typeface="Arial"/>
+              <a:buChar char="•"/>
+            </a:pPr>
+            <a:r>
+              <a:rPr lang="en-US" sz="3200" b="0" u="none" strike="noStrike">
+                <a:solidFill>
+                  <a:schemeClr val="dk1"/>
+                </a:solidFill>
+                <a:effectLst/>
+                <a:uFillTx/>
+                <a:latin typeface="Calibri"/>
+              </a:rPr>
+              <a:t>Click to edit the outline text format</a:t>
+            </a:r>
+            <a:endParaRPr lang="en-US" sz="3200" b="0" u="none" strike="noStrike">
+              <a:solidFill>
+                <a:schemeClr val="dk1"/>
+              </a:solidFill>
+              <a:effectLst/>
+              <a:uFillTx/>
+              <a:latin typeface="Calibri"/>
+            </a:endParaRPr>
+          </a:p>
+          <a:p>
+            <a:pPr marL="864000" lvl="1" indent="-324000" algn="l" defTabSz="457200">
+              <a:lnSpc>
+                <a:spcPct val="100000"/>
+              </a:lnSpc>
+              <a:spcBef>
+                <a:spcPts val="561"/>
+              </a:spcBef>
+              <a:buClr>
+                <a:srgbClr val="000000"/>
+              </a:buClr>
+              <a:buSzPct val="75000"/>
+              <a:buFont typeface="Symbol" charset="2"/>
+              <a:buChar char=""/>
+            </a:pPr>
+            <a:r>
+              <a:rPr lang="en-US" sz="2800" b="0" u="none" strike="noStrike">
+                <a:solidFill>
+                  <a:schemeClr val="dk1"/>
+                </a:solidFill>
+                <a:effectLst/>
+                <a:uFillTx/>
+                <a:latin typeface="Calibri"/>
+              </a:rPr>
+              <a:t>Second Outline Level</a:t>
+            </a:r>
+            <a:endParaRPr lang="en-US" sz="2800" b="0" u="none" strike="noStrike">
+              <a:solidFill>
+                <a:schemeClr val="dk1"/>
+              </a:solidFill>
+              <a:effectLst/>
+              <a:uFillTx/>
+              <a:latin typeface="Calibri"/>
+            </a:endParaRPr>
+          </a:p>
+          <a:p>
+            <a:pPr marL="1296000" lvl="2" indent="-288000" algn="l" defTabSz="457200">
+              <a:lnSpc>
+                <a:spcPct val="100000"/>
+              </a:lnSpc>
+              <a:spcBef>
+                <a:spcPts val="479"/>
+              </a:spcBef>
+              <a:buClr>
+                <a:srgbClr val="000000"/>
+              </a:buClr>
+              <a:buSzPct val="45000"/>
+              <a:buFont typeface="Wingdings" charset="2"/>
+              <a:buChar char=""/>
+            </a:pPr>
+            <a:r>
+              <a:rPr lang="en-US" sz="2400" b="0" u="none" strike="noStrike">
+                <a:solidFill>
+                  <a:schemeClr val="dk1"/>
+                </a:solidFill>
+                <a:effectLst/>
+                <a:uFillTx/>
+                <a:latin typeface="Calibri"/>
+              </a:rPr>
+              <a:t>Third Outline Level</a:t>
+            </a:r>
+            <a:endParaRPr lang="en-US" sz="2400" b="0" u="none" strike="noStrike">
+              <a:solidFill>
+                <a:schemeClr val="dk1"/>
+              </a:solidFill>
+              <a:effectLst/>
+              <a:uFillTx/>
+              <a:latin typeface="Calibri"/>
+            </a:endParaRPr>
+          </a:p>
+          <a:p>
+            <a:pPr marL="1728000" lvl="3" indent="-216000" algn="l" defTabSz="457200">
+              <a:lnSpc>
+                <a:spcPct val="100000"/>
+              </a:lnSpc>
+              <a:spcBef>
+                <a:spcPts val="400"/>
+              </a:spcBef>
+              <a:buClr>
+                <a:srgbClr val="000000"/>
+              </a:buClr>
+              <a:buSzPct val="75000"/>
+              <a:buFont typeface="Symbol" charset="2"/>
+              <a:buChar char=""/>
+            </a:pPr>
+            <a:r>
+              <a:rPr lang="en-US" sz="2000" b="0" u="none" strike="noStrike">
+                <a:solidFill>
+                  <a:schemeClr val="dk1"/>
+                </a:solidFill>
+                <a:effectLst/>
+                <a:uFillTx/>
+                <a:latin typeface="Calibri"/>
+              </a:rPr>
+              <a:t>Fourth Outline Level</a:t>
+            </a:r>
+            <a:endParaRPr lang="en-US" sz="2000" b="0" u="none" strike="noStrike">
+              <a:solidFill>
+                <a:schemeClr val="dk1"/>
+              </a:solidFill>
+              <a:effectLst/>
+              <a:uFillTx/>
+              <a:latin typeface="Calibri"/>
+            </a:endParaRPr>
+          </a:p>
+          <a:p>
+            <a:pPr marL="2160000" lvl="4" indent="-216000" algn="l" defTabSz="457200">
+              <a:lnSpc>
+                <a:spcPct val="100000"/>
+              </a:lnSpc>
+              <a:spcBef>
+                <a:spcPts val="400"/>
+              </a:spcBef>
+              <a:buClr>
+                <a:srgbClr val="000000"/>
+              </a:buClr>
+              <a:buSzPct val="45000"/>
+              <a:buFont typeface="Wingdings" charset="2"/>
+              <a:buChar char=""/>
+            </a:pPr>
+            <a:r>
+              <a:rPr lang="en-US" sz="2000" b="0" u="none" strike="noStrike">
+                <a:solidFill>
+                  <a:schemeClr val="dk1"/>
+                </a:solidFill>
+                <a:effectLst/>
+                <a:uFillTx/>
+                <a:latin typeface="Calibri"/>
+              </a:rPr>
+              <a:t>Fifth Outline Level</a:t>
+            </a:r>
+            <a:endParaRPr lang="en-US" sz="2000" b="0" u="none" strike="noStrike">
+              <a:solidFill>
+                <a:schemeClr val="dk1"/>
+              </a:solidFill>
+              <a:effectLst/>
+              <a:uFillTx/>
+              <a:latin typeface="Calibri"/>
+            </a:endParaRPr>
+          </a:p>
+          <a:p>
+            <a:pPr marL="2592000" lvl="5" indent="-216000" algn="l" defTabSz="457200">
+              <a:lnSpc>
+                <a:spcPct val="100000"/>
+              </a:lnSpc>
+              <a:spcBef>
+                <a:spcPts val="283"/>
+              </a:spcBef>
+              <a:buClr>
+                <a:srgbClr val="000000"/>
+              </a:buClr>
+              <a:buSzPct val="45000"/>
+              <a:buFont typeface="Wingdings" charset="2"/>
+              <a:buChar char=""/>
+            </a:pPr>
+            <a:r>
+              <a:rPr lang="en-US" sz="2000" b="0" u="none" strike="noStrike">
+                <a:solidFill>
+                  <a:schemeClr val="dk1"/>
+                </a:solidFill>
+                <a:effectLst/>
+                <a:uFillTx/>
+                <a:latin typeface="Calibri"/>
+              </a:rPr>
+              <a:t>Sixth Outline Level</a:t>
+            </a:r>
+            <a:endParaRPr lang="en-US" sz="2000" b="0" u="none" strike="noStrike">
+              <a:solidFill>
+                <a:schemeClr val="dk1"/>
+              </a:solidFill>
+              <a:effectLst/>
+              <a:uFillTx/>
+              <a:latin typeface="Calibri"/>
+            </a:endParaRPr>
+          </a:p>
+          <a:p>
+            <a:pPr marL="3024000" lvl="6" indent="-216000" algn="l" defTabSz="457200">
+              <a:lnSpc>
+                <a:spcPct val="100000"/>
+              </a:lnSpc>
+              <a:spcBef>
+                <a:spcPts val="283"/>
+              </a:spcBef>
+              <a:buClr>
+                <a:srgbClr val="000000"/>
+              </a:buClr>
+              <a:buSzPct val="45000"/>
+              <a:buFont typeface="Wingdings" charset="2"/>
+              <a:buChar char=""/>
+            </a:pPr>
+            <a:r>
+              <a:rPr lang="en-US" sz="2000" b="0" u="none" strike="noStrike">
+                <a:solidFill>
+                  <a:schemeClr val="dk1"/>
+                </a:solidFill>
+                <a:effectLst/>
+                <a:uFillTx/>
+                <a:latin typeface="Calibri"/>
+              </a:rPr>
+              <a:t>Seventh Outline Level</a:t>
+            </a:r>
+            <a:endParaRPr lang="en-US" sz="2000" b="0" u="none" strike="noStrike">
+              <a:solidFill>
+                <a:schemeClr val="dk1"/>
+              </a:solidFill>
+              <a:effectLst/>
+              <a:uFillTx/>
+              <a:latin typeface="Calibri"/>
             </a:endParaRPr>
           </a:p>
         </p:txBody>
@@ -1945,7 +2459,7 @@
 
 <file path=ppt/slideLayouts/slideLayout10.xml><?xml version="1.0" encoding="utf-8"?>
 <p:sldLayout xmlns:a="http://schemas.openxmlformats.org/drawingml/2006/main" xmlns:p="http://schemas.openxmlformats.org/presentationml/2006/main" xmlns:r="http://schemas.openxmlformats.org/officeDocument/2006/relationships" xmlns:p14="http://schemas.microsoft.com/office/powerpoint/2010/main" xmlns:p15="http://schemas.microsoft.com/office/powerpoint/2012/main" xmlns:mc="http://schemas.openxmlformats.org/markup-compatibility/2006" type="blank" preserve="1">
-  <p:cSld name="Content with Caption">
+  <p:cSld name="Comparison">
     <p:bg>
       <p:bgPr>
         <a:solidFill>
@@ -1979,8 +2493,86 @@
         </p:nvSpPr>
         <p:spPr>
           <a:xfrm>
-            <a:off x="457200" y="272880"/>
-            <a:ext cx="3007800" cy="1161720"/>
+            <a:off x="457200" y="274680"/>
+            <a:ext cx="8228880" cy="1142280"/>
+          </a:xfrm>
+          <a:prstGeom prst="rect">
+            <a:avLst/>
+          </a:prstGeom>
+          <a:noFill/>
+          <a:ln w="0">
+            <a:noFill/>
+          </a:ln>
+        </p:spPr>
+        <p:txBody>
+          <a:bodyPr lIns="91440" tIns="45720" rIns="91440" bIns="45720" anchor="ctr">
+            <a:noAutofit/>
+          </a:bodyPr>
+          <a:lstStyle>
+            <a:lvl1pPr indent="0" algn="ctr" defTabSz="457200">
+              <a:lnSpc>
+                <a:spcPct val="100000"/>
+              </a:lnSpc>
+              <a:buNone/>
+              <a:tabLst>
+                <a:tab pos="0" algn="l"/>
+              </a:tabLst>
+              <a:defRPr lang="en-US" sz="4400" b="0" u="none" strike="noStrike">
+                <a:solidFill>
+                  <a:schemeClr val="dk1"/>
+                </a:solidFill>
+                <a:effectLst/>
+                <a:uFillTx/>
+                <a:latin typeface="Calibri"/>
+              </a:defRPr>
+            </a:lvl1pPr>
+          </a:lstStyle>
+          <a:p>
+            <a:pPr indent="0" algn="ctr" defTabSz="457200">
+              <a:lnSpc>
+                <a:spcPct val="100000"/>
+              </a:lnSpc>
+              <a:buNone/>
+              <a:tabLst>
+                <a:tab pos="0" algn="l"/>
+              </a:tabLst>
+            </a:pPr>
+            <a:r>
+              <a:rPr lang="en-US" sz="4400" b="0" u="none" strike="noStrike">
+                <a:solidFill>
+                  <a:schemeClr val="dk1"/>
+                </a:solidFill>
+                <a:effectLst/>
+                <a:uFillTx/>
+                <a:latin typeface="Calibri"/>
+              </a:rPr>
+              <a:t>Click to edit Master title style</a:t>
+            </a:r>
+            <a:endParaRPr lang="en-US" sz="4400" b="0" u="none" strike="noStrike">
+              <a:solidFill>
+                <a:schemeClr val="dk1"/>
+              </a:solidFill>
+              <a:effectLst/>
+              <a:uFillTx/>
+              <a:latin typeface="Calibri"/>
+            </a:endParaRPr>
+          </a:p>
+        </p:txBody>
+      </p:sp>
+      <p:sp>
+        <p:nvSpPr>
+          <p:cNvPr id="50" name="PlaceHolder 2"/>
+          <p:cNvSpPr>
+            <a:spLocks noGrp="1"/>
+          </p:cNvSpPr>
+          <p:nvPr>
+            <p:ph type="body"/>
+          </p:nvPr>
+        </p:nvSpPr>
+        <p:spPr>
+          <a:xfrm>
+            <a:off x="457200" y="1535040"/>
+            <a:ext cx="4039560" cy="639000"/>
           </a:xfrm>
           <a:prstGeom prst="rect">
             <a:avLst/>
@@ -1999,8 +2591,14 @@
               <a:lnSpc>
                 <a:spcPct val="100000"/>
               </a:lnSpc>
+              <a:spcBef>
+                <a:spcPts val="479"/>
+              </a:spcBef>
               <a:buNone/>
-              <a:defRPr lang="en-US" sz="2000" b="1" u="none" strike="noStrike">
+              <a:tabLst>
+                <a:tab pos="0" algn="l"/>
+              </a:tabLst>
+              <a:defRPr lang="en-US" sz="2400" b="1" u="none" strike="noStrike">
                 <a:solidFill>
                   <a:schemeClr val="dk1"/>
                 </a:solidFill>
@@ -2015,10 +2613,16 @@
               <a:lnSpc>
                 <a:spcPct val="100000"/>
               </a:lnSpc>
+              <a:spcBef>
+                <a:spcPts val="479"/>
+              </a:spcBef>
               <a:buNone/>
-            </a:pPr>
-            <a:r>
-              <a:rPr lang="en-US" sz="2000" b="1" u="none" strike="noStrike">
+              <a:tabLst>
+                <a:tab pos="0" algn="l"/>
+              </a:tabLst>
+            </a:pPr>
+            <a:r>
+              <a:rPr lang="en-US" sz="2400" b="1" u="none" strike="noStrike">
                 <a:solidFill>
                   <a:schemeClr val="dk1"/>
                 </a:solidFill>
@@ -2026,9 +2630,9 @@
                 <a:uFillTx/>
                 <a:latin typeface="Calibri"/>
               </a:rPr>
-              <a:t>Click to edit Master title style</a:t>
-            </a:r>
-            <a:endParaRPr lang="en-US" sz="2000" b="1" u="none" strike="noStrike">
+              <a:t>Click to edit Master text styles</a:t>
+            </a:r>
+            <a:endParaRPr lang="en-US" sz="2400" b="0" u="none" strike="noStrike">
               <a:solidFill>
                 <a:schemeClr val="dk1"/>
               </a:solidFill>
@@ -2041,7 +2645,7 @@
       </p:sp>
       <p:sp>
         <p:nvSpPr>
-          <p:cNvPr id="50" name="PlaceHolder 2"/>
+          <p:cNvPr id="51" name="PlaceHolder 3"/>
           <p:cNvSpPr>
             <a:spLocks noGrp="1"/>
           </p:cNvSpPr>
@@ -2051,8 +2655,8 @@
         </p:nvSpPr>
         <p:spPr>
           <a:xfrm>
-            <a:off x="3575160" y="272880"/>
-            <a:ext cx="5111280" cy="5852880"/>
+            <a:off x="457200" y="2174760"/>
+            <a:ext cx="4039560" cy="3950640"/>
           </a:xfrm>
           <a:prstGeom prst="rect">
             <a:avLst/>
@@ -2072,6 +2676,1466 @@
                 <a:spcPct val="100000"/>
               </a:lnSpc>
               <a:spcBef>
+                <a:spcPts val="479"/>
+              </a:spcBef>
+              <a:buClr>
+                <a:srgbClr val="000000"/>
+              </a:buClr>
+              <a:buFont typeface="Arial"/>
+              <a:buChar char="•"/>
+              <a:tabLst>
+                <a:tab pos="0" algn="l"/>
+              </a:tabLst>
+              <a:defRPr lang="en-US" sz="2400" b="0" u="none" strike="noStrike">
+                <a:solidFill>
+                  <a:schemeClr val="dk1"/>
+                </a:solidFill>
+                <a:effectLst/>
+                <a:uFillTx/>
+                <a:latin typeface="Calibri"/>
+              </a:defRPr>
+            </a:lvl1pPr>
+            <a:lvl2pPr lvl="1" algn="l" defTabSz="457200">
+              <a:lnSpc>
+                <a:spcPct val="100000"/>
+              </a:lnSpc>
+              <a:spcBef>
+                <a:spcPts val="400"/>
+              </a:spcBef>
+              <a:buClr>
+                <a:srgbClr val="000000"/>
+              </a:buClr>
+              <a:buFont typeface="Arial"/>
+              <a:buChar char="–"/>
+              <a:tabLst>
+                <a:tab pos="0" algn="l"/>
+              </a:tabLst>
+              <a:defRPr lang="en-US" sz="2000" b="0" u="none" strike="noStrike">
+                <a:solidFill>
+                  <a:schemeClr val="dk1"/>
+                </a:solidFill>
+                <a:effectLst/>
+                <a:uFillTx/>
+                <a:latin typeface="Calibri"/>
+              </a:defRPr>
+            </a:lvl2pPr>
+            <a:lvl3pPr lvl="2" algn="l" defTabSz="457200">
+              <a:lnSpc>
+                <a:spcPct val="100000"/>
+              </a:lnSpc>
+              <a:spcBef>
+                <a:spcPts val="360"/>
+              </a:spcBef>
+              <a:buClr>
+                <a:srgbClr val="000000"/>
+              </a:buClr>
+              <a:buFont typeface="Arial"/>
+              <a:buChar char="•"/>
+              <a:tabLst>
+                <a:tab pos="0" algn="l"/>
+              </a:tabLst>
+              <a:defRPr lang="en-US" sz="1800" b="0" u="none" strike="noStrike">
+                <a:solidFill>
+                  <a:schemeClr val="dk1"/>
+                </a:solidFill>
+                <a:effectLst/>
+                <a:uFillTx/>
+                <a:latin typeface="Calibri"/>
+              </a:defRPr>
+            </a:lvl3pPr>
+            <a:lvl4pPr lvl="3" algn="l" defTabSz="457200">
+              <a:lnSpc>
+                <a:spcPct val="100000"/>
+              </a:lnSpc>
+              <a:spcBef>
+                <a:spcPts val="320"/>
+              </a:spcBef>
+              <a:buClr>
+                <a:srgbClr val="000000"/>
+              </a:buClr>
+              <a:buFont typeface="Arial"/>
+              <a:buChar char="–"/>
+              <a:tabLst>
+                <a:tab pos="0" algn="l"/>
+              </a:tabLst>
+              <a:defRPr lang="en-US" sz="1600" b="0" u="none" strike="noStrike">
+                <a:solidFill>
+                  <a:schemeClr val="dk1"/>
+                </a:solidFill>
+                <a:effectLst/>
+                <a:uFillTx/>
+                <a:latin typeface="Calibri"/>
+              </a:defRPr>
+            </a:lvl4pPr>
+            <a:lvl5pPr lvl="4" algn="l" defTabSz="457200">
+              <a:lnSpc>
+                <a:spcPct val="100000"/>
+              </a:lnSpc>
+              <a:spcBef>
+                <a:spcPts val="320"/>
+              </a:spcBef>
+              <a:buClr>
+                <a:srgbClr val="000000"/>
+              </a:buClr>
+              <a:buFont typeface="Arial"/>
+              <a:buChar char="»"/>
+              <a:tabLst>
+                <a:tab pos="0" algn="l"/>
+              </a:tabLst>
+              <a:defRPr lang="en-US" sz="1600" b="0" u="none" strike="noStrike">
+                <a:solidFill>
+                  <a:schemeClr val="dk1"/>
+                </a:solidFill>
+                <a:effectLst/>
+                <a:uFillTx/>
+                <a:latin typeface="Calibri"/>
+              </a:defRPr>
+            </a:lvl5pPr>
+          </a:lstStyle>
+          <a:p>
+            <a:pPr marL="343080" indent="-343080" algn="l" defTabSz="457200">
+              <a:lnSpc>
+                <a:spcPct val="100000"/>
+              </a:lnSpc>
+              <a:spcBef>
+                <a:spcPts val="479"/>
+              </a:spcBef>
+              <a:buClr>
+                <a:srgbClr val="000000"/>
+              </a:buClr>
+              <a:buFont typeface="Arial"/>
+              <a:buChar char="•"/>
+              <a:tabLst>
+                <a:tab pos="0" algn="l"/>
+              </a:tabLst>
+            </a:pPr>
+            <a:r>
+              <a:rPr lang="en-US" sz="2400" b="0" u="none" strike="noStrike">
+                <a:solidFill>
+                  <a:schemeClr val="dk1"/>
+                </a:solidFill>
+                <a:effectLst/>
+                <a:uFillTx/>
+                <a:latin typeface="Calibri"/>
+              </a:rPr>
+              <a:t>Click to edit Master text styles</a:t>
+            </a:r>
+            <a:endParaRPr lang="en-US" sz="2400" b="0" u="none" strike="noStrike">
+              <a:solidFill>
+                <a:schemeClr val="dk1"/>
+              </a:solidFill>
+              <a:effectLst/>
+              <a:uFillTx/>
+              <a:latin typeface="Calibri"/>
+            </a:endParaRPr>
+          </a:p>
+          <a:p>
+            <a:pPr marL="743040" lvl="1" indent="-285840" algn="l" defTabSz="457200">
+              <a:lnSpc>
+                <a:spcPct val="100000"/>
+              </a:lnSpc>
+              <a:spcBef>
+                <a:spcPts val="400"/>
+              </a:spcBef>
+              <a:buClr>
+                <a:srgbClr val="000000"/>
+              </a:buClr>
+              <a:buFont typeface="Arial"/>
+              <a:buChar char="–"/>
+              <a:tabLst>
+                <a:tab pos="0" algn="l"/>
+              </a:tabLst>
+            </a:pPr>
+            <a:r>
+              <a:rPr lang="en-US" sz="2000" b="0" u="none" strike="noStrike">
+                <a:solidFill>
+                  <a:schemeClr val="dk1"/>
+                </a:solidFill>
+                <a:effectLst/>
+                <a:uFillTx/>
+                <a:latin typeface="Calibri"/>
+              </a:rPr>
+              <a:t>Second level</a:t>
+            </a:r>
+            <a:endParaRPr lang="en-US" sz="2000" b="0" u="none" strike="noStrike">
+              <a:solidFill>
+                <a:schemeClr val="dk1"/>
+              </a:solidFill>
+              <a:effectLst/>
+              <a:uFillTx/>
+              <a:latin typeface="Calibri"/>
+            </a:endParaRPr>
+          </a:p>
+          <a:p>
+            <a:pPr marL="1143000" lvl="2" indent="-228600" algn="l" defTabSz="457200">
+              <a:lnSpc>
+                <a:spcPct val="100000"/>
+              </a:lnSpc>
+              <a:spcBef>
+                <a:spcPts val="360"/>
+              </a:spcBef>
+              <a:buClr>
+                <a:srgbClr val="000000"/>
+              </a:buClr>
+              <a:buFont typeface="Arial"/>
+              <a:buChar char="•"/>
+              <a:tabLst>
+                <a:tab pos="0" algn="l"/>
+              </a:tabLst>
+            </a:pPr>
+            <a:r>
+              <a:rPr lang="en-US" sz="1800" b="0" u="none" strike="noStrike">
+                <a:solidFill>
+                  <a:schemeClr val="dk1"/>
+                </a:solidFill>
+                <a:effectLst/>
+                <a:uFillTx/>
+                <a:latin typeface="Calibri"/>
+              </a:rPr>
+              <a:t>Third level</a:t>
+            </a:r>
+            <a:endParaRPr lang="en-US" sz="1800" b="0" u="none" strike="noStrike">
+              <a:solidFill>
+                <a:schemeClr val="dk1"/>
+              </a:solidFill>
+              <a:effectLst/>
+              <a:uFillTx/>
+              <a:latin typeface="Calibri"/>
+            </a:endParaRPr>
+          </a:p>
+          <a:p>
+            <a:pPr marL="1600200" lvl="3" indent="-228600" algn="l" defTabSz="457200">
+              <a:lnSpc>
+                <a:spcPct val="100000"/>
+              </a:lnSpc>
+              <a:spcBef>
+                <a:spcPts val="320"/>
+              </a:spcBef>
+              <a:buClr>
+                <a:srgbClr val="000000"/>
+              </a:buClr>
+              <a:buFont typeface="Arial"/>
+              <a:buChar char="–"/>
+              <a:tabLst>
+                <a:tab pos="0" algn="l"/>
+              </a:tabLst>
+            </a:pPr>
+            <a:r>
+              <a:rPr lang="en-US" sz="1600" b="0" u="none" strike="noStrike">
+                <a:solidFill>
+                  <a:schemeClr val="dk1"/>
+                </a:solidFill>
+                <a:effectLst/>
+                <a:uFillTx/>
+                <a:latin typeface="Calibri"/>
+              </a:rPr>
+              <a:t>Fourth level</a:t>
+            </a:r>
+            <a:endParaRPr lang="en-US" sz="1600" b="0" u="none" strike="noStrike">
+              <a:solidFill>
+                <a:schemeClr val="dk1"/>
+              </a:solidFill>
+              <a:effectLst/>
+              <a:uFillTx/>
+              <a:latin typeface="Calibri"/>
+            </a:endParaRPr>
+          </a:p>
+          <a:p>
+            <a:pPr marL="2057400" lvl="4" indent="-228600" algn="l" defTabSz="457200">
+              <a:lnSpc>
+                <a:spcPct val="100000"/>
+              </a:lnSpc>
+              <a:spcBef>
+                <a:spcPts val="320"/>
+              </a:spcBef>
+              <a:buClr>
+                <a:srgbClr val="000000"/>
+              </a:buClr>
+              <a:buFont typeface="Arial"/>
+              <a:buChar char="»"/>
+              <a:tabLst>
+                <a:tab pos="0" algn="l"/>
+              </a:tabLst>
+            </a:pPr>
+            <a:r>
+              <a:rPr lang="en-US" sz="1600" b="0" u="none" strike="noStrike">
+                <a:solidFill>
+                  <a:schemeClr val="dk1"/>
+                </a:solidFill>
+                <a:effectLst/>
+                <a:uFillTx/>
+                <a:latin typeface="Calibri"/>
+              </a:rPr>
+              <a:t>Fifth level</a:t>
+            </a:r>
+            <a:endParaRPr lang="en-US" sz="1600" b="0" u="none" strike="noStrike">
+              <a:solidFill>
+                <a:schemeClr val="dk1"/>
+              </a:solidFill>
+              <a:effectLst/>
+              <a:uFillTx/>
+              <a:latin typeface="Calibri"/>
+            </a:endParaRPr>
+          </a:p>
+        </p:txBody>
+      </p:sp>
+      <p:sp>
+        <p:nvSpPr>
+          <p:cNvPr id="52" name="PlaceHolder 4"/>
+          <p:cNvSpPr>
+            <a:spLocks noGrp="1"/>
+          </p:cNvSpPr>
+          <p:nvPr>
+            <p:ph type="body"/>
+          </p:nvPr>
+        </p:nvSpPr>
+        <p:spPr>
+          <a:xfrm>
+            <a:off x="4645080" y="1535040"/>
+            <a:ext cx="4041000" cy="639000"/>
+          </a:xfrm>
+          <a:prstGeom prst="rect">
+            <a:avLst/>
+          </a:prstGeom>
+          <a:noFill/>
+          <a:ln w="0">
+            <a:noFill/>
+          </a:ln>
+        </p:spPr>
+        <p:txBody>
+          <a:bodyPr lIns="91440" tIns="45720" rIns="91440" bIns="45720" anchor="b">
+            <a:noAutofit/>
+          </a:bodyPr>
+          <a:lstStyle>
+            <a:lvl1pPr indent="0" algn="l" defTabSz="457200">
+              <a:lnSpc>
+                <a:spcPct val="100000"/>
+              </a:lnSpc>
+              <a:spcBef>
+                <a:spcPts val="479"/>
+              </a:spcBef>
+              <a:buNone/>
+              <a:tabLst>
+                <a:tab pos="0" algn="l"/>
+              </a:tabLst>
+              <a:defRPr lang="en-US" sz="2400" b="1" u="none" strike="noStrike">
+                <a:solidFill>
+                  <a:schemeClr val="dk1"/>
+                </a:solidFill>
+                <a:effectLst/>
+                <a:uFillTx/>
+                <a:latin typeface="Calibri"/>
+              </a:defRPr>
+            </a:lvl1pPr>
+          </a:lstStyle>
+          <a:p>
+            <a:pPr indent="0" algn="l" defTabSz="457200">
+              <a:lnSpc>
+                <a:spcPct val="100000"/>
+              </a:lnSpc>
+              <a:spcBef>
+                <a:spcPts val="479"/>
+              </a:spcBef>
+              <a:buNone/>
+              <a:tabLst>
+                <a:tab pos="0" algn="l"/>
+              </a:tabLst>
+            </a:pPr>
+            <a:r>
+              <a:rPr lang="en-US" sz="2400" b="1" u="none" strike="noStrike">
+                <a:solidFill>
+                  <a:schemeClr val="dk1"/>
+                </a:solidFill>
+                <a:effectLst/>
+                <a:uFillTx/>
+                <a:latin typeface="Calibri"/>
+              </a:rPr>
+              <a:t>Click to edit Master text styles</a:t>
+            </a:r>
+            <a:endParaRPr lang="en-US" sz="2400" b="0" u="none" strike="noStrike">
+              <a:solidFill>
+                <a:schemeClr val="dk1"/>
+              </a:solidFill>
+              <a:effectLst/>
+              <a:uFillTx/>
+              <a:latin typeface="Calibri"/>
+            </a:endParaRPr>
+          </a:p>
+        </p:txBody>
+      </p:sp>
+      <p:sp>
+        <p:nvSpPr>
+          <p:cNvPr id="53" name="PlaceHolder 5"/>
+          <p:cNvSpPr>
+            <a:spLocks noGrp="1"/>
+          </p:cNvSpPr>
+          <p:nvPr>
+            <p:ph type="body"/>
+          </p:nvPr>
+        </p:nvSpPr>
+        <p:spPr>
+          <a:xfrm>
+            <a:off x="4645080" y="2174760"/>
+            <a:ext cx="4041000" cy="3950640"/>
+          </a:xfrm>
+          <a:prstGeom prst="rect">
+            <a:avLst/>
+          </a:prstGeom>
+          <a:noFill/>
+          <a:ln w="0">
+            <a:noFill/>
+          </a:ln>
+        </p:spPr>
+        <p:txBody>
+          <a:bodyPr lIns="91440" tIns="45720" rIns="91440" bIns="45720" anchor="t">
+            <a:noAutofit/>
+          </a:bodyPr>
+          <a:lstStyle>
+            <a:lvl1pPr algn="l" defTabSz="457200">
+              <a:lnSpc>
+                <a:spcPct val="100000"/>
+              </a:lnSpc>
+              <a:spcBef>
+                <a:spcPts val="479"/>
+              </a:spcBef>
+              <a:buClr>
+                <a:srgbClr val="000000"/>
+              </a:buClr>
+              <a:buFont typeface="Arial"/>
+              <a:buChar char="•"/>
+              <a:tabLst>
+                <a:tab pos="0" algn="l"/>
+              </a:tabLst>
+              <a:defRPr lang="en-US" sz="2400" b="0" u="none" strike="noStrike">
+                <a:solidFill>
+                  <a:schemeClr val="dk1"/>
+                </a:solidFill>
+                <a:effectLst/>
+                <a:uFillTx/>
+                <a:latin typeface="Calibri"/>
+              </a:defRPr>
+            </a:lvl1pPr>
+            <a:lvl2pPr lvl="1" algn="l" defTabSz="457200">
+              <a:lnSpc>
+                <a:spcPct val="100000"/>
+              </a:lnSpc>
+              <a:spcBef>
+                <a:spcPts val="400"/>
+              </a:spcBef>
+              <a:buClr>
+                <a:srgbClr val="000000"/>
+              </a:buClr>
+              <a:buFont typeface="Arial"/>
+              <a:buChar char="–"/>
+              <a:tabLst>
+                <a:tab pos="0" algn="l"/>
+              </a:tabLst>
+              <a:defRPr lang="en-US" sz="2000" b="0" u="none" strike="noStrike">
+                <a:solidFill>
+                  <a:schemeClr val="dk1"/>
+                </a:solidFill>
+                <a:effectLst/>
+                <a:uFillTx/>
+                <a:latin typeface="Calibri"/>
+              </a:defRPr>
+            </a:lvl2pPr>
+            <a:lvl3pPr lvl="2" algn="l" defTabSz="457200">
+              <a:lnSpc>
+                <a:spcPct val="100000"/>
+              </a:lnSpc>
+              <a:spcBef>
+                <a:spcPts val="360"/>
+              </a:spcBef>
+              <a:buClr>
+                <a:srgbClr val="000000"/>
+              </a:buClr>
+              <a:buFont typeface="Arial"/>
+              <a:buChar char="•"/>
+              <a:tabLst>
+                <a:tab pos="0" algn="l"/>
+              </a:tabLst>
+              <a:defRPr lang="en-US" sz="1800" b="0" u="none" strike="noStrike">
+                <a:solidFill>
+                  <a:schemeClr val="dk1"/>
+                </a:solidFill>
+                <a:effectLst/>
+                <a:uFillTx/>
+                <a:latin typeface="Calibri"/>
+              </a:defRPr>
+            </a:lvl3pPr>
+            <a:lvl4pPr lvl="3" algn="l" defTabSz="457200">
+              <a:lnSpc>
+                <a:spcPct val="100000"/>
+              </a:lnSpc>
+              <a:spcBef>
+                <a:spcPts val="320"/>
+              </a:spcBef>
+              <a:buClr>
+                <a:srgbClr val="000000"/>
+              </a:buClr>
+              <a:buFont typeface="Arial"/>
+              <a:buChar char="–"/>
+              <a:tabLst>
+                <a:tab pos="0" algn="l"/>
+              </a:tabLst>
+              <a:defRPr lang="en-US" sz="1600" b="0" u="none" strike="noStrike">
+                <a:solidFill>
+                  <a:schemeClr val="dk1"/>
+                </a:solidFill>
+                <a:effectLst/>
+                <a:uFillTx/>
+                <a:latin typeface="Calibri"/>
+              </a:defRPr>
+            </a:lvl4pPr>
+            <a:lvl5pPr lvl="4" algn="l" defTabSz="457200">
+              <a:lnSpc>
+                <a:spcPct val="100000"/>
+              </a:lnSpc>
+              <a:spcBef>
+                <a:spcPts val="320"/>
+              </a:spcBef>
+              <a:buClr>
+                <a:srgbClr val="000000"/>
+              </a:buClr>
+              <a:buFont typeface="Arial"/>
+              <a:buChar char="»"/>
+              <a:tabLst>
+                <a:tab pos="0" algn="l"/>
+              </a:tabLst>
+              <a:defRPr lang="en-US" sz="1600" b="0" u="none" strike="noStrike">
+                <a:solidFill>
+                  <a:schemeClr val="dk1"/>
+                </a:solidFill>
+                <a:effectLst/>
+                <a:uFillTx/>
+                <a:latin typeface="Calibri"/>
+              </a:defRPr>
+            </a:lvl5pPr>
+          </a:lstStyle>
+          <a:p>
+            <a:pPr marL="343080" indent="-343080" algn="l" defTabSz="457200">
+              <a:lnSpc>
+                <a:spcPct val="100000"/>
+              </a:lnSpc>
+              <a:spcBef>
+                <a:spcPts val="479"/>
+              </a:spcBef>
+              <a:buClr>
+                <a:srgbClr val="000000"/>
+              </a:buClr>
+              <a:buFont typeface="Arial"/>
+              <a:buChar char="•"/>
+              <a:tabLst>
+                <a:tab pos="0" algn="l"/>
+              </a:tabLst>
+            </a:pPr>
+            <a:r>
+              <a:rPr lang="en-US" sz="2400" b="0" u="none" strike="noStrike">
+                <a:solidFill>
+                  <a:schemeClr val="dk1"/>
+                </a:solidFill>
+                <a:effectLst/>
+                <a:uFillTx/>
+                <a:latin typeface="Calibri"/>
+              </a:rPr>
+              <a:t>Click to edit Master text styles</a:t>
+            </a:r>
+            <a:endParaRPr lang="en-US" sz="2400" b="0" u="none" strike="noStrike">
+              <a:solidFill>
+                <a:schemeClr val="dk1"/>
+              </a:solidFill>
+              <a:effectLst/>
+              <a:uFillTx/>
+              <a:latin typeface="Calibri"/>
+            </a:endParaRPr>
+          </a:p>
+          <a:p>
+            <a:pPr marL="743040" lvl="1" indent="-285840" algn="l" defTabSz="457200">
+              <a:lnSpc>
+                <a:spcPct val="100000"/>
+              </a:lnSpc>
+              <a:spcBef>
+                <a:spcPts val="400"/>
+              </a:spcBef>
+              <a:buClr>
+                <a:srgbClr val="000000"/>
+              </a:buClr>
+              <a:buFont typeface="Arial"/>
+              <a:buChar char="–"/>
+              <a:tabLst>
+                <a:tab pos="0" algn="l"/>
+              </a:tabLst>
+            </a:pPr>
+            <a:r>
+              <a:rPr lang="en-US" sz="2000" b="0" u="none" strike="noStrike">
+                <a:solidFill>
+                  <a:schemeClr val="dk1"/>
+                </a:solidFill>
+                <a:effectLst/>
+                <a:uFillTx/>
+                <a:latin typeface="Calibri"/>
+              </a:rPr>
+              <a:t>Second level</a:t>
+            </a:r>
+            <a:endParaRPr lang="en-US" sz="2000" b="0" u="none" strike="noStrike">
+              <a:solidFill>
+                <a:schemeClr val="dk1"/>
+              </a:solidFill>
+              <a:effectLst/>
+              <a:uFillTx/>
+              <a:latin typeface="Calibri"/>
+            </a:endParaRPr>
+          </a:p>
+          <a:p>
+            <a:pPr marL="1143000" lvl="2" indent="-228600" algn="l" defTabSz="457200">
+              <a:lnSpc>
+                <a:spcPct val="100000"/>
+              </a:lnSpc>
+              <a:spcBef>
+                <a:spcPts val="360"/>
+              </a:spcBef>
+              <a:buClr>
+                <a:srgbClr val="000000"/>
+              </a:buClr>
+              <a:buFont typeface="Arial"/>
+              <a:buChar char="•"/>
+              <a:tabLst>
+                <a:tab pos="0" algn="l"/>
+              </a:tabLst>
+            </a:pPr>
+            <a:r>
+              <a:rPr lang="en-US" sz="1800" b="0" u="none" strike="noStrike">
+                <a:solidFill>
+                  <a:schemeClr val="dk1"/>
+                </a:solidFill>
+                <a:effectLst/>
+                <a:uFillTx/>
+                <a:latin typeface="Calibri"/>
+              </a:rPr>
+              <a:t>Third level</a:t>
+            </a:r>
+            <a:endParaRPr lang="en-US" sz="1800" b="0" u="none" strike="noStrike">
+              <a:solidFill>
+                <a:schemeClr val="dk1"/>
+              </a:solidFill>
+              <a:effectLst/>
+              <a:uFillTx/>
+              <a:latin typeface="Calibri"/>
+            </a:endParaRPr>
+          </a:p>
+          <a:p>
+            <a:pPr marL="1600200" lvl="3" indent="-228600" algn="l" defTabSz="457200">
+              <a:lnSpc>
+                <a:spcPct val="100000"/>
+              </a:lnSpc>
+              <a:spcBef>
+                <a:spcPts val="320"/>
+              </a:spcBef>
+              <a:buClr>
+                <a:srgbClr val="000000"/>
+              </a:buClr>
+              <a:buFont typeface="Arial"/>
+              <a:buChar char="–"/>
+              <a:tabLst>
+                <a:tab pos="0" algn="l"/>
+              </a:tabLst>
+            </a:pPr>
+            <a:r>
+              <a:rPr lang="en-US" sz="1600" b="0" u="none" strike="noStrike">
+                <a:solidFill>
+                  <a:schemeClr val="dk1"/>
+                </a:solidFill>
+                <a:effectLst/>
+                <a:uFillTx/>
+                <a:latin typeface="Calibri"/>
+              </a:rPr>
+              <a:t>Fourth level</a:t>
+            </a:r>
+            <a:endParaRPr lang="en-US" sz="1600" b="0" u="none" strike="noStrike">
+              <a:solidFill>
+                <a:schemeClr val="dk1"/>
+              </a:solidFill>
+              <a:effectLst/>
+              <a:uFillTx/>
+              <a:latin typeface="Calibri"/>
+            </a:endParaRPr>
+          </a:p>
+          <a:p>
+            <a:pPr marL="2057400" lvl="4" indent="-228600" algn="l" defTabSz="457200">
+              <a:lnSpc>
+                <a:spcPct val="100000"/>
+              </a:lnSpc>
+              <a:spcBef>
+                <a:spcPts val="320"/>
+              </a:spcBef>
+              <a:buClr>
+                <a:srgbClr val="000000"/>
+              </a:buClr>
+              <a:buFont typeface="Arial"/>
+              <a:buChar char="»"/>
+              <a:tabLst>
+                <a:tab pos="0" algn="l"/>
+              </a:tabLst>
+            </a:pPr>
+            <a:r>
+              <a:rPr lang="en-US" sz="1600" b="0" u="none" strike="noStrike">
+                <a:solidFill>
+                  <a:schemeClr val="dk1"/>
+                </a:solidFill>
+                <a:effectLst/>
+                <a:uFillTx/>
+                <a:latin typeface="Calibri"/>
+              </a:rPr>
+              <a:t>Fifth level</a:t>
+            </a:r>
+            <a:endParaRPr lang="en-US" sz="1600" b="0" u="none" strike="noStrike">
+              <a:solidFill>
+                <a:schemeClr val="dk1"/>
+              </a:solidFill>
+              <a:effectLst/>
+              <a:uFillTx/>
+              <a:latin typeface="Calibri"/>
+            </a:endParaRPr>
+          </a:p>
+        </p:txBody>
+      </p:sp>
+      <p:sp>
+        <p:nvSpPr>
+          <p:cNvPr id="54" name="PlaceHolder 6"/>
+          <p:cNvSpPr>
+            <a:spLocks noGrp="1"/>
+          </p:cNvSpPr>
+          <p:nvPr>
+            <p:ph type="dt" idx="28"/>
+          </p:nvPr>
+        </p:nvSpPr>
+        <p:spPr>
+          <a:xfrm>
+            <a:off x="457200" y="6356520"/>
+            <a:ext cx="2133000" cy="364320"/>
+          </a:xfrm>
+          <a:prstGeom prst="rect">
+            <a:avLst/>
+          </a:prstGeom>
+          <a:noFill/>
+          <a:ln w="0">
+            <a:noFill/>
+          </a:ln>
+        </p:spPr>
+        <p:txBody>
+          <a:bodyPr lIns="91440" tIns="45720" rIns="91440" bIns="45720" anchor="ctr">
+            <a:noAutofit/>
+          </a:bodyPr>
+          <a:lstStyle>
+            <a:lvl1pPr indent="0" algn="l" defTabSz="457200">
+              <a:lnSpc>
+                <a:spcPct val="100000"/>
+              </a:lnSpc>
+              <a:buNone/>
+              <a:tabLst>
+                <a:tab pos="0" algn="l"/>
+              </a:tabLst>
+              <a:defRPr lang="en-US" sz="1200" b="0" u="none" strike="noStrike">
+                <a:solidFill>
+                  <a:schemeClr val="dk1">
+                    <a:tint val="75000"/>
+                  </a:schemeClr>
+                </a:solidFill>
+                <a:effectLst/>
+                <a:uFillTx/>
+                <a:latin typeface="Calibri"/>
+              </a:defRPr>
+            </a:lvl1pPr>
+          </a:lstStyle>
+          <a:p>
+            <a:pPr indent="0" algn="l" defTabSz="457200">
+              <a:lnSpc>
+                <a:spcPct val="100000"/>
+              </a:lnSpc>
+              <a:buNone/>
+              <a:tabLst>
+                <a:tab pos="0" algn="l"/>
+              </a:tabLst>
+            </a:pPr>
+            <a:r>
+              <a:rPr lang="en-US" sz="1200" b="0" u="none" strike="noStrike">
+                <a:solidFill>
+                  <a:schemeClr val="dk1">
+                    <a:tint val="75000"/>
+                  </a:schemeClr>
+                </a:solidFill>
+                <a:effectLst/>
+                <a:uFillTx/>
+                <a:latin typeface="Calibri"/>
+              </a:rPr>
+              <a:t>&lt;date/time&gt;</a:t>
+            </a:r>
+            <a:endParaRPr lang="en-US" sz="1200" b="0" u="none" strike="noStrike">
+              <a:solidFill>
+                <a:srgbClr val="000000"/>
+              </a:solidFill>
+              <a:effectLst/>
+              <a:uFillTx/>
+              <a:latin typeface="Times New Roman"/>
+            </a:endParaRPr>
+          </a:p>
+        </p:txBody>
+      </p:sp>
+      <p:sp>
+        <p:nvSpPr>
+          <p:cNvPr id="55" name="PlaceHolder 7"/>
+          <p:cNvSpPr>
+            <a:spLocks noGrp="1"/>
+          </p:cNvSpPr>
+          <p:nvPr>
+            <p:ph type="ftr" idx="29"/>
+          </p:nvPr>
+        </p:nvSpPr>
+        <p:spPr>
+          <a:xfrm>
+            <a:off x="3124080" y="6356520"/>
+            <a:ext cx="2894760" cy="364320"/>
+          </a:xfrm>
+          <a:prstGeom prst="rect">
+            <a:avLst/>
+          </a:prstGeom>
+          <a:noFill/>
+          <a:ln w="0">
+            <a:noFill/>
+          </a:ln>
+        </p:spPr>
+        <p:txBody>
+          <a:bodyPr lIns="91440" tIns="45720" rIns="91440" bIns="45720" anchor="ctr">
+            <a:noAutofit/>
+          </a:bodyPr>
+          <a:lstStyle>
+            <a:lvl1pPr indent="0" algn="ctr">
+              <a:lnSpc>
+                <a:spcPct val="100000"/>
+              </a:lnSpc>
+              <a:buNone/>
+              <a:tabLst>
+                <a:tab pos="0" algn="l"/>
+              </a:tabLst>
+              <a:defRPr lang="en-US" sz="1400" b="0" u="none" strike="noStrike">
+                <a:solidFill>
+                  <a:srgbClr val="000000"/>
+                </a:solidFill>
+                <a:effectLst/>
+                <a:uFillTx/>
+                <a:latin typeface="Times New Roman"/>
+              </a:defRPr>
+            </a:lvl1pPr>
+          </a:lstStyle>
+          <a:p>
+            <a:pPr indent="0" algn="ctr">
+              <a:lnSpc>
+                <a:spcPct val="100000"/>
+              </a:lnSpc>
+              <a:buNone/>
+              <a:tabLst>
+                <a:tab pos="0" algn="l"/>
+              </a:tabLst>
+            </a:pPr>
+            <a:r>
+              <a:rPr lang="en-US" sz="1400" b="0" u="none" strike="noStrike">
+                <a:solidFill>
+                  <a:srgbClr val="000000"/>
+                </a:solidFill>
+                <a:effectLst/>
+                <a:uFillTx/>
+                <a:latin typeface="Times New Roman"/>
+              </a:rPr>
+              <a:t>&lt;footer&gt;</a:t>
+            </a:r>
+            <a:endParaRPr lang="en-US" sz="1400" b="0" u="none" strike="noStrike">
+              <a:solidFill>
+                <a:srgbClr val="000000"/>
+              </a:solidFill>
+              <a:effectLst/>
+              <a:uFillTx/>
+              <a:latin typeface="Times New Roman"/>
+            </a:endParaRPr>
+          </a:p>
+        </p:txBody>
+      </p:sp>
+      <p:sp>
+        <p:nvSpPr>
+          <p:cNvPr id="56" name="PlaceHolder 8"/>
+          <p:cNvSpPr>
+            <a:spLocks noGrp="1"/>
+          </p:cNvSpPr>
+          <p:nvPr>
+            <p:ph type="sldNum" idx="30"/>
+          </p:nvPr>
+        </p:nvSpPr>
+        <p:spPr>
+          <a:xfrm>
+            <a:off x="6553080" y="6356520"/>
+            <a:ext cx="2133000" cy="364320"/>
+          </a:xfrm>
+          <a:prstGeom prst="rect">
+            <a:avLst/>
+          </a:prstGeom>
+          <a:noFill/>
+          <a:ln w="0">
+            <a:noFill/>
+          </a:ln>
+        </p:spPr>
+        <p:txBody>
+          <a:bodyPr lIns="91440" tIns="45720" rIns="91440" bIns="45720" anchor="ctr">
+            <a:noAutofit/>
+          </a:bodyPr>
+          <a:lstStyle>
+            <a:lvl1pPr indent="0" algn="r" defTabSz="457200">
+              <a:lnSpc>
+                <a:spcPct val="100000"/>
+              </a:lnSpc>
+              <a:buNone/>
+              <a:tabLst>
+                <a:tab pos="0" algn="l"/>
+              </a:tabLst>
+              <a:defRPr lang="en-US" sz="1200" b="0" u="none" strike="noStrike">
+                <a:solidFill>
+                  <a:schemeClr val="dk1">
+                    <a:tint val="75000"/>
+                  </a:schemeClr>
+                </a:solidFill>
+                <a:effectLst/>
+                <a:uFillTx/>
+                <a:latin typeface="Calibri"/>
+              </a:defRPr>
+            </a:lvl1pPr>
+          </a:lstStyle>
+          <a:p>
+            <a:pPr indent="0" algn="r" defTabSz="457200">
+              <a:lnSpc>
+                <a:spcPct val="100000"/>
+              </a:lnSpc>
+              <a:buNone/>
+              <a:tabLst>
+                <a:tab pos="0" algn="l"/>
+              </a:tabLst>
+            </a:pPr>
+            <a:fld id="{C074EAA4-3604-400F-B473-EC992221DF0F}" type="slidenum">
+              <a:rPr lang="en-US" sz="1200" b="0" u="none" strike="noStrike">
+                <a:solidFill>
+                  <a:schemeClr val="dk1">
+                    <a:tint val="75000"/>
+                  </a:schemeClr>
+                </a:solidFill>
+                <a:effectLst/>
+                <a:uFillTx/>
+                <a:latin typeface="Calibri"/>
+              </a:rPr>
+              <a:t>&lt;number&gt;</a:t>
+            </a:fld>
+            <a:endParaRPr lang="en-US" sz="1200" b="0" u="none" strike="noStrike">
+              <a:solidFill>
+                <a:srgbClr val="000000"/>
+              </a:solidFill>
+              <a:effectLst/>
+              <a:uFillTx/>
+              <a:latin typeface="Times New Roman"/>
+            </a:endParaRPr>
+          </a:p>
+        </p:txBody>
+      </p:sp>
+    </p:spTree>
+  </p:cSld>
+  <p:clrMapOvr>
+    <a:masterClrMapping/>
+  </p:clrMapOvr>
+</p:sldLayout>
+</file>
+
+<file path=ppt/slideLayouts/slideLayout11.xml><?xml version="1.0" encoding="utf-8"?>
+<p:sldLayout xmlns:a="http://schemas.openxmlformats.org/drawingml/2006/main" xmlns:p="http://schemas.openxmlformats.org/presentationml/2006/main" xmlns:r="http://schemas.openxmlformats.org/officeDocument/2006/relationships" xmlns:p14="http://schemas.microsoft.com/office/powerpoint/2010/main" xmlns:p15="http://schemas.microsoft.com/office/powerpoint/2012/main" xmlns:mc="http://schemas.openxmlformats.org/markup-compatibility/2006" type="titleOnly" preserve="1">
+  <p:cSld name="Title Only">
+    <p:bg>
+      <p:bgPr>
+        <a:solidFill>
+          <a:srgbClr val="FFFFFF"/>
+        </a:solidFill>
+      </p:bgPr>
+    </p:bg>
+    <p:spTree>
+      <p:nvGrpSpPr>
+        <p:cNvPr id="1" name=""/>
+        <p:cNvGrpSpPr/>
+        <p:nvPr/>
+      </p:nvGrpSpPr>
+      <p:grpSpPr>
+        <a:xfrm>
+          <a:off x="0" y="0"/>
+          <a:ext cx="0" cy="0"/>
+          <a:chOff x="0" y="0"/>
+          <a:chExt cx="0" cy="0"/>
+        </a:xfrm>
+      </p:grpSpPr>
+      <p:sp>
+        <p:nvSpPr>
+          <p:cNvPr id="57" name="PlaceHolder 1"/>
+          <p:cNvSpPr>
+            <a:spLocks noGrp="1"/>
+          </p:cNvSpPr>
+          <p:nvPr>
+            <p:ph type="title"/>
+          </p:nvPr>
+        </p:nvSpPr>
+        <p:spPr>
+          <a:xfrm>
+            <a:off x="457200" y="274680"/>
+            <a:ext cx="8228880" cy="1142280"/>
+          </a:xfrm>
+          <a:prstGeom prst="rect">
+            <a:avLst/>
+          </a:prstGeom>
+          <a:noFill/>
+          <a:ln w="0">
+            <a:noFill/>
+          </a:ln>
+        </p:spPr>
+        <p:txBody>
+          <a:bodyPr lIns="91440" tIns="45720" rIns="91440" bIns="45720" anchor="ctr">
+            <a:noAutofit/>
+          </a:bodyPr>
+          <a:lstStyle>
+            <a:lvl1pPr indent="0" algn="ctr" defTabSz="457200">
+              <a:lnSpc>
+                <a:spcPct val="100000"/>
+              </a:lnSpc>
+              <a:buNone/>
+              <a:tabLst>
+                <a:tab pos="0" algn="l"/>
+              </a:tabLst>
+              <a:defRPr lang="en-US" sz="4400" b="0" u="none" strike="noStrike">
+                <a:solidFill>
+                  <a:schemeClr val="dk1"/>
+                </a:solidFill>
+                <a:effectLst/>
+                <a:uFillTx/>
+                <a:latin typeface="Calibri"/>
+              </a:defRPr>
+            </a:lvl1pPr>
+          </a:lstStyle>
+          <a:p>
+            <a:pPr indent="0" algn="ctr" defTabSz="457200">
+              <a:lnSpc>
+                <a:spcPct val="100000"/>
+              </a:lnSpc>
+              <a:buNone/>
+              <a:tabLst>
+                <a:tab pos="0" algn="l"/>
+              </a:tabLst>
+            </a:pPr>
+            <a:r>
+              <a:rPr lang="en-US" sz="4400" b="0" u="none" strike="noStrike">
+                <a:solidFill>
+                  <a:schemeClr val="dk1"/>
+                </a:solidFill>
+                <a:effectLst/>
+                <a:uFillTx/>
+                <a:latin typeface="Calibri"/>
+              </a:rPr>
+              <a:t>Click to edit Master title style</a:t>
+            </a:r>
+            <a:endParaRPr lang="en-US" sz="4400" b="0" u="none" strike="noStrike">
+              <a:solidFill>
+                <a:schemeClr val="dk1"/>
+              </a:solidFill>
+              <a:effectLst/>
+              <a:uFillTx/>
+              <a:latin typeface="Calibri"/>
+            </a:endParaRPr>
+          </a:p>
+        </p:txBody>
+      </p:sp>
+      <p:sp>
+        <p:nvSpPr>
+          <p:cNvPr id="58" name="PlaceHolder 2"/>
+          <p:cNvSpPr>
+            <a:spLocks noGrp="1"/>
+          </p:cNvSpPr>
+          <p:nvPr>
+            <p:ph type="dt" idx="31"/>
+          </p:nvPr>
+        </p:nvSpPr>
+        <p:spPr>
+          <a:xfrm>
+            <a:off x="457200" y="6356520"/>
+            <a:ext cx="2133000" cy="364320"/>
+          </a:xfrm>
+          <a:prstGeom prst="rect">
+            <a:avLst/>
+          </a:prstGeom>
+          <a:noFill/>
+          <a:ln w="0">
+            <a:noFill/>
+          </a:ln>
+        </p:spPr>
+        <p:txBody>
+          <a:bodyPr lIns="91440" tIns="45720" rIns="91440" bIns="45720" anchor="ctr">
+            <a:noAutofit/>
+          </a:bodyPr>
+          <a:lstStyle>
+            <a:lvl1pPr indent="0" algn="l" defTabSz="457200">
+              <a:lnSpc>
+                <a:spcPct val="100000"/>
+              </a:lnSpc>
+              <a:buNone/>
+              <a:tabLst>
+                <a:tab pos="0" algn="l"/>
+              </a:tabLst>
+              <a:defRPr lang="en-US" sz="1200" b="0" u="none" strike="noStrike">
+                <a:solidFill>
+                  <a:schemeClr val="dk1">
+                    <a:tint val="75000"/>
+                  </a:schemeClr>
+                </a:solidFill>
+                <a:effectLst/>
+                <a:uFillTx/>
+                <a:latin typeface="Calibri"/>
+              </a:defRPr>
+            </a:lvl1pPr>
+          </a:lstStyle>
+          <a:p>
+            <a:pPr indent="0" algn="l" defTabSz="457200">
+              <a:lnSpc>
+                <a:spcPct val="100000"/>
+              </a:lnSpc>
+              <a:buNone/>
+              <a:tabLst>
+                <a:tab pos="0" algn="l"/>
+              </a:tabLst>
+            </a:pPr>
+            <a:r>
+              <a:rPr lang="en-US" sz="1200" b="0" u="none" strike="noStrike">
+                <a:solidFill>
+                  <a:schemeClr val="dk1">
+                    <a:tint val="75000"/>
+                  </a:schemeClr>
+                </a:solidFill>
+                <a:effectLst/>
+                <a:uFillTx/>
+                <a:latin typeface="Calibri"/>
+              </a:rPr>
+              <a:t>&lt;date/time&gt;</a:t>
+            </a:r>
+            <a:endParaRPr lang="en-US" sz="1200" b="0" u="none" strike="noStrike">
+              <a:solidFill>
+                <a:srgbClr val="000000"/>
+              </a:solidFill>
+              <a:effectLst/>
+              <a:uFillTx/>
+              <a:latin typeface="Times New Roman"/>
+            </a:endParaRPr>
+          </a:p>
+        </p:txBody>
+      </p:sp>
+      <p:sp>
+        <p:nvSpPr>
+          <p:cNvPr id="59" name="PlaceHolder 3"/>
+          <p:cNvSpPr>
+            <a:spLocks noGrp="1"/>
+          </p:cNvSpPr>
+          <p:nvPr>
+            <p:ph type="ftr" idx="32"/>
+          </p:nvPr>
+        </p:nvSpPr>
+        <p:spPr>
+          <a:xfrm>
+            <a:off x="3124080" y="6356520"/>
+            <a:ext cx="2894760" cy="364320"/>
+          </a:xfrm>
+          <a:prstGeom prst="rect">
+            <a:avLst/>
+          </a:prstGeom>
+          <a:noFill/>
+          <a:ln w="0">
+            <a:noFill/>
+          </a:ln>
+        </p:spPr>
+        <p:txBody>
+          <a:bodyPr lIns="91440" tIns="45720" rIns="91440" bIns="45720" anchor="ctr">
+            <a:noAutofit/>
+          </a:bodyPr>
+          <a:lstStyle>
+            <a:lvl1pPr indent="0" algn="ctr">
+              <a:lnSpc>
+                <a:spcPct val="100000"/>
+              </a:lnSpc>
+              <a:buNone/>
+              <a:tabLst>
+                <a:tab pos="0" algn="l"/>
+              </a:tabLst>
+              <a:defRPr lang="en-US" sz="1400" b="0" u="none" strike="noStrike">
+                <a:solidFill>
+                  <a:srgbClr val="000000"/>
+                </a:solidFill>
+                <a:effectLst/>
+                <a:uFillTx/>
+                <a:latin typeface="Times New Roman"/>
+              </a:defRPr>
+            </a:lvl1pPr>
+          </a:lstStyle>
+          <a:p>
+            <a:pPr indent="0" algn="ctr">
+              <a:lnSpc>
+                <a:spcPct val="100000"/>
+              </a:lnSpc>
+              <a:buNone/>
+              <a:tabLst>
+                <a:tab pos="0" algn="l"/>
+              </a:tabLst>
+            </a:pPr>
+            <a:r>
+              <a:rPr lang="en-US" sz="1400" b="0" u="none" strike="noStrike">
+                <a:solidFill>
+                  <a:srgbClr val="000000"/>
+                </a:solidFill>
+                <a:effectLst/>
+                <a:uFillTx/>
+                <a:latin typeface="Times New Roman"/>
+              </a:rPr>
+              <a:t>&lt;footer&gt;</a:t>
+            </a:r>
+            <a:endParaRPr lang="en-US" sz="1400" b="0" u="none" strike="noStrike">
+              <a:solidFill>
+                <a:srgbClr val="000000"/>
+              </a:solidFill>
+              <a:effectLst/>
+              <a:uFillTx/>
+              <a:latin typeface="Times New Roman"/>
+            </a:endParaRPr>
+          </a:p>
+        </p:txBody>
+      </p:sp>
+      <p:sp>
+        <p:nvSpPr>
+          <p:cNvPr id="60" name="PlaceHolder 4"/>
+          <p:cNvSpPr>
+            <a:spLocks noGrp="1"/>
+          </p:cNvSpPr>
+          <p:nvPr>
+            <p:ph type="sldNum" idx="33"/>
+          </p:nvPr>
+        </p:nvSpPr>
+        <p:spPr>
+          <a:xfrm>
+            <a:off x="6553080" y="6356520"/>
+            <a:ext cx="2133000" cy="364320"/>
+          </a:xfrm>
+          <a:prstGeom prst="rect">
+            <a:avLst/>
+          </a:prstGeom>
+          <a:noFill/>
+          <a:ln w="0">
+            <a:noFill/>
+          </a:ln>
+        </p:spPr>
+        <p:txBody>
+          <a:bodyPr lIns="91440" tIns="45720" rIns="91440" bIns="45720" anchor="ctr">
+            <a:noAutofit/>
+          </a:bodyPr>
+          <a:lstStyle>
+            <a:lvl1pPr indent="0" algn="r" defTabSz="457200">
+              <a:lnSpc>
+                <a:spcPct val="100000"/>
+              </a:lnSpc>
+              <a:buNone/>
+              <a:tabLst>
+                <a:tab pos="0" algn="l"/>
+              </a:tabLst>
+              <a:defRPr lang="en-US" sz="1200" b="0" u="none" strike="noStrike">
+                <a:solidFill>
+                  <a:schemeClr val="dk1">
+                    <a:tint val="75000"/>
+                  </a:schemeClr>
+                </a:solidFill>
+                <a:effectLst/>
+                <a:uFillTx/>
+                <a:latin typeface="Calibri"/>
+              </a:defRPr>
+            </a:lvl1pPr>
+          </a:lstStyle>
+          <a:p>
+            <a:pPr indent="0" algn="r" defTabSz="457200">
+              <a:lnSpc>
+                <a:spcPct val="100000"/>
+              </a:lnSpc>
+              <a:buNone/>
+              <a:tabLst>
+                <a:tab pos="0" algn="l"/>
+              </a:tabLst>
+            </a:pPr>
+            <a:fld id="{6A275D4C-165A-481C-8A84-D0927431876E}" type="slidenum">
+              <a:rPr lang="en-US" sz="1200" b="0" u="none" strike="noStrike">
+                <a:solidFill>
+                  <a:schemeClr val="dk1">
+                    <a:tint val="75000"/>
+                  </a:schemeClr>
+                </a:solidFill>
+                <a:effectLst/>
+                <a:uFillTx/>
+                <a:latin typeface="Calibri"/>
+              </a:rPr>
+              <a:t>&lt;number&gt;</a:t>
+            </a:fld>
+            <a:endParaRPr lang="en-US" sz="1200" b="0" u="none" strike="noStrike">
+              <a:solidFill>
+                <a:srgbClr val="000000"/>
+              </a:solidFill>
+              <a:effectLst/>
+              <a:uFillTx/>
+              <a:latin typeface="Times New Roman"/>
+            </a:endParaRPr>
+          </a:p>
+        </p:txBody>
+      </p:sp>
+    </p:spTree>
+  </p:cSld>
+  <p:clrMapOvr>
+    <a:masterClrMapping/>
+  </p:clrMapOvr>
+</p:sldLayout>
+</file>
+
+<file path=ppt/slideLayouts/slideLayout2.xml><?xml version="1.0" encoding="utf-8"?>
+<p:sldLayout xmlns:a="http://schemas.openxmlformats.org/drawingml/2006/main" xmlns:p="http://schemas.openxmlformats.org/presentationml/2006/main" xmlns:r="http://schemas.openxmlformats.org/officeDocument/2006/relationships" xmlns:p14="http://schemas.microsoft.com/office/powerpoint/2010/main" xmlns:p15="http://schemas.microsoft.com/office/powerpoint/2012/main" xmlns:mc="http://schemas.openxmlformats.org/markup-compatibility/2006" type="blank" preserve="1">
+  <p:cSld name="Content with Caption">
+    <p:bg>
+      <p:bgPr>
+        <a:solidFill>
+          <a:srgbClr val="FFFFFF"/>
+        </a:solidFill>
+      </p:bgPr>
+    </p:bg>
+    <p:spTree>
+      <p:nvGrpSpPr>
+        <p:cNvPr id="1" name=""/>
+        <p:cNvGrpSpPr/>
+        <p:nvPr/>
+      </p:nvGrpSpPr>
+      <p:grpSpPr>
+        <a:xfrm>
+          <a:off x="0" y="0"/>
+          <a:ext cx="0" cy="0"/>
+          <a:chOff x="0" y="0"/>
+          <a:chExt cx="0" cy="0"/>
+        </a:xfrm>
+      </p:grpSpPr>
+      <p:sp>
+        <p:nvSpPr>
+          <p:cNvPr id="7" name="PlaceHolder 1"/>
+          <p:cNvSpPr>
+            <a:spLocks noGrp="1"/>
+          </p:cNvSpPr>
+          <p:nvPr>
+            <p:ph type="title"/>
+          </p:nvPr>
+        </p:nvSpPr>
+        <p:spPr>
+          <a:xfrm>
+            <a:off x="457200" y="272880"/>
+            <a:ext cx="3007440" cy="1161360"/>
+          </a:xfrm>
+          <a:prstGeom prst="rect">
+            <a:avLst/>
+          </a:prstGeom>
+          <a:noFill/>
+          <a:ln w="0">
+            <a:noFill/>
+          </a:ln>
+        </p:spPr>
+        <p:txBody>
+          <a:bodyPr lIns="91440" tIns="45720" rIns="91440" bIns="45720" anchor="b">
+            <a:noAutofit/>
+          </a:bodyPr>
+          <a:lstStyle>
+            <a:lvl1pPr indent="0" algn="l" defTabSz="457200">
+              <a:lnSpc>
+                <a:spcPct val="100000"/>
+              </a:lnSpc>
+              <a:buNone/>
+              <a:tabLst>
+                <a:tab pos="0" algn="l"/>
+              </a:tabLst>
+              <a:defRPr lang="en-US" sz="2000" b="1" u="none" strike="noStrike">
+                <a:solidFill>
+                  <a:schemeClr val="dk1"/>
+                </a:solidFill>
+                <a:effectLst/>
+                <a:uFillTx/>
+                <a:latin typeface="Calibri"/>
+              </a:defRPr>
+            </a:lvl1pPr>
+          </a:lstStyle>
+          <a:p>
+            <a:pPr indent="0" algn="l" defTabSz="457200">
+              <a:lnSpc>
+                <a:spcPct val="100000"/>
+              </a:lnSpc>
+              <a:buNone/>
+              <a:tabLst>
+                <a:tab pos="0" algn="l"/>
+              </a:tabLst>
+            </a:pPr>
+            <a:r>
+              <a:rPr lang="en-US" sz="2000" b="1" u="none" strike="noStrike">
+                <a:solidFill>
+                  <a:schemeClr val="dk1"/>
+                </a:solidFill>
+                <a:effectLst/>
+                <a:uFillTx/>
+                <a:latin typeface="Calibri"/>
+              </a:rPr>
+              <a:t>Click to edit Master title style</a:t>
+            </a:r>
+            <a:endParaRPr lang="en-US" sz="2000" b="1" u="none" strike="noStrike">
+              <a:solidFill>
+                <a:schemeClr val="dk1"/>
+              </a:solidFill>
+              <a:effectLst/>
+              <a:uFillTx/>
+              <a:latin typeface="Calibri"/>
+            </a:endParaRPr>
+          </a:p>
+        </p:txBody>
+      </p:sp>
+      <p:sp>
+        <p:nvSpPr>
+          <p:cNvPr id="8" name="PlaceHolder 2"/>
+          <p:cNvSpPr>
+            <a:spLocks noGrp="1"/>
+          </p:cNvSpPr>
+          <p:nvPr>
+            <p:ph type="body"/>
+          </p:nvPr>
+        </p:nvSpPr>
+        <p:spPr>
+          <a:xfrm>
+            <a:off x="3575160" y="272880"/>
+            <a:ext cx="5110920" cy="5852520"/>
+          </a:xfrm>
+          <a:prstGeom prst="rect">
+            <a:avLst/>
+          </a:prstGeom>
+          <a:noFill/>
+          <a:ln w="0">
+            <a:noFill/>
+          </a:ln>
+        </p:spPr>
+        <p:txBody>
+          <a:bodyPr lIns="91440" tIns="45720" rIns="91440" bIns="45720" anchor="t">
+            <a:noAutofit/>
+          </a:bodyPr>
+          <a:lstStyle>
+            <a:lvl1pPr algn="l" defTabSz="457200">
+              <a:lnSpc>
+                <a:spcPct val="100000"/>
+              </a:lnSpc>
+              <a:spcBef>
                 <a:spcPts val="641"/>
               </a:spcBef>
               <a:buClr>
@@ -2347,7 +4411,7 @@
       </p:sp>
       <p:sp>
         <p:nvSpPr>
-          <p:cNvPr id="51" name="PlaceHolder 3"/>
+          <p:cNvPr id="9" name="PlaceHolder 3"/>
           <p:cNvSpPr>
             <a:spLocks noGrp="1"/>
           </p:cNvSpPr>
@@ -2358,7 +4422,7 @@
         <p:spPr>
           <a:xfrm>
             <a:off x="457200" y="1434960"/>
-            <a:ext cx="3007800" cy="4690800"/>
+            <a:ext cx="3007440" cy="4690440"/>
           </a:xfrm>
           <a:prstGeom prst="rect">
             <a:avLst/>
@@ -2431,18 +4495,18 @@
       </p:sp>
       <p:sp>
         <p:nvSpPr>
-          <p:cNvPr id="52" name="PlaceHolder 4"/>
+          <p:cNvPr id="10" name="PlaceHolder 4"/>
           <p:cNvSpPr>
             <a:spLocks noGrp="1"/>
           </p:cNvSpPr>
           <p:nvPr>
-            <p:ph type="dt" idx="28"/>
+            <p:ph type="dt" idx="4"/>
           </p:nvPr>
         </p:nvSpPr>
         <p:spPr>
           <a:xfrm>
             <a:off x="457200" y="6356520"/>
-            <a:ext cx="2133360" cy="364680"/>
+            <a:ext cx="2133000" cy="364320"/>
           </a:xfrm>
           <a:prstGeom prst="rect">
             <a:avLst/>
@@ -2462,6 +4526,9 @@
                 <a:spcPct val="100000"/>
               </a:lnSpc>
               <a:buNone/>
+              <a:tabLst>
+                <a:tab pos="0" algn="l"/>
+              </a:tabLst>
               <a:defRPr lang="en-US" sz="1200" b="0" u="none" strike="noStrike">
                 <a:solidFill>
                   <a:schemeClr val="dk1">
@@ -2480,6 +4547,9 @@
                 <a:spcPct val="100000"/>
               </a:lnSpc>
               <a:buNone/>
+              <a:tabLst>
+                <a:tab pos="0" algn="l"/>
+              </a:tabLst>
             </a:pPr>
             <a:r>
               <a:rPr lang="en-US" sz="1200" b="0" u="none" strike="noStrike">
@@ -2507,18 +4577,18 @@
       </p:sp>
       <p:sp>
         <p:nvSpPr>
-          <p:cNvPr id="53" name="PlaceHolder 5"/>
+          <p:cNvPr id="11" name="PlaceHolder 5"/>
           <p:cNvSpPr>
             <a:spLocks noGrp="1"/>
           </p:cNvSpPr>
           <p:nvPr>
-            <p:ph type="ftr" idx="29"/>
+            <p:ph type="ftr" idx="5"/>
           </p:nvPr>
         </p:nvSpPr>
         <p:spPr>
           <a:xfrm>
             <a:off x="3124080" y="6356520"/>
-            <a:ext cx="2895120" cy="364680"/>
+            <a:ext cx="2894760" cy="364320"/>
           </a:xfrm>
           <a:prstGeom prst="rect">
             <a:avLst/>
@@ -2534,7 +4604,13 @@
           </a:bodyPr>
           <a:lstStyle>
             <a:lvl1pPr indent="0" algn="ctr">
+              <a:lnSpc>
+                <a:spcPct val="100000"/>
+              </a:lnSpc>
               <a:buNone/>
+              <a:tabLst>
+                <a:tab pos="0" algn="l"/>
+              </a:tabLst>
               <a:defRPr lang="en-US" sz="1400" b="0" u="none" strike="noStrike">
                 <a:solidFill>
                   <a:srgbClr val="000000"/>
@@ -2547,7 +4623,13 @@
           </a:lstStyle>
           <a:p>
             <a:pPr indent="0" algn="ctr">
+              <a:lnSpc>
+                <a:spcPct val="100000"/>
+              </a:lnSpc>
               <a:buNone/>
+              <a:tabLst>
+                <a:tab pos="0" algn="l"/>
+              </a:tabLst>
             </a:pPr>
             <a:r>
               <a:rPr lang="en-US" sz="1400" b="0" u="none" strike="noStrike">
@@ -2573,18 +4655,18 @@
       </p:sp>
       <p:sp>
         <p:nvSpPr>
-          <p:cNvPr id="54" name="PlaceHolder 6"/>
+          <p:cNvPr id="12" name="PlaceHolder 6"/>
           <p:cNvSpPr>
             <a:spLocks noGrp="1"/>
           </p:cNvSpPr>
           <p:nvPr>
-            <p:ph type="sldNum" idx="30"/>
+            <p:ph type="sldNum" idx="6"/>
           </p:nvPr>
         </p:nvSpPr>
         <p:spPr>
           <a:xfrm>
             <a:off x="6553080" y="6356520"/>
-            <a:ext cx="2133360" cy="364680"/>
+            <a:ext cx="2133000" cy="364320"/>
           </a:xfrm>
           <a:prstGeom prst="rect">
             <a:avLst/>
@@ -2604,6 +4686,9 @@
                 <a:spcPct val="100000"/>
               </a:lnSpc>
               <a:buNone/>
+              <a:tabLst>
+                <a:tab pos="0" algn="l"/>
+              </a:tabLst>
               <a:defRPr lang="en-US" sz="1200" b="0" u="none" strike="noStrike">
                 <a:solidFill>
                   <a:schemeClr val="dk1">
@@ -2622,8 +4707,11 @@
                 <a:spcPct val="100000"/>
               </a:lnSpc>
               <a:buNone/>
-            </a:pPr>
-            <a:fld id="{F011C2E8-0715-4035-B17E-8AEB27703F71}" type="slidenum">
+              <a:tabLst>
+                <a:tab pos="0" algn="l"/>
+              </a:tabLst>
+            </a:pPr>
+            <a:fld id="{03A815CF-C70B-4784-9823-EEEFABBAEAFB}" type="slidenum">
               <a:rPr lang="en-US" sz="1200" b="0" u="none" strike="noStrike">
                 <a:solidFill>
                   <a:schemeClr val="dk1">
@@ -2655,7 +4743,7 @@
 </p:sldLayout>
 </file>
 
-<file path=ppt/slideLayouts/slideLayout11.xml><?xml version="1.0" encoding="utf-8"?>
+<file path=ppt/slideLayouts/slideLayout3.xml><?xml version="1.0" encoding="utf-8"?>
 <p:sldLayout xmlns:a="http://schemas.openxmlformats.org/drawingml/2006/main" xmlns:p="http://schemas.openxmlformats.org/presentationml/2006/main" xmlns:r="http://schemas.openxmlformats.org/officeDocument/2006/relationships" xmlns:p14="http://schemas.microsoft.com/office/powerpoint/2010/main" xmlns:p15="http://schemas.microsoft.com/office/powerpoint/2012/main" xmlns:mc="http://schemas.openxmlformats.org/markup-compatibility/2006" type="blank" preserve="1">
   <p:cSld name="Picture with Caption">
     <p:bg>
@@ -2681,7 +4769,7 @@
       </p:grpSpPr>
       <p:sp>
         <p:nvSpPr>
-          <p:cNvPr id="55" name="PlaceHolder 1"/>
+          <p:cNvPr id="13" name="PlaceHolder 1"/>
           <p:cNvSpPr>
             <a:spLocks noGrp="1"/>
           </p:cNvSpPr>
@@ -2692,7 +4780,7 @@
         <p:spPr>
           <a:xfrm>
             <a:off x="1792440" y="4800600"/>
-            <a:ext cx="5486040" cy="566280"/>
+            <a:ext cx="5485680" cy="565920"/>
           </a:xfrm>
           <a:prstGeom prst="rect">
             <a:avLst/>
@@ -2712,6 +4800,9 @@
                 <a:spcPct val="100000"/>
               </a:lnSpc>
               <a:buNone/>
+              <a:tabLst>
+                <a:tab pos="0" algn="l"/>
+              </a:tabLst>
               <a:defRPr lang="en-US" sz="2000" b="1" u="none" strike="noStrike">
                 <a:solidFill>
                   <a:schemeClr val="dk1"/>
@@ -2728,6 +4819,9 @@
                 <a:spcPct val="100000"/>
               </a:lnSpc>
               <a:buNone/>
+              <a:tabLst>
+                <a:tab pos="0" algn="l"/>
+              </a:tabLst>
             </a:pPr>
             <a:r>
               <a:rPr lang="en-US" sz="2000" b="1" u="none" strike="noStrike">
@@ -2753,7 +4847,7 @@
       </p:sp>
       <p:sp>
         <p:nvSpPr>
-          <p:cNvPr id="56" name="PlaceHolder 2"/>
+          <p:cNvPr id="14" name="PlaceHolder 2"/>
           <p:cNvSpPr>
             <a:spLocks noGrp="1"/>
           </p:cNvSpPr>
@@ -2764,7 +4858,7 @@
         <p:spPr>
           <a:xfrm>
             <a:off x="1792440" y="612720"/>
-            <a:ext cx="5486040" cy="4114440"/>
+            <a:ext cx="5485680" cy="4114080"/>
           </a:xfrm>
           <a:prstGeom prst="rect">
             <a:avLst/>
@@ -2783,7 +4877,7 @@
               <a:buNone/>
             </a:pPr>
             <a:r>
-              <a:rPr lang="en-US" sz="3200" b="0" u="none" strike="noStrike">
+              <a:rPr lang="en-US" sz="1800" b="0" u="none" strike="noStrike">
                 <a:solidFill>
                   <a:srgbClr val="000000"/>
                 </a:solidFill>
@@ -2793,7 +4887,7 @@
               </a:rPr>
               <a:t>Double-click to add an Image</a:t>
             </a:r>
-            <a:endParaRPr lang="en-US" sz="3200" b="0" u="none" strike="noStrike">
+            <a:endParaRPr lang="en-US" sz="1800" b="0" u="none" strike="noStrike">
               <a:solidFill>
                 <a:srgbClr val="000000"/>
               </a:solidFill>
@@ -2806,7 +4900,7 @@
       </p:sp>
       <p:sp>
         <p:nvSpPr>
-          <p:cNvPr id="57" name="PlaceHolder 3"/>
+          <p:cNvPr id="15" name="PlaceHolder 3"/>
           <p:cNvSpPr>
             <a:spLocks noGrp="1"/>
           </p:cNvSpPr>
@@ -2817,7 +4911,7 @@
         <p:spPr>
           <a:xfrm>
             <a:off x="1792440" y="5367240"/>
-            <a:ext cx="5486040" cy="804600"/>
+            <a:ext cx="5485680" cy="804240"/>
           </a:xfrm>
           <a:prstGeom prst="rect">
             <a:avLst/>
@@ -2890,18 +4984,18 @@
       </p:sp>
       <p:sp>
         <p:nvSpPr>
-          <p:cNvPr id="58" name="PlaceHolder 4"/>
+          <p:cNvPr id="16" name="PlaceHolder 4"/>
           <p:cNvSpPr>
             <a:spLocks noGrp="1"/>
           </p:cNvSpPr>
           <p:nvPr>
-            <p:ph type="dt" idx="31"/>
+            <p:ph type="dt" idx="7"/>
           </p:nvPr>
         </p:nvSpPr>
         <p:spPr>
           <a:xfrm>
             <a:off x="457200" y="6356520"/>
-            <a:ext cx="2133360" cy="364680"/>
+            <a:ext cx="2133000" cy="364320"/>
           </a:xfrm>
           <a:prstGeom prst="rect">
             <a:avLst/>
@@ -2921,6 +5015,9 @@
                 <a:spcPct val="100000"/>
               </a:lnSpc>
               <a:buNone/>
+              <a:tabLst>
+                <a:tab pos="0" algn="l"/>
+              </a:tabLst>
               <a:defRPr lang="en-US" sz="1200" b="0" u="none" strike="noStrike">
                 <a:solidFill>
                   <a:schemeClr val="dk1">
@@ -2939,6 +5036,9 @@
                 <a:spcPct val="100000"/>
               </a:lnSpc>
               <a:buNone/>
+              <a:tabLst>
+                <a:tab pos="0" algn="l"/>
+              </a:tabLst>
             </a:pPr>
             <a:r>
               <a:rPr lang="en-US" sz="1200" b="0" u="none" strike="noStrike">
@@ -2966,18 +5066,18 @@
       </p:sp>
       <p:sp>
         <p:nvSpPr>
-          <p:cNvPr id="59" name="PlaceHolder 5"/>
+          <p:cNvPr id="17" name="PlaceHolder 5"/>
           <p:cNvSpPr>
             <a:spLocks noGrp="1"/>
           </p:cNvSpPr>
           <p:nvPr>
-            <p:ph type="ftr" idx="32"/>
+            <p:ph type="ftr" idx="8"/>
           </p:nvPr>
         </p:nvSpPr>
         <p:spPr>
           <a:xfrm>
             <a:off x="3124080" y="6356520"/>
-            <a:ext cx="2895120" cy="364680"/>
+            <a:ext cx="2894760" cy="364320"/>
           </a:xfrm>
           <a:prstGeom prst="rect">
             <a:avLst/>
@@ -2993,7 +5093,13 @@
           </a:bodyPr>
           <a:lstStyle>
             <a:lvl1pPr indent="0" algn="ctr">
+              <a:lnSpc>
+                <a:spcPct val="100000"/>
+              </a:lnSpc>
               <a:buNone/>
+              <a:tabLst>
+                <a:tab pos="0" algn="l"/>
+              </a:tabLst>
               <a:defRPr lang="en-US" sz="1400" b="0" u="none" strike="noStrike">
                 <a:solidFill>
                   <a:srgbClr val="000000"/>
@@ -3006,7 +5112,13 @@
           </a:lstStyle>
           <a:p>
             <a:pPr indent="0" algn="ctr">
+              <a:lnSpc>
+                <a:spcPct val="100000"/>
+              </a:lnSpc>
               <a:buNone/>
+              <a:tabLst>
+                <a:tab pos="0" algn="l"/>
+              </a:tabLst>
             </a:pPr>
             <a:r>
               <a:rPr lang="en-US" sz="1400" b="0" u="none" strike="noStrike">
@@ -3032,18 +5144,18 @@
       </p:sp>
       <p:sp>
         <p:nvSpPr>
-          <p:cNvPr id="60" name="PlaceHolder 6"/>
+          <p:cNvPr id="18" name="PlaceHolder 6"/>
           <p:cNvSpPr>
             <a:spLocks noGrp="1"/>
           </p:cNvSpPr>
           <p:nvPr>
-            <p:ph type="sldNum" idx="33"/>
+            <p:ph type="sldNum" idx="9"/>
           </p:nvPr>
         </p:nvSpPr>
         <p:spPr>
           <a:xfrm>
             <a:off x="6553080" y="6356520"/>
-            <a:ext cx="2133360" cy="364680"/>
+            <a:ext cx="2133000" cy="364320"/>
           </a:xfrm>
           <a:prstGeom prst="rect">
             <a:avLst/>
@@ -3063,6 +5175,9 @@
                 <a:spcPct val="100000"/>
               </a:lnSpc>
               <a:buNone/>
+              <a:tabLst>
+                <a:tab pos="0" algn="l"/>
+              </a:tabLst>
               <a:defRPr lang="en-US" sz="1200" b="0" u="none" strike="noStrike">
                 <a:solidFill>
                   <a:schemeClr val="dk1">
@@ -3081,8 +5196,11 @@
                 <a:spcPct val="100000"/>
               </a:lnSpc>
               <a:buNone/>
-            </a:pPr>
-            <a:fld id="{ED251AE6-0CB6-4C36-9EE5-E25E570CCBAB}" type="slidenum">
+              <a:tabLst>
+                <a:tab pos="0" algn="l"/>
+              </a:tabLst>
+            </a:pPr>
+            <a:fld id="{B7E6D04E-E784-4DF4-8C9C-BF5C5B5ECDD4}" type="slidenum">
               <a:rPr lang="en-US" sz="1200" b="0" u="none" strike="noStrike">
                 <a:solidFill>
                   <a:schemeClr val="dk1">
@@ -3114,7 +5232,359 @@
 </p:sldLayout>
 </file>
 
-<file path=ppt/slideLayouts/slideLayout2.xml><?xml version="1.0" encoding="utf-8"?>
+<file path=ppt/slideLayouts/slideLayout4.xml><?xml version="1.0" encoding="utf-8"?>
+<p:sldLayout xmlns:a="http://schemas.openxmlformats.org/drawingml/2006/main" xmlns:p="http://schemas.openxmlformats.org/presentationml/2006/main" xmlns:r="http://schemas.openxmlformats.org/officeDocument/2006/relationships" xmlns:p14="http://schemas.microsoft.com/office/powerpoint/2010/main" xmlns:p15="http://schemas.microsoft.com/office/powerpoint/2012/main" xmlns:mc="http://schemas.openxmlformats.org/markup-compatibility/2006" type="title" preserve="1">
+  <p:cSld name="Title Slide">
+    <p:bg>
+      <p:bgPr>
+        <a:solidFill>
+          <a:srgbClr val="FFFFFF"/>
+        </a:solidFill>
+      </p:bgPr>
+    </p:bg>
+    <p:spTree>
+      <p:nvGrpSpPr>
+        <p:cNvPr id="1" name=""/>
+        <p:cNvGrpSpPr/>
+        <p:nvPr/>
+      </p:nvGrpSpPr>
+      <p:grpSpPr>
+        <a:xfrm>
+          <a:off x="0" y="0"/>
+          <a:ext cx="0" cy="0"/>
+          <a:chOff x="0" y="0"/>
+          <a:chExt cx="0" cy="0"/>
+        </a:xfrm>
+      </p:grpSpPr>
+      <p:sp>
+        <p:nvSpPr>
+          <p:cNvPr id="19" name="PlaceHolder 1"/>
+          <p:cNvSpPr>
+            <a:spLocks noGrp="1"/>
+          </p:cNvSpPr>
+          <p:nvPr>
+            <p:ph type="title"/>
+          </p:nvPr>
+        </p:nvSpPr>
+        <p:spPr>
+          <a:xfrm>
+            <a:off x="685800" y="2130480"/>
+            <a:ext cx="7771680" cy="1469160"/>
+          </a:xfrm>
+          <a:prstGeom prst="rect">
+            <a:avLst/>
+          </a:prstGeom>
+          <a:noFill/>
+          <a:ln w="0">
+            <a:noFill/>
+          </a:ln>
+        </p:spPr>
+        <p:txBody>
+          <a:bodyPr lIns="91440" tIns="45720" rIns="91440" bIns="45720" anchor="ctr">
+            <a:noAutofit/>
+          </a:bodyPr>
+          <a:lstStyle>
+            <a:lvl1pPr indent="0" algn="ctr" defTabSz="457200">
+              <a:lnSpc>
+                <a:spcPct val="100000"/>
+              </a:lnSpc>
+              <a:buNone/>
+              <a:tabLst>
+                <a:tab pos="0" algn="l"/>
+              </a:tabLst>
+              <a:defRPr lang="en-US" sz="4400" b="0" u="none" strike="noStrike">
+                <a:solidFill>
+                  <a:schemeClr val="dk1"/>
+                </a:solidFill>
+                <a:effectLst/>
+                <a:uFillTx/>
+                <a:latin typeface="Calibri"/>
+              </a:defRPr>
+            </a:lvl1pPr>
+          </a:lstStyle>
+          <a:p>
+            <a:pPr indent="0" algn="ctr" defTabSz="457200">
+              <a:lnSpc>
+                <a:spcPct val="100000"/>
+              </a:lnSpc>
+              <a:buNone/>
+              <a:tabLst>
+                <a:tab pos="0" algn="l"/>
+              </a:tabLst>
+            </a:pPr>
+            <a:r>
+              <a:rPr lang="en-US" sz="4400" b="0" u="none" strike="noStrike">
+                <a:solidFill>
+                  <a:schemeClr val="dk1"/>
+                </a:solidFill>
+                <a:effectLst/>
+                <a:uFillTx/>
+                <a:latin typeface="Calibri"/>
+              </a:rPr>
+              <a:t>Click to edit Master title style</a:t>
+            </a:r>
+            <a:endParaRPr lang="en-US" sz="4400" b="0" u="none" strike="noStrike">
+              <a:solidFill>
+                <a:schemeClr val="dk1"/>
+              </a:solidFill>
+              <a:effectLst/>
+              <a:uFillTx/>
+              <a:latin typeface="Calibri"/>
+            </a:endParaRPr>
+          </a:p>
+        </p:txBody>
+      </p:sp>
+      <p:sp>
+        <p:nvSpPr>
+          <p:cNvPr id="20" name="PlaceHolder 2"/>
+          <p:cNvSpPr>
+            <a:spLocks noGrp="1"/>
+          </p:cNvSpPr>
+          <p:nvPr>
+            <p:ph type="dt" idx="10"/>
+          </p:nvPr>
+        </p:nvSpPr>
+        <p:spPr>
+          <a:xfrm>
+            <a:off x="457200" y="6356520"/>
+            <a:ext cx="2133000" cy="364320"/>
+          </a:xfrm>
+          <a:prstGeom prst="rect">
+            <a:avLst/>
+          </a:prstGeom>
+          <a:noFill/>
+          <a:ln w="0">
+            <a:noFill/>
+          </a:ln>
+        </p:spPr>
+        <p:txBody>
+          <a:bodyPr lIns="91440" tIns="45720" rIns="91440" bIns="45720" anchor="ctr">
+            <a:noAutofit/>
+          </a:bodyPr>
+          <a:lstStyle>
+            <a:lvl1pPr indent="0" algn="l" defTabSz="457200">
+              <a:lnSpc>
+                <a:spcPct val="100000"/>
+              </a:lnSpc>
+              <a:buNone/>
+              <a:tabLst>
+                <a:tab pos="0" algn="l"/>
+              </a:tabLst>
+              <a:defRPr lang="en-US" sz="1200" b="0" u="none" strike="noStrike">
+                <a:solidFill>
+                  <a:schemeClr val="dk1">
+                    <a:tint val="75000"/>
+                  </a:schemeClr>
+                </a:solidFill>
+                <a:effectLst/>
+                <a:uFillTx/>
+                <a:latin typeface="Calibri"/>
+              </a:defRPr>
+            </a:lvl1pPr>
+          </a:lstStyle>
+          <a:p>
+            <a:pPr indent="0" algn="l" defTabSz="457200">
+              <a:lnSpc>
+                <a:spcPct val="100000"/>
+              </a:lnSpc>
+              <a:buNone/>
+              <a:tabLst>
+                <a:tab pos="0" algn="l"/>
+              </a:tabLst>
+            </a:pPr>
+            <a:r>
+              <a:rPr lang="en-US" sz="1200" b="0" u="none" strike="noStrike">
+                <a:solidFill>
+                  <a:schemeClr val="dk1">
+                    <a:tint val="75000"/>
+                  </a:schemeClr>
+                </a:solidFill>
+                <a:effectLst/>
+                <a:uFillTx/>
+                <a:latin typeface="Calibri"/>
+              </a:rPr>
+              <a:t>&lt;date/time&gt;</a:t>
+            </a:r>
+            <a:endParaRPr lang="en-US" sz="1200" b="0" u="none" strike="noStrike">
+              <a:solidFill>
+                <a:srgbClr val="000000"/>
+              </a:solidFill>
+              <a:effectLst/>
+              <a:uFillTx/>
+              <a:latin typeface="Times New Roman"/>
+            </a:endParaRPr>
+          </a:p>
+        </p:txBody>
+      </p:sp>
+      <p:sp>
+        <p:nvSpPr>
+          <p:cNvPr id="21" name="PlaceHolder 3"/>
+          <p:cNvSpPr>
+            <a:spLocks noGrp="1"/>
+          </p:cNvSpPr>
+          <p:nvPr>
+            <p:ph type="ftr" idx="11"/>
+          </p:nvPr>
+        </p:nvSpPr>
+        <p:spPr>
+          <a:xfrm>
+            <a:off x="3124080" y="6356520"/>
+            <a:ext cx="2894760" cy="364320"/>
+          </a:xfrm>
+          <a:prstGeom prst="rect">
+            <a:avLst/>
+          </a:prstGeom>
+          <a:noFill/>
+          <a:ln w="0">
+            <a:noFill/>
+          </a:ln>
+        </p:spPr>
+        <p:txBody>
+          <a:bodyPr lIns="91440" tIns="45720" rIns="91440" bIns="45720" anchor="ctr">
+            <a:noAutofit/>
+          </a:bodyPr>
+          <a:lstStyle>
+            <a:lvl1pPr indent="0" algn="ctr">
+              <a:lnSpc>
+                <a:spcPct val="100000"/>
+              </a:lnSpc>
+              <a:buNone/>
+              <a:tabLst>
+                <a:tab pos="0" algn="l"/>
+              </a:tabLst>
+              <a:defRPr lang="en-US" sz="1400" b="0" u="none" strike="noStrike">
+                <a:solidFill>
+                  <a:srgbClr val="000000"/>
+                </a:solidFill>
+                <a:effectLst/>
+                <a:uFillTx/>
+                <a:latin typeface="Times New Roman"/>
+              </a:defRPr>
+            </a:lvl1pPr>
+          </a:lstStyle>
+          <a:p>
+            <a:pPr indent="0" algn="ctr">
+              <a:lnSpc>
+                <a:spcPct val="100000"/>
+              </a:lnSpc>
+              <a:buNone/>
+              <a:tabLst>
+                <a:tab pos="0" algn="l"/>
+              </a:tabLst>
+            </a:pPr>
+            <a:r>
+              <a:rPr lang="en-US" sz="1400" b="0" u="none" strike="noStrike">
+                <a:solidFill>
+                  <a:srgbClr val="000000"/>
+                </a:solidFill>
+                <a:effectLst/>
+                <a:uFillTx/>
+                <a:latin typeface="Times New Roman"/>
+              </a:rPr>
+              <a:t>&lt;footer&gt;</a:t>
+            </a:r>
+            <a:endParaRPr lang="en-US" sz="1400" b="0" u="none" strike="noStrike">
+              <a:solidFill>
+                <a:srgbClr val="000000"/>
+              </a:solidFill>
+              <a:effectLst/>
+              <a:uFillTx/>
+              <a:latin typeface="Times New Roman"/>
+            </a:endParaRPr>
+          </a:p>
+        </p:txBody>
+      </p:sp>
+      <p:sp>
+        <p:nvSpPr>
+          <p:cNvPr id="22" name="PlaceHolder 4"/>
+          <p:cNvSpPr>
+            <a:spLocks noGrp="1"/>
+          </p:cNvSpPr>
+          <p:nvPr>
+            <p:ph type="sldNum" idx="12"/>
+          </p:nvPr>
+        </p:nvSpPr>
+        <p:spPr>
+          <a:xfrm>
+            <a:off x="6553080" y="6356520"/>
+            <a:ext cx="2133000" cy="364320"/>
+          </a:xfrm>
+          <a:prstGeom prst="rect">
+            <a:avLst/>
+          </a:prstGeom>
+          <a:noFill/>
+          <a:ln w="0">
+            <a:noFill/>
+          </a:ln>
+        </p:spPr>
+        <p:txBody>
+          <a:bodyPr lIns="91440" tIns="45720" rIns="91440" bIns="45720" anchor="ctr">
+            <a:noAutofit/>
+          </a:bodyPr>
+          <a:lstStyle>
+            <a:lvl1pPr indent="0" algn="r" defTabSz="457200">
+              <a:lnSpc>
+                <a:spcPct val="100000"/>
+              </a:lnSpc>
+              <a:buNone/>
+              <a:tabLst>
+                <a:tab pos="0" algn="l"/>
+              </a:tabLst>
+              <a:defRPr lang="en-US" sz="1200" b="0" u="none" strike="noStrike">
+                <a:solidFill>
+                  <a:schemeClr val="dk1">
+                    <a:tint val="75000"/>
+                  </a:schemeClr>
+                </a:solidFill>
+                <a:effectLst/>
+                <a:uFillTx/>
+                <a:latin typeface="Calibri"/>
+              </a:defRPr>
+            </a:lvl1pPr>
+          </a:lstStyle>
+          <a:p>
+            <a:pPr indent="0" algn="r" defTabSz="457200">
+              <a:lnSpc>
+                <a:spcPct val="100000"/>
+              </a:lnSpc>
+              <a:buNone/>
+              <a:tabLst>
+                <a:tab pos="0" algn="l"/>
+              </a:tabLst>
+            </a:pPr>
+            <a:fld id="{7526ACD7-472D-4E76-9B3D-92A68725400E}" type="slidenum">
+              <a:rPr lang="en-US" sz="1200" b="0" u="none" strike="noStrike">
+                <a:solidFill>
+                  <a:schemeClr val="dk1">
+                    <a:tint val="75000"/>
+                  </a:schemeClr>
+                </a:solidFill>
+                <a:effectLst/>
+                <a:uFillTx/>
+                <a:latin typeface="Calibri"/>
+              </a:rPr>
+              <a:t>&lt;number&gt;</a:t>
+            </a:fld>
+            <a:endParaRPr lang="en-US" sz="1200" b="0" u="none" strike="noStrike">
+              <a:solidFill>
+                <a:srgbClr val="000000"/>
+              </a:solidFill>
+              <a:effectLst/>
+              <a:uFillTx/>
+              <a:latin typeface="Times New Roman"/>
+            </a:endParaRPr>
+          </a:p>
+        </p:txBody>
+      </p:sp>
+    </p:spTree>
+  </p:cSld>
+  <p:clrMapOvr>
+    <a:masterClrMapping/>
+  </p:clrMapOvr>
+</p:sldLayout>
+</file>
+
+<file path=ppt/slideLayouts/slideLayout5.xml><?xml version="1.0" encoding="utf-8"?>
 <p:sldLayout xmlns:a="http://schemas.openxmlformats.org/drawingml/2006/main" xmlns:p="http://schemas.openxmlformats.org/presentationml/2006/main" xmlns:r="http://schemas.openxmlformats.org/officeDocument/2006/relationships" xmlns:p14="http://schemas.microsoft.com/office/powerpoint/2010/main" xmlns:p15="http://schemas.microsoft.com/office/powerpoint/2012/main" xmlns:mc="http://schemas.openxmlformats.org/markup-compatibility/2006" type="vertTx" preserve="1">
   <p:cSld name="Title and Vertical Text">
     <p:bg>
@@ -3140,7 +5610,7 @@
       </p:grpSpPr>
       <p:sp>
         <p:nvSpPr>
-          <p:cNvPr id="6" name="PlaceHolder 1"/>
+          <p:cNvPr id="23" name="PlaceHolder 1"/>
           <p:cNvSpPr>
             <a:spLocks noGrp="1"/>
           </p:cNvSpPr>
@@ -3151,7 +5621,7 @@
         <p:spPr>
           <a:xfrm>
             <a:off x="457200" y="274680"/>
-            <a:ext cx="8229240" cy="1142640"/>
+            <a:ext cx="8228880" cy="1142280"/>
           </a:xfrm>
           <a:prstGeom prst="rect">
             <a:avLst/>
@@ -3171,6 +5641,9 @@
                 <a:spcPct val="100000"/>
               </a:lnSpc>
               <a:buNone/>
+              <a:tabLst>
+                <a:tab pos="0" algn="l"/>
+              </a:tabLst>
               <a:defRPr lang="en-US" sz="4400" b="0" u="none" strike="noStrike">
                 <a:solidFill>
                   <a:schemeClr val="dk1"/>
@@ -3187,6 +5660,9 @@
                 <a:spcPct val="100000"/>
               </a:lnSpc>
               <a:buNone/>
+              <a:tabLst>
+                <a:tab pos="0" algn="l"/>
+              </a:tabLst>
             </a:pPr>
             <a:r>
               <a:rPr lang="en-US" sz="4400" b="0" u="none" strike="noStrike">
@@ -3212,7 +5688,7 @@
       </p:sp>
       <p:sp>
         <p:nvSpPr>
-          <p:cNvPr id="7" name="PlaceHolder 2"/>
+          <p:cNvPr id="24" name="PlaceHolder 2"/>
           <p:cNvSpPr>
             <a:spLocks noGrp="1"/>
           </p:cNvSpPr>
@@ -3223,7 +5699,7 @@
         <p:spPr>
           <a:xfrm>
             <a:off x="457200" y="1600200"/>
-            <a:ext cx="8229240" cy="4525560"/>
+            <a:ext cx="8228880" cy="4525200"/>
           </a:xfrm>
           <a:prstGeom prst="rect">
             <a:avLst/>
@@ -3518,18 +5994,18 @@
       </p:sp>
       <p:sp>
         <p:nvSpPr>
-          <p:cNvPr id="8" name="PlaceHolder 3"/>
+          <p:cNvPr id="25" name="PlaceHolder 3"/>
           <p:cNvSpPr>
             <a:spLocks noGrp="1"/>
           </p:cNvSpPr>
           <p:nvPr>
-            <p:ph type="dt" idx="4"/>
+            <p:ph type="dt" idx="13"/>
           </p:nvPr>
         </p:nvSpPr>
         <p:spPr>
           <a:xfrm>
             <a:off x="457200" y="6356520"/>
-            <a:ext cx="2133360" cy="364680"/>
+            <a:ext cx="2133000" cy="364320"/>
           </a:xfrm>
           <a:prstGeom prst="rect">
             <a:avLst/>
@@ -3549,6 +6025,9 @@
                 <a:spcPct val="100000"/>
               </a:lnSpc>
               <a:buNone/>
+              <a:tabLst>
+                <a:tab pos="0" algn="l"/>
+              </a:tabLst>
               <a:defRPr lang="en-US" sz="1200" b="0" u="none" strike="noStrike">
                 <a:solidFill>
                   <a:schemeClr val="dk1">
@@ -3567,6 +6046,9 @@
                 <a:spcPct val="100000"/>
               </a:lnSpc>
               <a:buNone/>
+              <a:tabLst>
+                <a:tab pos="0" algn="l"/>
+              </a:tabLst>
             </a:pPr>
             <a:r>
               <a:rPr lang="en-US" sz="1200" b="0" u="none" strike="noStrike">
@@ -3594,18 +6076,18 @@
       </p:sp>
       <p:sp>
         <p:nvSpPr>
-          <p:cNvPr id="9" name="PlaceHolder 4"/>
+          <p:cNvPr id="26" name="PlaceHolder 4"/>
           <p:cNvSpPr>
             <a:spLocks noGrp="1"/>
           </p:cNvSpPr>
           <p:nvPr>
-            <p:ph type="ftr" idx="5"/>
+            <p:ph type="ftr" idx="14"/>
           </p:nvPr>
         </p:nvSpPr>
         <p:spPr>
           <a:xfrm>
             <a:off x="3124080" y="6356520"/>
-            <a:ext cx="2895120" cy="364680"/>
+            <a:ext cx="2894760" cy="364320"/>
           </a:xfrm>
           <a:prstGeom prst="rect">
             <a:avLst/>
@@ -3621,7 +6103,13 @@
           </a:bodyPr>
           <a:lstStyle>
             <a:lvl1pPr indent="0" algn="ctr">
+              <a:lnSpc>
+                <a:spcPct val="100000"/>
+              </a:lnSpc>
               <a:buNone/>
+              <a:tabLst>
+                <a:tab pos="0" algn="l"/>
+              </a:tabLst>
               <a:defRPr lang="en-US" sz="1400" b="0" u="none" strike="noStrike">
                 <a:solidFill>
                   <a:srgbClr val="000000"/>
@@ -3634,7 +6122,13 @@
           </a:lstStyle>
           <a:p>
             <a:pPr indent="0" algn="ctr">
+              <a:lnSpc>
+                <a:spcPct val="100000"/>
+              </a:lnSpc>
               <a:buNone/>
+              <a:tabLst>
+                <a:tab pos="0" algn="l"/>
+              </a:tabLst>
             </a:pPr>
             <a:r>
               <a:rPr lang="en-US" sz="1400" b="0" u="none" strike="noStrike">
@@ -3660,18 +6154,18 @@
       </p:sp>
       <p:sp>
         <p:nvSpPr>
-          <p:cNvPr id="10" name="PlaceHolder 5"/>
+          <p:cNvPr id="27" name="PlaceHolder 5"/>
           <p:cNvSpPr>
             <a:spLocks noGrp="1"/>
           </p:cNvSpPr>
           <p:nvPr>
-            <p:ph type="sldNum" idx="6"/>
+            <p:ph type="sldNum" idx="15"/>
           </p:nvPr>
         </p:nvSpPr>
         <p:spPr>
           <a:xfrm>
             <a:off x="6553080" y="6356520"/>
-            <a:ext cx="2133360" cy="364680"/>
+            <a:ext cx="2133000" cy="364320"/>
           </a:xfrm>
           <a:prstGeom prst="rect">
             <a:avLst/>
@@ -3691,6 +6185,9 @@
                 <a:spcPct val="100000"/>
               </a:lnSpc>
               <a:buNone/>
+              <a:tabLst>
+                <a:tab pos="0" algn="l"/>
+              </a:tabLst>
               <a:defRPr lang="en-US" sz="1200" b="0" u="none" strike="noStrike">
                 <a:solidFill>
                   <a:schemeClr val="dk1">
@@ -3709,8 +6206,11 @@
                 <a:spcPct val="100000"/>
               </a:lnSpc>
               <a:buNone/>
-            </a:pPr>
-            <a:fld id="{AD3CCF6A-D4E4-4B4D-A451-FD43C5872A1B}" type="slidenum">
+              <a:tabLst>
+                <a:tab pos="0" algn="l"/>
+              </a:tabLst>
+            </a:pPr>
+            <a:fld id="{56788EB1-C177-4352-861D-80AAA59EF7B8}" type="slidenum">
               <a:rPr lang="en-US" sz="1200" b="0" u="none" strike="noStrike">
                 <a:solidFill>
                   <a:schemeClr val="dk1">
@@ -3742,7 +6242,7 @@
 </p:sldLayout>
 </file>
 
-<file path=ppt/slideLayouts/slideLayout3.xml><?xml version="1.0" encoding="utf-8"?>
+<file path=ppt/slideLayouts/slideLayout6.xml><?xml version="1.0" encoding="utf-8"?>
 <p:sldLayout xmlns:a="http://schemas.openxmlformats.org/drawingml/2006/main" xmlns:p="http://schemas.openxmlformats.org/presentationml/2006/main" xmlns:r="http://schemas.openxmlformats.org/officeDocument/2006/relationships" xmlns:p14="http://schemas.microsoft.com/office/powerpoint/2010/main" xmlns:p15="http://schemas.microsoft.com/office/powerpoint/2012/main" xmlns:mc="http://schemas.openxmlformats.org/markup-compatibility/2006" type="vertTitleAndTx" preserve="1">
   <p:cSld name="Vertical Title and Text">
     <p:bg>
@@ -3768,7 +6268,7 @@
       </p:grpSpPr>
       <p:sp>
         <p:nvSpPr>
-          <p:cNvPr id="11" name="PlaceHolder 1"/>
+          <p:cNvPr id="28" name="PlaceHolder 1"/>
           <p:cNvSpPr>
             <a:spLocks noGrp="1"/>
           </p:cNvSpPr>
@@ -3779,7 +6279,7 @@
         <p:spPr>
           <a:xfrm>
             <a:off x="6629400" y="274680"/>
-            <a:ext cx="2057040" cy="5851080"/>
+            <a:ext cx="2056680" cy="5850720"/>
           </a:xfrm>
           <a:prstGeom prst="rect">
             <a:avLst/>
@@ -3799,6 +6299,9 @@
                 <a:spcPct val="100000"/>
               </a:lnSpc>
               <a:buNone/>
+              <a:tabLst>
+                <a:tab pos="0" algn="l"/>
+              </a:tabLst>
               <a:defRPr lang="en-US" sz="4400" b="0" u="none" strike="noStrike">
                 <a:solidFill>
                   <a:schemeClr val="dk1"/>
@@ -3815,6 +6318,9 @@
                 <a:spcPct val="100000"/>
               </a:lnSpc>
               <a:buNone/>
+              <a:tabLst>
+                <a:tab pos="0" algn="l"/>
+              </a:tabLst>
             </a:pPr>
             <a:r>
               <a:rPr lang="en-US" sz="4400" b="0" u="none" strike="noStrike">
@@ -3825,128 +6331,7 @@
                 <a:uFillTx/>
                 <a:latin typeface="Calibri"/>
               </a:rPr>
-              <a:t>Cli</a:t>
-            </a:r>
-            <a:r>
-              <a:rPr lang="en-US" sz="4400" b="0" u="none" strike="noStrike">
-                <a:solidFill>
-                  <a:schemeClr val="dk1"/>
-                </a:solidFill>
-                <a:effectLst/>
-                <a:uFillTx/>
-                <a:latin typeface="Calibri"/>
-              </a:rPr>
-              <a:t>ck </a:t>
-            </a:r>
-            <a:r>
-              <a:rPr lang="en-US" sz="4400" b="0" u="none" strike="noStrike">
-                <a:solidFill>
-                  <a:schemeClr val="dk1"/>
-                </a:solidFill>
-                <a:effectLst/>
-                <a:uFillTx/>
-                <a:latin typeface="Calibri"/>
-              </a:rPr>
-              <a:t>to </a:t>
-            </a:r>
-            <a:r>
-              <a:rPr lang="en-US" sz="4400" b="0" u="none" strike="noStrike">
-                <a:solidFill>
-                  <a:schemeClr val="dk1"/>
-                </a:solidFill>
-                <a:effectLst/>
-                <a:uFillTx/>
-                <a:latin typeface="Calibri"/>
-              </a:rPr>
-              <a:t>ed</a:t>
-            </a:r>
-            <a:r>
-              <a:rPr lang="en-US" sz="4400" b="0" u="none" strike="noStrike">
-                <a:solidFill>
-                  <a:schemeClr val="dk1"/>
-                </a:solidFill>
-                <a:effectLst/>
-                <a:uFillTx/>
-                <a:latin typeface="Calibri"/>
-              </a:rPr>
-              <a:t>it </a:t>
-            </a:r>
-            <a:r>
-              <a:rPr lang="en-US" sz="4400" b="0" u="none" strike="noStrike">
-                <a:solidFill>
-                  <a:schemeClr val="dk1"/>
-                </a:solidFill>
-                <a:effectLst/>
-                <a:uFillTx/>
-                <a:latin typeface="Calibri"/>
-              </a:rPr>
-              <a:t>M</a:t>
-            </a:r>
-            <a:r>
-              <a:rPr lang="en-US" sz="4400" b="0" u="none" strike="noStrike">
-                <a:solidFill>
-                  <a:schemeClr val="dk1"/>
-                </a:solidFill>
-                <a:effectLst/>
-                <a:uFillTx/>
-                <a:latin typeface="Calibri"/>
-              </a:rPr>
-              <a:t>ast</a:t>
-            </a:r>
-            <a:r>
-              <a:rPr lang="en-US" sz="4400" b="0" u="none" strike="noStrike">
-                <a:solidFill>
-                  <a:schemeClr val="dk1"/>
-                </a:solidFill>
-                <a:effectLst/>
-                <a:uFillTx/>
-                <a:latin typeface="Calibri"/>
-              </a:rPr>
-              <a:t>er </a:t>
-            </a:r>
-            <a:r>
-              <a:rPr lang="en-US" sz="4400" b="0" u="none" strike="noStrike">
-                <a:solidFill>
-                  <a:schemeClr val="dk1"/>
-                </a:solidFill>
-                <a:effectLst/>
-                <a:uFillTx/>
-                <a:latin typeface="Calibri"/>
-              </a:rPr>
-              <a:t>titl</a:t>
-            </a:r>
-            <a:r>
-              <a:rPr lang="en-US" sz="4400" b="0" u="none" strike="noStrike">
-                <a:solidFill>
-                  <a:schemeClr val="dk1"/>
-                </a:solidFill>
-                <a:effectLst/>
-                <a:uFillTx/>
-                <a:latin typeface="Calibri"/>
-              </a:rPr>
-              <a:t>e </a:t>
-            </a:r>
-            <a:r>
-              <a:rPr lang="en-US" sz="4400" b="0" u="none" strike="noStrike">
-                <a:solidFill>
-                  <a:schemeClr val="dk1"/>
-                </a:solidFill>
-                <a:effectLst/>
-                <a:uFillTx/>
-                <a:latin typeface="Calibri"/>
-              </a:rPr>
-              <a:t>sty</a:t>
-            </a:r>
-            <a:r>
-              <a:rPr lang="en-US" sz="4400" b="0" u="none" strike="noStrike">
-                <a:solidFill>
-                  <a:schemeClr val="dk1"/>
-                </a:solidFill>
-                <a:effectLst/>
-                <a:uFillTx/>
-                <a:latin typeface="Calibri"/>
-              </a:rPr>
-              <a:t>le</a:t>
+              <a:t>Click to edit Master title style</a:t>
             </a:r>
             <a:endParaRPr lang="en-US" sz="4400" b="0" u="none" strike="noStrike">
               <a:solidFill>
@@ -3961,7 +6346,7 @@
       </p:sp>
       <p:sp>
         <p:nvSpPr>
-          <p:cNvPr id="12" name="PlaceHolder 2"/>
+          <p:cNvPr id="29" name="PlaceHolder 2"/>
           <p:cNvSpPr>
             <a:spLocks noGrp="1"/>
           </p:cNvSpPr>
@@ -3972,7 +6357,7 @@
         <p:spPr>
           <a:xfrm>
             <a:off x="457200" y="274680"/>
-            <a:ext cx="6019560" cy="5851080"/>
+            <a:ext cx="6019200" cy="5850720"/>
           </a:xfrm>
           <a:prstGeom prst="rect">
             <a:avLst/>
@@ -4267,18 +6652,18 @@
       </p:sp>
       <p:sp>
         <p:nvSpPr>
-          <p:cNvPr id="13" name="PlaceHolder 3"/>
+          <p:cNvPr id="30" name="PlaceHolder 3"/>
           <p:cNvSpPr>
             <a:spLocks noGrp="1"/>
           </p:cNvSpPr>
           <p:nvPr>
-            <p:ph type="dt" idx="7"/>
+            <p:ph type="dt" idx="16"/>
           </p:nvPr>
         </p:nvSpPr>
         <p:spPr>
           <a:xfrm>
             <a:off x="457200" y="6356520"/>
-            <a:ext cx="2133360" cy="364680"/>
+            <a:ext cx="2133000" cy="364320"/>
           </a:xfrm>
           <a:prstGeom prst="rect">
             <a:avLst/>
@@ -4298,6 +6683,9 @@
                 <a:spcPct val="100000"/>
               </a:lnSpc>
               <a:buNone/>
+              <a:tabLst>
+                <a:tab pos="0" algn="l"/>
+              </a:tabLst>
               <a:defRPr lang="en-US" sz="1200" b="0" u="none" strike="noStrike">
                 <a:solidFill>
                   <a:schemeClr val="dk1">
@@ -4316,6 +6704,9 @@
                 <a:spcPct val="100000"/>
               </a:lnSpc>
               <a:buNone/>
+              <a:tabLst>
+                <a:tab pos="0" algn="l"/>
+              </a:tabLst>
             </a:pPr>
             <a:r>
               <a:rPr lang="en-US" sz="1200" b="0" u="none" strike="noStrike">
@@ -4343,18 +6734,18 @@
       </p:sp>
       <p:sp>
         <p:nvSpPr>
-          <p:cNvPr id="14" name="PlaceHolder 4"/>
+          <p:cNvPr id="31" name="PlaceHolder 4"/>
           <p:cNvSpPr>
             <a:spLocks noGrp="1"/>
           </p:cNvSpPr>
           <p:nvPr>
-            <p:ph type="ftr" idx="8"/>
+            <p:ph type="ftr" idx="17"/>
           </p:nvPr>
         </p:nvSpPr>
         <p:spPr>
           <a:xfrm>
             <a:off x="3124080" y="6356520"/>
-            <a:ext cx="2895120" cy="364680"/>
+            <a:ext cx="2894760" cy="364320"/>
           </a:xfrm>
           <a:prstGeom prst="rect">
             <a:avLst/>
@@ -4370,7 +6761,13 @@
           </a:bodyPr>
           <a:lstStyle>
             <a:lvl1pPr indent="0" algn="ctr">
+              <a:lnSpc>
+                <a:spcPct val="100000"/>
+              </a:lnSpc>
               <a:buNone/>
+              <a:tabLst>
+                <a:tab pos="0" algn="l"/>
+              </a:tabLst>
               <a:defRPr lang="en-US" sz="1400" b="0" u="none" strike="noStrike">
                 <a:solidFill>
                   <a:srgbClr val="000000"/>
@@ -4383,7 +6780,13 @@
           </a:lstStyle>
           <a:p>
             <a:pPr indent="0" algn="ctr">
+              <a:lnSpc>
+                <a:spcPct val="100000"/>
+              </a:lnSpc>
               <a:buNone/>
+              <a:tabLst>
+                <a:tab pos="0" algn="l"/>
+              </a:tabLst>
             </a:pPr>
             <a:r>
               <a:rPr lang="en-US" sz="1400" b="0" u="none" strike="noStrike">
@@ -4409,18 +6812,18 @@
       </p:sp>
       <p:sp>
         <p:nvSpPr>
-          <p:cNvPr id="15" name="PlaceHolder 5"/>
+          <p:cNvPr id="32" name="PlaceHolder 5"/>
           <p:cNvSpPr>
             <a:spLocks noGrp="1"/>
           </p:cNvSpPr>
           <p:nvPr>
-            <p:ph type="sldNum" idx="9"/>
+            <p:ph type="sldNum" idx="18"/>
           </p:nvPr>
         </p:nvSpPr>
         <p:spPr>
           <a:xfrm>
             <a:off x="6553080" y="6356520"/>
-            <a:ext cx="2133360" cy="364680"/>
+            <a:ext cx="2133000" cy="364320"/>
           </a:xfrm>
           <a:prstGeom prst="rect">
             <a:avLst/>
@@ -4440,6 +6843,9 @@
                 <a:spcPct val="100000"/>
               </a:lnSpc>
               <a:buNone/>
+              <a:tabLst>
+                <a:tab pos="0" algn="l"/>
+              </a:tabLst>
               <a:defRPr lang="en-US" sz="1200" b="0" u="none" strike="noStrike">
                 <a:solidFill>
                   <a:schemeClr val="dk1">
@@ -4458,8 +6864,11 @@
                 <a:spcPct val="100000"/>
               </a:lnSpc>
               <a:buNone/>
-            </a:pPr>
-            <a:fld id="{0FC4C9B9-8CCD-4DBF-BD61-F77292F5B0D3}" type="slidenum">
+              <a:tabLst>
+                <a:tab pos="0" algn="l"/>
+              </a:tabLst>
+            </a:pPr>
+            <a:fld id="{19F17B75-D0FE-403B-BAB5-800C9491906F}" type="slidenum">
               <a:rPr lang="en-US" sz="1200" b="0" u="none" strike="noStrike">
                 <a:solidFill>
                   <a:schemeClr val="dk1">
@@ -4491,7 +6900,7 @@
 </p:sldLayout>
 </file>
 
-<file path=ppt/slideLayouts/slideLayout4.xml><?xml version="1.0" encoding="utf-8"?>
+<file path=ppt/slideLayouts/slideLayout7.xml><?xml version="1.0" encoding="utf-8"?>
 <p:sldLayout xmlns:a="http://schemas.openxmlformats.org/drawingml/2006/main" xmlns:p="http://schemas.openxmlformats.org/presentationml/2006/main" xmlns:r="http://schemas.openxmlformats.org/officeDocument/2006/relationships" xmlns:p14="http://schemas.microsoft.com/office/powerpoint/2010/main" xmlns:p15="http://schemas.microsoft.com/office/powerpoint/2012/main" xmlns:mc="http://schemas.openxmlformats.org/markup-compatibility/2006" type="obj" preserve="1">
   <p:cSld name="Title and Content">
     <p:bg>
@@ -4517,7 +6926,7 @@
       </p:grpSpPr>
       <p:sp>
         <p:nvSpPr>
-          <p:cNvPr id="16" name="PlaceHolder 1"/>
+          <p:cNvPr id="33" name="PlaceHolder 1"/>
           <p:cNvSpPr>
             <a:spLocks noGrp="1"/>
           </p:cNvSpPr>
@@ -4528,7 +6937,7 @@
         <p:spPr>
           <a:xfrm>
             <a:off x="457200" y="274680"/>
-            <a:ext cx="8229240" cy="1142640"/>
+            <a:ext cx="8228880" cy="1142280"/>
           </a:xfrm>
           <a:prstGeom prst="rect">
             <a:avLst/>
@@ -4548,6 +6957,9 @@
                 <a:spcPct val="100000"/>
               </a:lnSpc>
               <a:buNone/>
+              <a:tabLst>
+                <a:tab pos="0" algn="l"/>
+              </a:tabLst>
               <a:defRPr lang="en-US" sz="4400" b="0" u="none" strike="noStrike">
                 <a:solidFill>
                   <a:schemeClr val="dk1"/>
@@ -4564,6 +6976,9 @@
                 <a:spcPct val="100000"/>
               </a:lnSpc>
               <a:buNone/>
+              <a:tabLst>
+                <a:tab pos="0" algn="l"/>
+              </a:tabLst>
             </a:pPr>
             <a:r>
               <a:rPr lang="en-US" sz="4400" b="0" u="none" strike="noStrike">
@@ -4574,40 +6989,7 @@
                 <a:uFillTx/>
                 <a:latin typeface="Calibri"/>
               </a:rPr>
-              <a:t>Click to </a:t>
-            </a:r>
-            <a:r>
-              <a:rPr lang="en-US" sz="4400" b="0" u="none" strike="noStrike">
-                <a:solidFill>
-                  <a:schemeClr val="dk1"/>
-                </a:solidFill>
-                <a:effectLst/>
-                <a:uFillTx/>
-                <a:latin typeface="Calibri"/>
-              </a:rPr>
-              <a:t>edit </a:t>
-            </a:r>
-            <a:r>
-              <a:rPr lang="en-US" sz="4400" b="0" u="none" strike="noStrike">
-                <a:solidFill>
-                  <a:schemeClr val="dk1"/>
-                </a:solidFill>
-                <a:effectLst/>
-                <a:uFillTx/>
-                <a:latin typeface="Calibri"/>
-              </a:rPr>
-              <a:t>Master </a:t>
-            </a:r>
-            <a:r>
-              <a:rPr lang="en-US" sz="4400" b="0" u="none" strike="noStrike">
-                <a:solidFill>
-                  <a:schemeClr val="dk1"/>
-                </a:solidFill>
-                <a:effectLst/>
-                <a:uFillTx/>
-                <a:latin typeface="Calibri"/>
-              </a:rPr>
-              <a:t>title style</a:t>
+              <a:t>Click to edit Master title style</a:t>
             </a:r>
             <a:endParaRPr lang="en-US" sz="4400" b="0" u="none" strike="noStrike">
               <a:solidFill>
@@ -4622,7 +7004,7 @@
       </p:sp>
       <p:sp>
         <p:nvSpPr>
-          <p:cNvPr id="17" name="PlaceHolder 2"/>
+          <p:cNvPr id="34" name="PlaceHolder 2"/>
           <p:cNvSpPr>
             <a:spLocks noGrp="1"/>
           </p:cNvSpPr>
@@ -4633,7 +7015,7 @@
         <p:spPr>
           <a:xfrm>
             <a:off x="457200" y="1600200"/>
-            <a:ext cx="8229240" cy="4525560"/>
+            <a:ext cx="8228880" cy="4525200"/>
           </a:xfrm>
           <a:prstGeom prst="rect">
             <a:avLst/>
@@ -4928,18 +7310,18 @@
       </p:sp>
       <p:sp>
         <p:nvSpPr>
-          <p:cNvPr id="18" name="PlaceHolder 3"/>
+          <p:cNvPr id="35" name="PlaceHolder 3"/>
           <p:cNvSpPr>
             <a:spLocks noGrp="1"/>
           </p:cNvSpPr>
           <p:nvPr>
-            <p:ph type="dt" idx="10"/>
+            <p:ph type="dt" idx="19"/>
           </p:nvPr>
         </p:nvSpPr>
         <p:spPr>
           <a:xfrm>
             <a:off x="457200" y="6356520"/>
-            <a:ext cx="2133360" cy="364680"/>
+            <a:ext cx="2133000" cy="364320"/>
           </a:xfrm>
           <a:prstGeom prst="rect">
             <a:avLst/>
@@ -4959,6 +7341,9 @@
                 <a:spcPct val="100000"/>
               </a:lnSpc>
               <a:buNone/>
+              <a:tabLst>
+                <a:tab pos="0" algn="l"/>
+              </a:tabLst>
               <a:defRPr lang="en-US" sz="1200" b="0" u="none" strike="noStrike">
                 <a:solidFill>
                   <a:schemeClr val="dk1">
@@ -4977,6 +7362,9 @@
                 <a:spcPct val="100000"/>
               </a:lnSpc>
               <a:buNone/>
+              <a:tabLst>
+                <a:tab pos="0" algn="l"/>
+              </a:tabLst>
             </a:pPr>
             <a:r>
               <a:rPr lang="en-US" sz="1200" b="0" u="none" strike="noStrike">
@@ -5004,18 +7392,18 @@
       </p:sp>
       <p:sp>
         <p:nvSpPr>
-          <p:cNvPr id="19" name="PlaceHolder 4"/>
+          <p:cNvPr id="36" name="PlaceHolder 4"/>
           <p:cNvSpPr>
             <a:spLocks noGrp="1"/>
           </p:cNvSpPr>
           <p:nvPr>
-            <p:ph type="ftr" idx="11"/>
+            <p:ph type="ftr" idx="20"/>
           </p:nvPr>
         </p:nvSpPr>
         <p:spPr>
           <a:xfrm>
             <a:off x="3124080" y="6356520"/>
-            <a:ext cx="2895120" cy="364680"/>
+            <a:ext cx="2894760" cy="364320"/>
           </a:xfrm>
           <a:prstGeom prst="rect">
             <a:avLst/>
@@ -5031,7 +7419,13 @@
           </a:bodyPr>
           <a:lstStyle>
             <a:lvl1pPr indent="0" algn="ctr">
+              <a:lnSpc>
+                <a:spcPct val="100000"/>
+              </a:lnSpc>
               <a:buNone/>
+              <a:tabLst>
+                <a:tab pos="0" algn="l"/>
+              </a:tabLst>
               <a:defRPr lang="en-US" sz="1400" b="0" u="none" strike="noStrike">
                 <a:solidFill>
                   <a:srgbClr val="000000"/>
@@ -5044,7 +7438,13 @@
           </a:lstStyle>
           <a:p>
             <a:pPr indent="0" algn="ctr">
+              <a:lnSpc>
+                <a:spcPct val="100000"/>
+              </a:lnSpc>
               <a:buNone/>
+              <a:tabLst>
+                <a:tab pos="0" algn="l"/>
+              </a:tabLst>
             </a:pPr>
             <a:r>
               <a:rPr lang="en-US" sz="1400" b="0" u="none" strike="noStrike">
@@ -5070,18 +7470,18 @@
       </p:sp>
       <p:sp>
         <p:nvSpPr>
-          <p:cNvPr id="20" name="PlaceHolder 5"/>
+          <p:cNvPr id="37" name="PlaceHolder 5"/>
           <p:cNvSpPr>
             <a:spLocks noGrp="1"/>
           </p:cNvSpPr>
           <p:nvPr>
-            <p:ph type="sldNum" idx="12"/>
+            <p:ph type="sldNum" idx="21"/>
           </p:nvPr>
         </p:nvSpPr>
         <p:spPr>
           <a:xfrm>
             <a:off x="6553080" y="6356520"/>
-            <a:ext cx="2133360" cy="364680"/>
+            <a:ext cx="2133000" cy="364320"/>
           </a:xfrm>
           <a:prstGeom prst="rect">
             <a:avLst/>
@@ -5101,6 +7501,9 @@
                 <a:spcPct val="100000"/>
               </a:lnSpc>
               <a:buNone/>
+              <a:tabLst>
+                <a:tab pos="0" algn="l"/>
+              </a:tabLst>
               <a:defRPr lang="en-US" sz="1200" b="0" u="none" strike="noStrike">
                 <a:solidFill>
                   <a:schemeClr val="dk1">
@@ -5119,8 +7522,11 @@
                 <a:spcPct val="100000"/>
               </a:lnSpc>
               <a:buNone/>
-            </a:pPr>
-            <a:fld id="{EFDC819C-BD8A-4798-86AE-F00E6E7FDB53}" type="slidenum">
+              <a:tabLst>
+                <a:tab pos="0" algn="l"/>
+              </a:tabLst>
+            </a:pPr>
+            <a:fld id="{A0B53AA4-5539-409F-8F7E-D99053BE6533}" type="slidenum">
               <a:rPr lang="en-US" sz="1200" b="0" u="none" strike="noStrike">
                 <a:solidFill>
                   <a:schemeClr val="dk1">
@@ -5152,7 +7558,7 @@
 </p:sldLayout>
 </file>
 
-<file path=ppt/slideLayouts/slideLayout5.xml><?xml version="1.0" encoding="utf-8"?>
+<file path=ppt/slideLayouts/slideLayout8.xml><?xml version="1.0" encoding="utf-8"?>
 <p:sldLayout xmlns:a="http://schemas.openxmlformats.org/drawingml/2006/main" xmlns:p="http://schemas.openxmlformats.org/presentationml/2006/main" xmlns:r="http://schemas.openxmlformats.org/officeDocument/2006/relationships" xmlns:p14="http://schemas.microsoft.com/office/powerpoint/2010/main" xmlns:p15="http://schemas.microsoft.com/office/powerpoint/2012/main" xmlns:mc="http://schemas.openxmlformats.org/markup-compatibility/2006" type="blank" preserve="1">
   <p:cSld name="Section Header">
     <p:bg>
@@ -5178,7 +7584,7 @@
       </p:grpSpPr>
       <p:sp>
         <p:nvSpPr>
-          <p:cNvPr id="21" name="PlaceHolder 1"/>
+          <p:cNvPr id="38" name="PlaceHolder 1"/>
           <p:cNvSpPr>
             <a:spLocks noGrp="1"/>
           </p:cNvSpPr>
@@ -5189,7 +7595,7 @@
         <p:spPr>
           <a:xfrm>
             <a:off x="722160" y="4406760"/>
-            <a:ext cx="7772040" cy="1361880"/>
+            <a:ext cx="7771680" cy="1361520"/>
           </a:xfrm>
           <a:prstGeom prst="rect">
             <a:avLst/>
@@ -5209,6 +7615,9 @@
                 <a:spcPct val="100000"/>
               </a:lnSpc>
               <a:buNone/>
+              <a:tabLst>
+                <a:tab pos="0" algn="l"/>
+              </a:tabLst>
               <a:defRPr lang="en-US" sz="4000" b="1" u="none" strike="noStrike" cap="all">
                 <a:solidFill>
                   <a:schemeClr val="dk1"/>
@@ -5225,6 +7634,9 @@
                 <a:spcPct val="100000"/>
               </a:lnSpc>
               <a:buNone/>
+              <a:tabLst>
+                <a:tab pos="0" algn="l"/>
+              </a:tabLst>
             </a:pPr>
             <a:r>
               <a:rPr lang="en-US" sz="4000" b="1" u="none" strike="noStrike" cap="all">
@@ -5235,51 +7647,7 @@
                 <a:uFillTx/>
                 <a:latin typeface="Calibri"/>
               </a:rPr>
-              <a:t>Click to </a:t>
-            </a:r>
-            <a:r>
-              <a:rPr lang="en-US" sz="4000" b="1" u="none" strike="noStrike" cap="all">
-                <a:solidFill>
-                  <a:schemeClr val="dk1"/>
-                </a:solidFill>
-                <a:effectLst/>
-                <a:uFillTx/>
-                <a:latin typeface="Calibri"/>
-              </a:rPr>
-              <a:t>edit </a:t>
-            </a:r>
-            <a:r>
-              <a:rPr lang="en-US" sz="4000" b="1" u="none" strike="noStrike" cap="all">
-                <a:solidFill>
-                  <a:schemeClr val="dk1"/>
-                </a:solidFill>
-                <a:effectLst/>
-                <a:uFillTx/>
-                <a:latin typeface="Calibri"/>
-              </a:rPr>
-              <a:t>Master </a:t>
-            </a:r>
-            <a:r>
-              <a:rPr lang="en-US" sz="4000" b="1" u="none" strike="noStrike" cap="all">
-                <a:solidFill>
-                  <a:schemeClr val="dk1"/>
-                </a:solidFill>
-                <a:effectLst/>
-                <a:uFillTx/>
-                <a:latin typeface="Calibri"/>
-              </a:rPr>
-              <a:t>title </a:t>
-            </a:r>
-            <a:r>
-              <a:rPr lang="en-US" sz="4000" b="1" u="none" strike="noStrike" cap="all">
-                <a:solidFill>
-                  <a:schemeClr val="dk1"/>
-                </a:solidFill>
-                <a:effectLst/>
-                <a:uFillTx/>
-                <a:latin typeface="Calibri"/>
-              </a:rPr>
-              <a:t>style</a:t>
+              <a:t>Click to edit Master title style</a:t>
             </a:r>
             <a:endParaRPr lang="en-US" sz="4000" b="1" u="none" strike="noStrike" cap="all">
               <a:solidFill>
@@ -5294,7 +7662,7 @@
       </p:sp>
       <p:sp>
         <p:nvSpPr>
-          <p:cNvPr id="22" name="PlaceHolder 2"/>
+          <p:cNvPr id="39" name="PlaceHolder 2"/>
           <p:cNvSpPr>
             <a:spLocks noGrp="1"/>
           </p:cNvSpPr>
@@ -5305,7 +7673,7 @@
         <p:spPr>
           <a:xfrm>
             <a:off x="722160" y="2906640"/>
-            <a:ext cx="7772040" cy="1499760"/>
+            <a:ext cx="7771680" cy="1499400"/>
           </a:xfrm>
           <a:prstGeom prst="rect">
             <a:avLst/>
@@ -5384,18 +7752,18 @@
       </p:sp>
       <p:sp>
         <p:nvSpPr>
-          <p:cNvPr id="23" name="PlaceHolder 3"/>
+          <p:cNvPr id="40" name="PlaceHolder 3"/>
           <p:cNvSpPr>
             <a:spLocks noGrp="1"/>
           </p:cNvSpPr>
           <p:nvPr>
-            <p:ph type="dt" idx="13"/>
+            <p:ph type="dt" idx="22"/>
           </p:nvPr>
         </p:nvSpPr>
         <p:spPr>
           <a:xfrm>
             <a:off x="457200" y="6356520"/>
-            <a:ext cx="2133360" cy="364680"/>
+            <a:ext cx="2133000" cy="364320"/>
           </a:xfrm>
           <a:prstGeom prst="rect">
             <a:avLst/>
@@ -5415,6 +7783,9 @@
                 <a:spcPct val="100000"/>
               </a:lnSpc>
               <a:buNone/>
+              <a:tabLst>
+                <a:tab pos="0" algn="l"/>
+              </a:tabLst>
               <a:defRPr lang="en-US" sz="1200" b="0" u="none" strike="noStrike">
                 <a:solidFill>
                   <a:schemeClr val="dk1">
@@ -5433,6 +7804,9 @@
                 <a:spcPct val="100000"/>
               </a:lnSpc>
               <a:buNone/>
+              <a:tabLst>
+                <a:tab pos="0" algn="l"/>
+              </a:tabLst>
             </a:pPr>
             <a:r>
               <a:rPr lang="en-US" sz="1200" b="0" u="none" strike="noStrike">
@@ -5460,18 +7834,18 @@
       </p:sp>
       <p:sp>
         <p:nvSpPr>
-          <p:cNvPr id="24" name="PlaceHolder 4"/>
+          <p:cNvPr id="41" name="PlaceHolder 4"/>
           <p:cNvSpPr>
             <a:spLocks noGrp="1"/>
           </p:cNvSpPr>
           <p:nvPr>
-            <p:ph type="ftr" idx="14"/>
+            <p:ph type="ftr" idx="23"/>
           </p:nvPr>
         </p:nvSpPr>
         <p:spPr>
           <a:xfrm>
             <a:off x="3124080" y="6356520"/>
-            <a:ext cx="2895120" cy="364680"/>
+            <a:ext cx="2894760" cy="364320"/>
           </a:xfrm>
           <a:prstGeom prst="rect">
             <a:avLst/>
@@ -5487,7 +7861,13 @@
           </a:bodyPr>
           <a:lstStyle>
             <a:lvl1pPr indent="0" algn="ctr">
+              <a:lnSpc>
+                <a:spcPct val="100000"/>
+              </a:lnSpc>
               <a:buNone/>
+              <a:tabLst>
+                <a:tab pos="0" algn="l"/>
+              </a:tabLst>
               <a:defRPr lang="en-US" sz="1400" b="0" u="none" strike="noStrike">
                 <a:solidFill>
                   <a:srgbClr val="000000"/>
@@ -5500,7 +7880,13 @@
           </a:lstStyle>
           <a:p>
             <a:pPr indent="0" algn="ctr">
+              <a:lnSpc>
+                <a:spcPct val="100000"/>
+              </a:lnSpc>
               <a:buNone/>
+              <a:tabLst>
+                <a:tab pos="0" algn="l"/>
+              </a:tabLst>
             </a:pPr>
             <a:r>
               <a:rPr lang="en-US" sz="1400" b="0" u="none" strike="noStrike">
@@ -5526,18 +7912,18 @@
       </p:sp>
       <p:sp>
         <p:nvSpPr>
-          <p:cNvPr id="25" name="PlaceHolder 5"/>
+          <p:cNvPr id="42" name="PlaceHolder 5"/>
           <p:cNvSpPr>
             <a:spLocks noGrp="1"/>
           </p:cNvSpPr>
           <p:nvPr>
-            <p:ph type="sldNum" idx="15"/>
+            <p:ph type="sldNum" idx="24"/>
           </p:nvPr>
         </p:nvSpPr>
         <p:spPr>
           <a:xfrm>
             <a:off x="6553080" y="6356520"/>
-            <a:ext cx="2133360" cy="364680"/>
+            <a:ext cx="2133000" cy="364320"/>
           </a:xfrm>
           <a:prstGeom prst="rect">
             <a:avLst/>
@@ -5557,6 +7943,9 @@
                 <a:spcPct val="100000"/>
               </a:lnSpc>
               <a:buNone/>
+              <a:tabLst>
+                <a:tab pos="0" algn="l"/>
+              </a:tabLst>
               <a:defRPr lang="en-US" sz="1200" b="0" u="none" strike="noStrike">
                 <a:solidFill>
                   <a:schemeClr val="dk1">
@@ -5575,8 +7964,11 @@
                 <a:spcPct val="100000"/>
               </a:lnSpc>
               <a:buNone/>
-            </a:pPr>
-            <a:fld id="{131B13CD-CFEF-4D73-AE2A-2CD2A1FCB8BC}" type="slidenum">
+              <a:tabLst>
+                <a:tab pos="0" algn="l"/>
+              </a:tabLst>
+            </a:pPr>
+            <a:fld id="{E7B66C77-8094-46F4-8433-EF0D7F6C1009}" type="slidenum">
               <a:rPr lang="en-US" sz="1200" b="0" u="none" strike="noStrike">
                 <a:solidFill>
                   <a:schemeClr val="dk1">
@@ -5608,7 +8000,7 @@
 </p:sldLayout>
 </file>
 
-<file path=ppt/slideLayouts/slideLayout6.xml><?xml version="1.0" encoding="utf-8"?>
+<file path=ppt/slideLayouts/slideLayout9.xml><?xml version="1.0" encoding="utf-8"?>
 <p:sldLayout xmlns:a="http://schemas.openxmlformats.org/drawingml/2006/main" xmlns:p="http://schemas.openxmlformats.org/presentationml/2006/main" xmlns:r="http://schemas.openxmlformats.org/officeDocument/2006/relationships" xmlns:p14="http://schemas.microsoft.com/office/powerpoint/2010/main" xmlns:p15="http://schemas.microsoft.com/office/powerpoint/2012/main" xmlns:mc="http://schemas.openxmlformats.org/markup-compatibility/2006" type="twoObj" preserve="1">
   <p:cSld name="Two Content">
     <p:bg>
@@ -5634,7 +8026,7 @@
       </p:grpSpPr>
       <p:sp>
         <p:nvSpPr>
-          <p:cNvPr id="26" name="PlaceHolder 1"/>
+          <p:cNvPr id="43" name="PlaceHolder 1"/>
           <p:cNvSpPr>
             <a:spLocks noGrp="1"/>
           </p:cNvSpPr>
@@ -5645,7 +8037,7 @@
         <p:spPr>
           <a:xfrm>
             <a:off x="457200" y="274680"/>
-            <a:ext cx="8229240" cy="1142640"/>
+            <a:ext cx="8228880" cy="1142280"/>
           </a:xfrm>
           <a:prstGeom prst="rect">
             <a:avLst/>
@@ -5665,6 +8057,9 @@
                 <a:spcPct val="100000"/>
               </a:lnSpc>
               <a:buNone/>
+              <a:tabLst>
+                <a:tab pos="0" algn="l"/>
+              </a:tabLst>
               <a:defRPr lang="en-US" sz="4400" b="0" u="none" strike="noStrike">
                 <a:solidFill>
                   <a:schemeClr val="dk1"/>
@@ -5681,6 +8076,9 @@
                 <a:spcPct val="100000"/>
               </a:lnSpc>
               <a:buNone/>
+              <a:tabLst>
+                <a:tab pos="0" algn="l"/>
+              </a:tabLst>
             </a:pPr>
             <a:r>
               <a:rPr lang="en-US" sz="4400" b="0" u="none" strike="noStrike">
@@ -5706,7 +8104,7 @@
       </p:sp>
       <p:sp>
         <p:nvSpPr>
-          <p:cNvPr id="27" name="PlaceHolder 2"/>
+          <p:cNvPr id="44" name="PlaceHolder 2"/>
           <p:cNvSpPr>
             <a:spLocks noGrp="1"/>
           </p:cNvSpPr>
@@ -5717,7 +8115,7 @@
         <p:spPr>
           <a:xfrm>
             <a:off x="457200" y="1600200"/>
-            <a:ext cx="4038120" cy="4525560"/>
+            <a:ext cx="4037760" cy="4525200"/>
           </a:xfrm>
           <a:prstGeom prst="rect">
             <a:avLst/>
@@ -6012,7 +8410,7 @@
       </p:sp>
       <p:sp>
         <p:nvSpPr>
-          <p:cNvPr id="28" name="PlaceHolder 3"/>
+          <p:cNvPr id="45" name="PlaceHolder 3"/>
           <p:cNvSpPr>
             <a:spLocks noGrp="1"/>
           </p:cNvSpPr>
@@ -6023,7 +8421,7 @@
         <p:spPr>
           <a:xfrm>
             <a:off x="4648320" y="1600200"/>
-            <a:ext cx="4038120" cy="4525560"/>
+            <a:ext cx="4037760" cy="4525200"/>
           </a:xfrm>
           <a:prstGeom prst="rect">
             <a:avLst/>
@@ -6318,18 +8716,18 @@
       </p:sp>
       <p:sp>
         <p:nvSpPr>
-          <p:cNvPr id="29" name="PlaceHolder 4"/>
+          <p:cNvPr id="46" name="PlaceHolder 4"/>
           <p:cNvSpPr>
             <a:spLocks noGrp="1"/>
           </p:cNvSpPr>
           <p:nvPr>
-            <p:ph type="dt" idx="16"/>
+            <p:ph type="dt" idx="25"/>
           </p:nvPr>
         </p:nvSpPr>
         <p:spPr>
           <a:xfrm>
             <a:off x="457200" y="6356520"/>
-            <a:ext cx="2133360" cy="364680"/>
+            <a:ext cx="2133000" cy="364320"/>
           </a:xfrm>
           <a:prstGeom prst="rect">
             <a:avLst/>
@@ -6349,6 +8747,9 @@
                 <a:spcPct val="100000"/>
               </a:lnSpc>
               <a:buNone/>
+              <a:tabLst>
+                <a:tab pos="0" algn="l"/>
+              </a:tabLst>
               <a:defRPr lang="en-US" sz="1200" b="0" u="none" strike="noStrike">
                 <a:solidFill>
                   <a:schemeClr val="dk1">
@@ -6367,6 +8768,9 @@
                 <a:spcPct val="100000"/>
               </a:lnSpc>
               <a:buNone/>
+              <a:tabLst>
+                <a:tab pos="0" algn="l"/>
+              </a:tabLst>
             </a:pPr>
             <a:r>
               <a:rPr lang="en-US" sz="1200" b="0" u="none" strike="noStrike">
@@ -6394,18 +8798,18 @@
       </p:sp>
       <p:sp>
         <p:nvSpPr>
-          <p:cNvPr id="30" name="PlaceHolder 5"/>
+          <p:cNvPr id="47" name="PlaceHolder 5"/>
           <p:cNvSpPr>
             <a:spLocks noGrp="1"/>
           </p:cNvSpPr>
           <p:nvPr>
-            <p:ph type="ftr" idx="17"/>
+            <p:ph type="ftr" idx="26"/>
           </p:nvPr>
         </p:nvSpPr>
         <p:spPr>
           <a:xfrm>
             <a:off x="3124080" y="6356520"/>
-            <a:ext cx="2895120" cy="364680"/>
+            <a:ext cx="2894760" cy="364320"/>
           </a:xfrm>
           <a:prstGeom prst="rect">
             <a:avLst/>
@@ -6421,7 +8825,13 @@
           </a:bodyPr>
           <a:lstStyle>
             <a:lvl1pPr indent="0" algn="ctr">
+              <a:lnSpc>
+                <a:spcPct val="100000"/>
+              </a:lnSpc>
               <a:buNone/>
+              <a:tabLst>
+                <a:tab pos="0" algn="l"/>
+              </a:tabLst>
               <a:defRPr lang="en-US" sz="1400" b="0" u="none" strike="noStrike">
                 <a:solidFill>
                   <a:srgbClr val="000000"/>
@@ -6434,7 +8844,13 @@
           </a:lstStyle>
           <a:p>
             <a:pPr indent="0" algn="ctr">
+              <a:lnSpc>
+                <a:spcPct val="100000"/>
+              </a:lnSpc>
               <a:buNone/>
+              <a:tabLst>
+                <a:tab pos="0" algn="l"/>
+              </a:tabLst>
             </a:pPr>
             <a:r>
               <a:rPr lang="en-US" sz="1400" b="0" u="none" strike="noStrike">
@@ -6460,18 +8876,18 @@
       </p:sp>
       <p:sp>
         <p:nvSpPr>
-          <p:cNvPr id="31" name="PlaceHolder 6"/>
+          <p:cNvPr id="48" name="PlaceHolder 6"/>
           <p:cNvSpPr>
             <a:spLocks noGrp="1"/>
           </p:cNvSpPr>
           <p:nvPr>
-            <p:ph type="sldNum" idx="18"/>
+            <p:ph type="sldNum" idx="27"/>
           </p:nvPr>
         </p:nvSpPr>
         <p:spPr>
           <a:xfrm>
             <a:off x="6553080" y="6356520"/>
-            <a:ext cx="2133360" cy="364680"/>
+            <a:ext cx="2133000" cy="364320"/>
           </a:xfrm>
           <a:prstGeom prst="rect">
             <a:avLst/>
@@ -6491,6 +8907,9 @@
                 <a:spcPct val="100000"/>
               </a:lnSpc>
               <a:buNone/>
+              <a:tabLst>
+                <a:tab pos="0" algn="l"/>
+              </a:tabLst>
               <a:defRPr lang="en-US" sz="1200" b="0" u="none" strike="noStrike">
                 <a:solidFill>
                   <a:schemeClr val="dk1">
@@ -6508,1010 +8927,13 @@
               <a:lnSpc>
                 <a:spcPct val="100000"/>
               </a:lnSpc>
-              <a:buNone/>
-            </a:pPr>
-            <a:fld id="{97B908DF-902E-432E-92DF-B6E871D43F52}" type="slidenum">
-              <a:rPr lang="en-US" sz="1200" b="0" u="none" strike="noStrike">
-                <a:solidFill>
-                  <a:schemeClr val="dk1">
-                    <a:tint val="75000"/>
-                  </a:schemeClr>
-                </a:solidFill>
-                <a:effectLst/>
-                <a:uFillTx/>
-                <a:latin typeface="Calibri"/>
-              </a:rPr>
-              <a:t>&lt;number&gt;</a:t>
-            </a:fld>
-            <a:endParaRPr lang="en-US" sz="1200" b="0" u="none" strike="noStrike">
-              <a:solidFill>
-                <a:srgbClr val="000000"/>
-              </a:solidFill>
-              <a:effectLst/>
-              <a:uFillTx/>
-              <a:latin typeface="Times New Roman"/>
-            </a:endParaRPr>
-          </a:p>
-        </p:txBody>
-      </p:sp>
-    </p:spTree>
-  </p:cSld>
-  <p:clrMapOvr>
-    <a:masterClrMapping/>
-  </p:clrMapOvr>
-</p:sldLayout>
-</file>
-
-<file path=ppt/slideLayouts/slideLayout7.xml><?xml version="1.0" encoding="utf-8"?>
-<p:sldLayout xmlns:a="http://schemas.openxmlformats.org/drawingml/2006/main" xmlns:p="http://schemas.openxmlformats.org/presentationml/2006/main" xmlns:r="http://schemas.openxmlformats.org/officeDocument/2006/relationships" xmlns:p14="http://schemas.microsoft.com/office/powerpoint/2010/main" xmlns:p15="http://schemas.microsoft.com/office/powerpoint/2012/main" xmlns:mc="http://schemas.openxmlformats.org/markup-compatibility/2006" type="blank" preserve="1">
-  <p:cSld name="Comparison">
-    <p:bg>
-      <p:bgPr>
-        <a:solidFill>
-          <a:srgbClr val="FFFFFF"/>
-        </a:solidFill>
-      </p:bgPr>
-    </p:bg>
-    <p:spTree>
-      <p:nvGrpSpPr>
-        <p:cNvPr id="1" name=""/>
-        <p:cNvGrpSpPr/>
-        <p:nvPr/>
-      </p:nvGrpSpPr>
-      <p:grpSpPr>
-        <a:xfrm>
-          <a:off x="0" y="0"/>
-          <a:ext cx="0" cy="0"/>
-          <a:chOff x="0" y="0"/>
-          <a:chExt cx="0" cy="0"/>
-        </a:xfrm>
-      </p:grpSpPr>
-      <p:sp>
-        <p:nvSpPr>
-          <p:cNvPr id="32" name="PlaceHolder 1"/>
-          <p:cNvSpPr>
-            <a:spLocks noGrp="1"/>
-          </p:cNvSpPr>
-          <p:nvPr>
-            <p:ph type="title"/>
-          </p:nvPr>
-        </p:nvSpPr>
-        <p:spPr>
-          <a:xfrm>
-            <a:off x="457200" y="274680"/>
-            <a:ext cx="8229240" cy="1142640"/>
-          </a:xfrm>
-          <a:prstGeom prst="rect">
-            <a:avLst/>
-          </a:prstGeom>
-          <a:noFill/>
-          <a:ln w="0">
-            <a:noFill/>
-          </a:ln>
-        </p:spPr>
-        <p:txBody>
-          <a:bodyPr lIns="91440" tIns="45720" rIns="91440" bIns="45720" anchor="ctr">
-            <a:noAutofit/>
-          </a:bodyPr>
-          <a:lstStyle>
-            <a:lvl1pPr indent="0" algn="ctr" defTabSz="457200">
-              <a:lnSpc>
-                <a:spcPct val="100000"/>
-              </a:lnSpc>
-              <a:buNone/>
-              <a:defRPr lang="en-US" sz="4400" b="0" u="none" strike="noStrike">
-                <a:solidFill>
-                  <a:schemeClr val="dk1"/>
-                </a:solidFill>
-                <a:effectLst/>
-                <a:uFillTx/>
-                <a:latin typeface="Calibri"/>
-              </a:defRPr>
-            </a:lvl1pPr>
-          </a:lstStyle>
-          <a:p>
-            <a:pPr indent="0" algn="ctr" defTabSz="457200">
-              <a:lnSpc>
-                <a:spcPct val="100000"/>
-              </a:lnSpc>
-              <a:buNone/>
-            </a:pPr>
-            <a:r>
-              <a:rPr lang="en-US" sz="4400" b="0" u="none" strike="noStrike">
-                <a:solidFill>
-                  <a:schemeClr val="dk1"/>
-                </a:solidFill>
-                <a:effectLst/>
-                <a:uFillTx/>
-                <a:latin typeface="Calibri"/>
-              </a:rPr>
-              <a:t>Click to edit Master title style</a:t>
-            </a:r>
-            <a:endParaRPr lang="en-US" sz="4400" b="0" u="none" strike="noStrike">
-              <a:solidFill>
-                <a:schemeClr val="dk1"/>
-              </a:solidFill>
-              <a:effectLst/>
-              <a:uFillTx/>
-              <a:latin typeface="Calibri"/>
-            </a:endParaRPr>
-          </a:p>
-        </p:txBody>
-      </p:sp>
-      <p:sp>
-        <p:nvSpPr>
-          <p:cNvPr id="33" name="PlaceHolder 2"/>
-          <p:cNvSpPr>
-            <a:spLocks noGrp="1"/>
-          </p:cNvSpPr>
-          <p:nvPr>
-            <p:ph type="body"/>
-          </p:nvPr>
-        </p:nvSpPr>
-        <p:spPr>
-          <a:xfrm>
-            <a:off x="457200" y="1535040"/>
-            <a:ext cx="4039920" cy="639360"/>
-          </a:xfrm>
-          <a:prstGeom prst="rect">
-            <a:avLst/>
-          </a:prstGeom>
-          <a:noFill/>
-          <a:ln w="0">
-            <a:noFill/>
-          </a:ln>
-        </p:spPr>
-        <p:txBody>
-          <a:bodyPr lIns="91440" tIns="45720" rIns="91440" bIns="45720" anchor="b">
-            <a:noAutofit/>
-          </a:bodyPr>
-          <a:lstStyle>
-            <a:lvl1pPr indent="0" algn="l" defTabSz="457200">
-              <a:lnSpc>
-                <a:spcPct val="100000"/>
-              </a:lnSpc>
-              <a:spcBef>
-                <a:spcPts val="479"/>
-              </a:spcBef>
               <a:buNone/>
               <a:tabLst>
                 <a:tab pos="0" algn="l"/>
               </a:tabLst>
-              <a:defRPr lang="en-US" sz="2400" b="1" u="none" strike="noStrike">
-                <a:solidFill>
-                  <a:schemeClr val="dk1"/>
-                </a:solidFill>
-                <a:effectLst/>
-                <a:uFillTx/>
-                <a:latin typeface="Calibri"/>
-              </a:defRPr>
-            </a:lvl1pPr>
-          </a:lstStyle>
-          <a:p>
-            <a:pPr indent="0" algn="l" defTabSz="457200">
-              <a:lnSpc>
-                <a:spcPct val="100000"/>
-              </a:lnSpc>
-              <a:spcBef>
-                <a:spcPts val="479"/>
-              </a:spcBef>
-              <a:buNone/>
-              <a:tabLst>
-                <a:tab pos="0" algn="l"/>
-              </a:tabLst>
-            </a:pPr>
-            <a:r>
-              <a:rPr lang="en-US" sz="2400" b="1" u="none" strike="noStrike">
-                <a:solidFill>
-                  <a:schemeClr val="dk1"/>
-                </a:solidFill>
-                <a:effectLst/>
-                <a:uFillTx/>
-                <a:latin typeface="Calibri"/>
-              </a:rPr>
-              <a:t>Click to edit Master text styles</a:t>
-            </a:r>
-            <a:endParaRPr lang="en-US" sz="2400" b="0" u="none" strike="noStrike">
-              <a:solidFill>
-                <a:schemeClr val="dk1"/>
-              </a:solidFill>
-              <a:effectLst/>
-              <a:uFillTx/>
-              <a:latin typeface="Calibri"/>
-            </a:endParaRPr>
-          </a:p>
-        </p:txBody>
-      </p:sp>
-      <p:sp>
-        <p:nvSpPr>
-          <p:cNvPr id="34" name="PlaceHolder 3"/>
-          <p:cNvSpPr>
-            <a:spLocks noGrp="1"/>
-          </p:cNvSpPr>
-          <p:nvPr>
-            <p:ph type="body"/>
-          </p:nvPr>
-        </p:nvSpPr>
-        <p:spPr>
-          <a:xfrm>
-            <a:off x="457200" y="2174760"/>
-            <a:ext cx="4039920" cy="3951000"/>
-          </a:xfrm>
-          <a:prstGeom prst="rect">
-            <a:avLst/>
-          </a:prstGeom>
-          <a:noFill/>
-          <a:ln w="0">
-            <a:noFill/>
-          </a:ln>
-        </p:spPr>
-        <p:txBody>
-          <a:bodyPr lIns="91440" tIns="45720" rIns="91440" bIns="45720" anchor="t">
-            <a:noAutofit/>
-          </a:bodyPr>
-          <a:lstStyle>
-            <a:lvl1pPr algn="l" defTabSz="457200">
-              <a:lnSpc>
-                <a:spcPct val="100000"/>
-              </a:lnSpc>
-              <a:spcBef>
-                <a:spcPts val="479"/>
-              </a:spcBef>
-              <a:buClr>
-                <a:srgbClr val="000000"/>
-              </a:buClr>
-              <a:buFont typeface="Arial"/>
-              <a:buChar char="•"/>
-              <a:tabLst>
-                <a:tab pos="0" algn="l"/>
-              </a:tabLst>
-              <a:defRPr lang="en-US" sz="2400" b="0" u="none" strike="noStrike">
-                <a:solidFill>
-                  <a:schemeClr val="dk1"/>
-                </a:solidFill>
-                <a:effectLst/>
-                <a:uFillTx/>
-                <a:latin typeface="Calibri"/>
-              </a:defRPr>
-            </a:lvl1pPr>
-            <a:lvl2pPr lvl="1" algn="l" defTabSz="457200">
-              <a:lnSpc>
-                <a:spcPct val="100000"/>
-              </a:lnSpc>
-              <a:spcBef>
-                <a:spcPts val="400"/>
-              </a:spcBef>
-              <a:buClr>
-                <a:srgbClr val="000000"/>
-              </a:buClr>
-              <a:buFont typeface="Arial"/>
-              <a:buChar char="–"/>
-              <a:tabLst>
-                <a:tab pos="0" algn="l"/>
-              </a:tabLst>
-              <a:defRPr lang="en-US" sz="2000" b="0" u="none" strike="noStrike">
-                <a:solidFill>
-                  <a:schemeClr val="dk1"/>
-                </a:solidFill>
-                <a:effectLst/>
-                <a:uFillTx/>
-                <a:latin typeface="Calibri"/>
-              </a:defRPr>
-            </a:lvl2pPr>
-            <a:lvl3pPr lvl="2" algn="l" defTabSz="457200">
-              <a:lnSpc>
-                <a:spcPct val="100000"/>
-              </a:lnSpc>
-              <a:spcBef>
-                <a:spcPts val="360"/>
-              </a:spcBef>
-              <a:buClr>
-                <a:srgbClr val="000000"/>
-              </a:buClr>
-              <a:buFont typeface="Arial"/>
-              <a:buChar char="•"/>
-              <a:tabLst>
-                <a:tab pos="0" algn="l"/>
-              </a:tabLst>
-              <a:defRPr lang="en-US" sz="1800" b="0" u="none" strike="noStrike">
-                <a:solidFill>
-                  <a:schemeClr val="dk1"/>
-                </a:solidFill>
-                <a:effectLst/>
-                <a:uFillTx/>
-                <a:latin typeface="Calibri"/>
-              </a:defRPr>
-            </a:lvl3pPr>
-            <a:lvl4pPr lvl="3" algn="l" defTabSz="457200">
-              <a:lnSpc>
-                <a:spcPct val="100000"/>
-              </a:lnSpc>
-              <a:spcBef>
-                <a:spcPts val="320"/>
-              </a:spcBef>
-              <a:buClr>
-                <a:srgbClr val="000000"/>
-              </a:buClr>
-              <a:buFont typeface="Arial"/>
-              <a:buChar char="–"/>
-              <a:tabLst>
-                <a:tab pos="0" algn="l"/>
-              </a:tabLst>
-              <a:defRPr lang="en-US" sz="1600" b="0" u="none" strike="noStrike">
-                <a:solidFill>
-                  <a:schemeClr val="dk1"/>
-                </a:solidFill>
-                <a:effectLst/>
-                <a:uFillTx/>
-                <a:latin typeface="Calibri"/>
-              </a:defRPr>
-            </a:lvl4pPr>
-            <a:lvl5pPr lvl="4" algn="l" defTabSz="457200">
-              <a:lnSpc>
-                <a:spcPct val="100000"/>
-              </a:lnSpc>
-              <a:spcBef>
-                <a:spcPts val="320"/>
-              </a:spcBef>
-              <a:buClr>
-                <a:srgbClr val="000000"/>
-              </a:buClr>
-              <a:buFont typeface="Arial"/>
-              <a:buChar char="»"/>
-              <a:tabLst>
-                <a:tab pos="0" algn="l"/>
-              </a:tabLst>
-              <a:defRPr lang="en-US" sz="1600" b="0" u="none" strike="noStrike">
-                <a:solidFill>
-                  <a:schemeClr val="dk1"/>
-                </a:solidFill>
-                <a:effectLst/>
-                <a:uFillTx/>
-                <a:latin typeface="Calibri"/>
-              </a:defRPr>
-            </a:lvl5pPr>
-          </a:lstStyle>
-          <a:p>
-            <a:pPr marL="343080" indent="-343080" algn="l" defTabSz="457200">
-              <a:lnSpc>
-                <a:spcPct val="100000"/>
-              </a:lnSpc>
-              <a:spcBef>
-                <a:spcPts val="479"/>
-              </a:spcBef>
-              <a:buClr>
-                <a:srgbClr val="000000"/>
-              </a:buClr>
-              <a:buFont typeface="Arial"/>
-              <a:buChar char="•"/>
-              <a:tabLst>
-                <a:tab pos="0" algn="l"/>
-              </a:tabLst>
-            </a:pPr>
-            <a:r>
-              <a:rPr lang="en-US" sz="2400" b="0" u="none" strike="noStrike">
-                <a:solidFill>
-                  <a:schemeClr val="dk1"/>
-                </a:solidFill>
-                <a:effectLst/>
-                <a:uFillTx/>
-                <a:latin typeface="Calibri"/>
-              </a:rPr>
-              <a:t>Click to edit Master text styles</a:t>
-            </a:r>
-            <a:endParaRPr lang="en-US" sz="2400" b="0" u="none" strike="noStrike">
-              <a:solidFill>
-                <a:schemeClr val="dk1"/>
-              </a:solidFill>
-              <a:effectLst/>
-              <a:uFillTx/>
-              <a:latin typeface="Calibri"/>
-            </a:endParaRPr>
-          </a:p>
-          <a:p>
-            <a:pPr marL="743040" lvl="1" indent="-285840" algn="l" defTabSz="457200">
-              <a:lnSpc>
-                <a:spcPct val="100000"/>
-              </a:lnSpc>
-              <a:spcBef>
-                <a:spcPts val="400"/>
-              </a:spcBef>
-              <a:buClr>
-                <a:srgbClr val="000000"/>
-              </a:buClr>
-              <a:buFont typeface="Arial"/>
-              <a:buChar char="–"/>
-              <a:tabLst>
-                <a:tab pos="0" algn="l"/>
-              </a:tabLst>
-            </a:pPr>
-            <a:r>
-              <a:rPr lang="en-US" sz="2000" b="0" u="none" strike="noStrike">
-                <a:solidFill>
-                  <a:schemeClr val="dk1"/>
-                </a:solidFill>
-                <a:effectLst/>
-                <a:uFillTx/>
-                <a:latin typeface="Calibri"/>
-              </a:rPr>
-              <a:t>Second level</a:t>
-            </a:r>
-            <a:endParaRPr lang="en-US" sz="2000" b="0" u="none" strike="noStrike">
-              <a:solidFill>
-                <a:schemeClr val="dk1"/>
-              </a:solidFill>
-              <a:effectLst/>
-              <a:uFillTx/>
-              <a:latin typeface="Calibri"/>
-            </a:endParaRPr>
-          </a:p>
-          <a:p>
-            <a:pPr marL="1143000" lvl="2" indent="-228600" algn="l" defTabSz="457200">
-              <a:lnSpc>
-                <a:spcPct val="100000"/>
-              </a:lnSpc>
-              <a:spcBef>
-                <a:spcPts val="360"/>
-              </a:spcBef>
-              <a:buClr>
-                <a:srgbClr val="000000"/>
-              </a:buClr>
-              <a:buFont typeface="Arial"/>
-              <a:buChar char="•"/>
-              <a:tabLst>
-                <a:tab pos="0" algn="l"/>
-              </a:tabLst>
-            </a:pPr>
-            <a:r>
-              <a:rPr lang="en-US" sz="1800" b="0" u="none" strike="noStrike">
-                <a:solidFill>
-                  <a:schemeClr val="dk1"/>
-                </a:solidFill>
-                <a:effectLst/>
-                <a:uFillTx/>
-                <a:latin typeface="Calibri"/>
-              </a:rPr>
-              <a:t>Third level</a:t>
-            </a:r>
-            <a:endParaRPr lang="en-US" sz="1800" b="0" u="none" strike="noStrike">
-              <a:solidFill>
-                <a:schemeClr val="dk1"/>
-              </a:solidFill>
-              <a:effectLst/>
-              <a:uFillTx/>
-              <a:latin typeface="Calibri"/>
-            </a:endParaRPr>
-          </a:p>
-          <a:p>
-            <a:pPr marL="1600200" lvl="3" indent="-228600" algn="l" defTabSz="457200">
-              <a:lnSpc>
-                <a:spcPct val="100000"/>
-              </a:lnSpc>
-              <a:spcBef>
-                <a:spcPts val="320"/>
-              </a:spcBef>
-              <a:buClr>
-                <a:srgbClr val="000000"/>
-              </a:buClr>
-              <a:buFont typeface="Arial"/>
-              <a:buChar char="–"/>
-              <a:tabLst>
-                <a:tab pos="0" algn="l"/>
-              </a:tabLst>
-            </a:pPr>
-            <a:r>
-              <a:rPr lang="en-US" sz="1600" b="0" u="none" strike="noStrike">
-                <a:solidFill>
-                  <a:schemeClr val="dk1"/>
-                </a:solidFill>
-                <a:effectLst/>
-                <a:uFillTx/>
-                <a:latin typeface="Calibri"/>
-              </a:rPr>
-              <a:t>Fourth level</a:t>
-            </a:r>
-            <a:endParaRPr lang="en-US" sz="1600" b="0" u="none" strike="noStrike">
-              <a:solidFill>
-                <a:schemeClr val="dk1"/>
-              </a:solidFill>
-              <a:effectLst/>
-              <a:uFillTx/>
-              <a:latin typeface="Calibri"/>
-            </a:endParaRPr>
-          </a:p>
-          <a:p>
-            <a:pPr marL="2057400" lvl="4" indent="-228600" algn="l" defTabSz="457200">
-              <a:lnSpc>
-                <a:spcPct val="100000"/>
-              </a:lnSpc>
-              <a:spcBef>
-                <a:spcPts val="320"/>
-              </a:spcBef>
-              <a:buClr>
-                <a:srgbClr val="000000"/>
-              </a:buClr>
-              <a:buFont typeface="Arial"/>
-              <a:buChar char="»"/>
-              <a:tabLst>
-                <a:tab pos="0" algn="l"/>
-              </a:tabLst>
-            </a:pPr>
-            <a:r>
-              <a:rPr lang="en-US" sz="1600" b="0" u="none" strike="noStrike">
-                <a:solidFill>
-                  <a:schemeClr val="dk1"/>
-                </a:solidFill>
-                <a:effectLst/>
-                <a:uFillTx/>
-                <a:latin typeface="Calibri"/>
-              </a:rPr>
-              <a:t>Fifth level</a:t>
-            </a:r>
-            <a:endParaRPr lang="en-US" sz="1600" b="0" u="none" strike="noStrike">
-              <a:solidFill>
-                <a:schemeClr val="dk1"/>
-              </a:solidFill>
-              <a:effectLst/>
-              <a:uFillTx/>
-              <a:latin typeface="Calibri"/>
-            </a:endParaRPr>
-          </a:p>
-        </p:txBody>
-      </p:sp>
-      <p:sp>
-        <p:nvSpPr>
-          <p:cNvPr id="35" name="PlaceHolder 4"/>
-          <p:cNvSpPr>
-            <a:spLocks noGrp="1"/>
-          </p:cNvSpPr>
-          <p:nvPr>
-            <p:ph type="body"/>
-          </p:nvPr>
-        </p:nvSpPr>
-        <p:spPr>
-          <a:xfrm>
-            <a:off x="4645080" y="1535040"/>
-            <a:ext cx="4041360" cy="639360"/>
-          </a:xfrm>
-          <a:prstGeom prst="rect">
-            <a:avLst/>
-          </a:prstGeom>
-          <a:noFill/>
-          <a:ln w="0">
-            <a:noFill/>
-          </a:ln>
-        </p:spPr>
-        <p:txBody>
-          <a:bodyPr lIns="91440" tIns="45720" rIns="91440" bIns="45720" anchor="b">
-            <a:noAutofit/>
-          </a:bodyPr>
-          <a:lstStyle>
-            <a:lvl1pPr indent="0" algn="l" defTabSz="457200">
-              <a:lnSpc>
-                <a:spcPct val="100000"/>
-              </a:lnSpc>
-              <a:spcBef>
-                <a:spcPts val="479"/>
-              </a:spcBef>
-              <a:buNone/>
-              <a:tabLst>
-                <a:tab pos="0" algn="l"/>
-              </a:tabLst>
-              <a:defRPr lang="en-US" sz="2400" b="1" u="none" strike="noStrike">
-                <a:solidFill>
-                  <a:schemeClr val="dk1"/>
-                </a:solidFill>
-                <a:effectLst/>
-                <a:uFillTx/>
-                <a:latin typeface="Calibri"/>
-              </a:defRPr>
-            </a:lvl1pPr>
-          </a:lstStyle>
-          <a:p>
-            <a:pPr indent="0" algn="l" defTabSz="457200">
-              <a:lnSpc>
-                <a:spcPct val="100000"/>
-              </a:lnSpc>
-              <a:spcBef>
-                <a:spcPts val="479"/>
-              </a:spcBef>
-              <a:buNone/>
-              <a:tabLst>
-                <a:tab pos="0" algn="l"/>
-              </a:tabLst>
-            </a:pPr>
-            <a:r>
-              <a:rPr lang="en-US" sz="2400" b="1" u="none" strike="noStrike">
-                <a:solidFill>
-                  <a:schemeClr val="dk1"/>
-                </a:solidFill>
-                <a:effectLst/>
-                <a:uFillTx/>
-                <a:latin typeface="Calibri"/>
-              </a:rPr>
-              <a:t>Click to edit Master text styles</a:t>
-            </a:r>
-            <a:endParaRPr lang="en-US" sz="2400" b="0" u="none" strike="noStrike">
-              <a:solidFill>
-                <a:schemeClr val="dk1"/>
-              </a:solidFill>
-              <a:effectLst/>
-              <a:uFillTx/>
-              <a:latin typeface="Calibri"/>
-            </a:endParaRPr>
-          </a:p>
-        </p:txBody>
-      </p:sp>
-      <p:sp>
-        <p:nvSpPr>
-          <p:cNvPr id="36" name="PlaceHolder 5"/>
-          <p:cNvSpPr>
-            <a:spLocks noGrp="1"/>
-          </p:cNvSpPr>
-          <p:nvPr>
-            <p:ph type="body"/>
-          </p:nvPr>
-        </p:nvSpPr>
-        <p:spPr>
-          <a:xfrm>
-            <a:off x="4645080" y="2174760"/>
-            <a:ext cx="4041360" cy="3951000"/>
-          </a:xfrm>
-          <a:prstGeom prst="rect">
-            <a:avLst/>
-          </a:prstGeom>
-          <a:noFill/>
-          <a:ln w="0">
-            <a:noFill/>
-          </a:ln>
-        </p:spPr>
-        <p:txBody>
-          <a:bodyPr lIns="91440" tIns="45720" rIns="91440" bIns="45720" anchor="t">
-            <a:noAutofit/>
-          </a:bodyPr>
-          <a:lstStyle>
-            <a:lvl1pPr algn="l" defTabSz="457200">
-              <a:lnSpc>
-                <a:spcPct val="100000"/>
-              </a:lnSpc>
-              <a:spcBef>
-                <a:spcPts val="479"/>
-              </a:spcBef>
-              <a:buClr>
-                <a:srgbClr val="000000"/>
-              </a:buClr>
-              <a:buFont typeface="Arial"/>
-              <a:buChar char="•"/>
-              <a:tabLst>
-                <a:tab pos="0" algn="l"/>
-              </a:tabLst>
-              <a:defRPr lang="en-US" sz="2400" b="0" u="none" strike="noStrike">
-                <a:solidFill>
-                  <a:schemeClr val="dk1"/>
-                </a:solidFill>
-                <a:effectLst/>
-                <a:uFillTx/>
-                <a:latin typeface="Calibri"/>
-              </a:defRPr>
-            </a:lvl1pPr>
-            <a:lvl2pPr lvl="1" algn="l" defTabSz="457200">
-              <a:lnSpc>
-                <a:spcPct val="100000"/>
-              </a:lnSpc>
-              <a:spcBef>
-                <a:spcPts val="400"/>
-              </a:spcBef>
-              <a:buClr>
-                <a:srgbClr val="000000"/>
-              </a:buClr>
-              <a:buFont typeface="Arial"/>
-              <a:buChar char="–"/>
-              <a:tabLst>
-                <a:tab pos="0" algn="l"/>
-              </a:tabLst>
-              <a:defRPr lang="en-US" sz="2000" b="0" u="none" strike="noStrike">
-                <a:solidFill>
-                  <a:schemeClr val="dk1"/>
-                </a:solidFill>
-                <a:effectLst/>
-                <a:uFillTx/>
-                <a:latin typeface="Calibri"/>
-              </a:defRPr>
-            </a:lvl2pPr>
-            <a:lvl3pPr lvl="2" algn="l" defTabSz="457200">
-              <a:lnSpc>
-                <a:spcPct val="100000"/>
-              </a:lnSpc>
-              <a:spcBef>
-                <a:spcPts val="360"/>
-              </a:spcBef>
-              <a:buClr>
-                <a:srgbClr val="000000"/>
-              </a:buClr>
-              <a:buFont typeface="Arial"/>
-              <a:buChar char="•"/>
-              <a:tabLst>
-                <a:tab pos="0" algn="l"/>
-              </a:tabLst>
-              <a:defRPr lang="en-US" sz="1800" b="0" u="none" strike="noStrike">
-                <a:solidFill>
-                  <a:schemeClr val="dk1"/>
-                </a:solidFill>
-                <a:effectLst/>
-                <a:uFillTx/>
-                <a:latin typeface="Calibri"/>
-              </a:defRPr>
-            </a:lvl3pPr>
-            <a:lvl4pPr lvl="3" algn="l" defTabSz="457200">
-              <a:lnSpc>
-                <a:spcPct val="100000"/>
-              </a:lnSpc>
-              <a:spcBef>
-                <a:spcPts val="320"/>
-              </a:spcBef>
-              <a:buClr>
-                <a:srgbClr val="000000"/>
-              </a:buClr>
-              <a:buFont typeface="Arial"/>
-              <a:buChar char="–"/>
-              <a:tabLst>
-                <a:tab pos="0" algn="l"/>
-              </a:tabLst>
-              <a:defRPr lang="en-US" sz="1600" b="0" u="none" strike="noStrike">
-                <a:solidFill>
-                  <a:schemeClr val="dk1"/>
-                </a:solidFill>
-                <a:effectLst/>
-                <a:uFillTx/>
-                <a:latin typeface="Calibri"/>
-              </a:defRPr>
-            </a:lvl4pPr>
-            <a:lvl5pPr lvl="4" algn="l" defTabSz="457200">
-              <a:lnSpc>
-                <a:spcPct val="100000"/>
-              </a:lnSpc>
-              <a:spcBef>
-                <a:spcPts val="320"/>
-              </a:spcBef>
-              <a:buClr>
-                <a:srgbClr val="000000"/>
-              </a:buClr>
-              <a:buFont typeface="Arial"/>
-              <a:buChar char="»"/>
-              <a:tabLst>
-                <a:tab pos="0" algn="l"/>
-              </a:tabLst>
-              <a:defRPr lang="en-US" sz="1600" b="0" u="none" strike="noStrike">
-                <a:solidFill>
-                  <a:schemeClr val="dk1"/>
-                </a:solidFill>
-                <a:effectLst/>
-                <a:uFillTx/>
-                <a:latin typeface="Calibri"/>
-              </a:defRPr>
-            </a:lvl5pPr>
-          </a:lstStyle>
-          <a:p>
-            <a:pPr marL="343080" indent="-343080" algn="l" defTabSz="457200">
-              <a:lnSpc>
-                <a:spcPct val="100000"/>
-              </a:lnSpc>
-              <a:spcBef>
-                <a:spcPts val="479"/>
-              </a:spcBef>
-              <a:buClr>
-                <a:srgbClr val="000000"/>
-              </a:buClr>
-              <a:buFont typeface="Arial"/>
-              <a:buChar char="•"/>
-              <a:tabLst>
-                <a:tab pos="0" algn="l"/>
-              </a:tabLst>
-            </a:pPr>
-            <a:r>
-              <a:rPr lang="en-US" sz="2400" b="0" u="none" strike="noStrike">
-                <a:solidFill>
-                  <a:schemeClr val="dk1"/>
-                </a:solidFill>
-                <a:effectLst/>
-                <a:uFillTx/>
-                <a:latin typeface="Calibri"/>
-              </a:rPr>
-              <a:t>Click to edit Master text styles</a:t>
-            </a:r>
-            <a:endParaRPr lang="en-US" sz="2400" b="0" u="none" strike="noStrike">
-              <a:solidFill>
-                <a:schemeClr val="dk1"/>
-              </a:solidFill>
-              <a:effectLst/>
-              <a:uFillTx/>
-              <a:latin typeface="Calibri"/>
-            </a:endParaRPr>
-          </a:p>
-          <a:p>
-            <a:pPr marL="743040" lvl="1" indent="-285840" algn="l" defTabSz="457200">
-              <a:lnSpc>
-                <a:spcPct val="100000"/>
-              </a:lnSpc>
-              <a:spcBef>
-                <a:spcPts val="400"/>
-              </a:spcBef>
-              <a:buClr>
-                <a:srgbClr val="000000"/>
-              </a:buClr>
-              <a:buFont typeface="Arial"/>
-              <a:buChar char="–"/>
-              <a:tabLst>
-                <a:tab pos="0" algn="l"/>
-              </a:tabLst>
-            </a:pPr>
-            <a:r>
-              <a:rPr lang="en-US" sz="2000" b="0" u="none" strike="noStrike">
-                <a:solidFill>
-                  <a:schemeClr val="dk1"/>
-                </a:solidFill>
-                <a:effectLst/>
-                <a:uFillTx/>
-                <a:latin typeface="Calibri"/>
-              </a:rPr>
-              <a:t>Second level</a:t>
-            </a:r>
-            <a:endParaRPr lang="en-US" sz="2000" b="0" u="none" strike="noStrike">
-              <a:solidFill>
-                <a:schemeClr val="dk1"/>
-              </a:solidFill>
-              <a:effectLst/>
-              <a:uFillTx/>
-              <a:latin typeface="Calibri"/>
-            </a:endParaRPr>
-          </a:p>
-          <a:p>
-            <a:pPr marL="1143000" lvl="2" indent="-228600" algn="l" defTabSz="457200">
-              <a:lnSpc>
-                <a:spcPct val="100000"/>
-              </a:lnSpc>
-              <a:spcBef>
-                <a:spcPts val="360"/>
-              </a:spcBef>
-              <a:buClr>
-                <a:srgbClr val="000000"/>
-              </a:buClr>
-              <a:buFont typeface="Arial"/>
-              <a:buChar char="•"/>
-              <a:tabLst>
-                <a:tab pos="0" algn="l"/>
-              </a:tabLst>
-            </a:pPr>
-            <a:r>
-              <a:rPr lang="en-US" sz="1800" b="0" u="none" strike="noStrike">
-                <a:solidFill>
-                  <a:schemeClr val="dk1"/>
-                </a:solidFill>
-                <a:effectLst/>
-                <a:uFillTx/>
-                <a:latin typeface="Calibri"/>
-              </a:rPr>
-              <a:t>Third level</a:t>
-            </a:r>
-            <a:endParaRPr lang="en-US" sz="1800" b="0" u="none" strike="noStrike">
-              <a:solidFill>
-                <a:schemeClr val="dk1"/>
-              </a:solidFill>
-              <a:effectLst/>
-              <a:uFillTx/>
-              <a:latin typeface="Calibri"/>
-            </a:endParaRPr>
-          </a:p>
-          <a:p>
-            <a:pPr marL="1600200" lvl="3" indent="-228600" algn="l" defTabSz="457200">
-              <a:lnSpc>
-                <a:spcPct val="100000"/>
-              </a:lnSpc>
-              <a:spcBef>
-                <a:spcPts val="320"/>
-              </a:spcBef>
-              <a:buClr>
-                <a:srgbClr val="000000"/>
-              </a:buClr>
-              <a:buFont typeface="Arial"/>
-              <a:buChar char="–"/>
-              <a:tabLst>
-                <a:tab pos="0" algn="l"/>
-              </a:tabLst>
-            </a:pPr>
-            <a:r>
-              <a:rPr lang="en-US" sz="1600" b="0" u="none" strike="noStrike">
-                <a:solidFill>
-                  <a:schemeClr val="dk1"/>
-                </a:solidFill>
-                <a:effectLst/>
-                <a:uFillTx/>
-                <a:latin typeface="Calibri"/>
-              </a:rPr>
-              <a:t>Fourth level</a:t>
-            </a:r>
-            <a:endParaRPr lang="en-US" sz="1600" b="0" u="none" strike="noStrike">
-              <a:solidFill>
-                <a:schemeClr val="dk1"/>
-              </a:solidFill>
-              <a:effectLst/>
-              <a:uFillTx/>
-              <a:latin typeface="Calibri"/>
-            </a:endParaRPr>
-          </a:p>
-          <a:p>
-            <a:pPr marL="2057400" lvl="4" indent="-228600" algn="l" defTabSz="457200">
-              <a:lnSpc>
-                <a:spcPct val="100000"/>
-              </a:lnSpc>
-              <a:spcBef>
-                <a:spcPts val="320"/>
-              </a:spcBef>
-              <a:buClr>
-                <a:srgbClr val="000000"/>
-              </a:buClr>
-              <a:buFont typeface="Arial"/>
-              <a:buChar char="»"/>
-              <a:tabLst>
-                <a:tab pos="0" algn="l"/>
-              </a:tabLst>
-            </a:pPr>
-            <a:r>
-              <a:rPr lang="en-US" sz="1600" b="0" u="none" strike="noStrike">
-                <a:solidFill>
-                  <a:schemeClr val="dk1"/>
-                </a:solidFill>
-                <a:effectLst/>
-                <a:uFillTx/>
-                <a:latin typeface="Calibri"/>
-              </a:rPr>
-              <a:t>Fifth level</a:t>
-            </a:r>
-            <a:endParaRPr lang="en-US" sz="1600" b="0" u="none" strike="noStrike">
-              <a:solidFill>
-                <a:schemeClr val="dk1"/>
-              </a:solidFill>
-              <a:effectLst/>
-              <a:uFillTx/>
-              <a:latin typeface="Calibri"/>
-            </a:endParaRPr>
-          </a:p>
-        </p:txBody>
-      </p:sp>
-      <p:sp>
-        <p:nvSpPr>
-          <p:cNvPr id="37" name="PlaceHolder 6"/>
-          <p:cNvSpPr>
-            <a:spLocks noGrp="1"/>
-          </p:cNvSpPr>
-          <p:nvPr>
-            <p:ph type="dt" idx="19"/>
-          </p:nvPr>
-        </p:nvSpPr>
-        <p:spPr>
-          <a:xfrm>
-            <a:off x="457200" y="6356520"/>
-            <a:ext cx="2133360" cy="364680"/>
-          </a:xfrm>
-          <a:prstGeom prst="rect">
-            <a:avLst/>
-          </a:prstGeom>
-          <a:noFill/>
-          <a:ln w="0">
-            <a:noFill/>
-          </a:ln>
-        </p:spPr>
-        <p:txBody>
-          <a:bodyPr lIns="91440" tIns="45720" rIns="91440" bIns="45720" anchor="ctr">
-            <a:noAutofit/>
-          </a:bodyPr>
-          <a:lstStyle>
-            <a:lvl1pPr indent="0" algn="l" defTabSz="457200">
-              <a:lnSpc>
-                <a:spcPct val="100000"/>
-              </a:lnSpc>
-              <a:buNone/>
-              <a:defRPr lang="en-US" sz="1200" b="0" u="none" strike="noStrike">
+            </a:pPr>
+            <a:fld id="{96388149-FB2A-4F15-BE86-3C4D79690F28}" type="slidenum">
+              <a:rPr lang="en-US" sz="1200" b="0" u="none" strike="noStrike">
                 <a:solidFill>
                   <a:schemeClr val="dk1">
                     <a:tint val="75000"/>
@@ -7520,168 +8942,6 @@
                 <a:effectLst/>
                 <a:uFillTx/>
                 <a:latin typeface="Calibri"/>
-              </a:defRPr>
-            </a:lvl1pPr>
-          </a:lstStyle>
-          <a:p>
-            <a:pPr indent="0" algn="l" defTabSz="457200">
-              <a:lnSpc>
-                <a:spcPct val="100000"/>
-              </a:lnSpc>
-              <a:buNone/>
-            </a:pPr>
-            <a:r>
-              <a:rPr lang="en-US" sz="1200" b="0" u="none" strike="noStrike">
-                <a:solidFill>
-                  <a:schemeClr val="dk1">
-                    <a:tint val="75000"/>
-                  </a:schemeClr>
-                </a:solidFill>
-                <a:effectLst/>
-                <a:uFillTx/>
-                <a:latin typeface="Calibri"/>
-              </a:rPr>
-              <a:t>&lt;date/time&gt;</a:t>
-            </a:r>
-            <a:endParaRPr lang="en-US" sz="1200" b="0" u="none" strike="noStrike">
-              <a:solidFill>
-                <a:srgbClr val="000000"/>
-              </a:solidFill>
-              <a:effectLst/>
-              <a:uFillTx/>
-              <a:latin typeface="Times New Roman"/>
-            </a:endParaRPr>
-          </a:p>
-        </p:txBody>
-      </p:sp>
-      <p:sp>
-        <p:nvSpPr>
-          <p:cNvPr id="38" name="PlaceHolder 7"/>
-          <p:cNvSpPr>
-            <a:spLocks noGrp="1"/>
-          </p:cNvSpPr>
-          <p:nvPr>
-            <p:ph type="ftr" idx="20"/>
-          </p:nvPr>
-        </p:nvSpPr>
-        <p:spPr>
-          <a:xfrm>
-            <a:off x="3124080" y="6356520"/>
-            <a:ext cx="2895120" cy="364680"/>
-          </a:xfrm>
-          <a:prstGeom prst="rect">
-            <a:avLst/>
-          </a:prstGeom>
-          <a:noFill/>
-          <a:ln w="0">
-            <a:noFill/>
-          </a:ln>
-        </p:spPr>
-        <p:txBody>
-          <a:bodyPr lIns="91440" tIns="45720" rIns="91440" bIns="45720" anchor="ctr">
-            <a:noAutofit/>
-          </a:bodyPr>
-          <a:lstStyle>
-            <a:lvl1pPr indent="0" algn="ctr">
-              <a:buNone/>
-              <a:defRPr lang="en-US" sz="1400" b="0" u="none" strike="noStrike">
-                <a:solidFill>
-                  <a:srgbClr val="000000"/>
-                </a:solidFill>
-                <a:effectLst/>
-                <a:uFillTx/>
-                <a:latin typeface="Times New Roman"/>
-              </a:defRPr>
-            </a:lvl1pPr>
-          </a:lstStyle>
-          <a:p>
-            <a:pPr indent="0" algn="ctr">
-              <a:buNone/>
-            </a:pPr>
-            <a:r>
-              <a:rPr lang="en-US" sz="1400" b="0" u="none" strike="noStrike">
-                <a:solidFill>
-                  <a:srgbClr val="000000"/>
-                </a:solidFill>
-                <a:effectLst/>
-                <a:uFillTx/>
-                <a:latin typeface="Times New Roman"/>
-              </a:rPr>
-              <a:t>&lt;footer&gt;</a:t>
-            </a:r>
-            <a:endParaRPr lang="en-US" sz="1400" b="0" u="none" strike="noStrike">
-              <a:solidFill>
-                <a:srgbClr val="000000"/>
-              </a:solidFill>
-              <a:effectLst/>
-              <a:uFillTx/>
-              <a:latin typeface="Times New Roman"/>
-            </a:endParaRPr>
-          </a:p>
-        </p:txBody>
-      </p:sp>
-      <p:sp>
-        <p:nvSpPr>
-          <p:cNvPr id="39" name="PlaceHolder 8"/>
-          <p:cNvSpPr>
-            <a:spLocks noGrp="1"/>
-          </p:cNvSpPr>
-          <p:nvPr>
-            <p:ph type="sldNum" idx="21"/>
-          </p:nvPr>
-        </p:nvSpPr>
-        <p:spPr>
-          <a:xfrm>
-            <a:off x="6553080" y="6356520"/>
-            <a:ext cx="2133360" cy="364680"/>
-          </a:xfrm>
-          <a:prstGeom prst="rect">
-            <a:avLst/>
-          </a:prstGeom>
-          <a:noFill/>
-          <a:ln w="0">
-            <a:noFill/>
-          </a:ln>
-        </p:spPr>
-        <p:txBody>
-          <a:bodyPr lIns="91440" tIns="45720" rIns="91440" bIns="45720" anchor="ctr">
-            <a:noAutofit/>
-          </a:bodyPr>
-          <a:lstStyle>
-            <a:lvl1pPr indent="0" algn="r" defTabSz="457200">
-              <a:lnSpc>
-                <a:spcPct val="100000"/>
-              </a:lnSpc>
-              <a:buNone/>
-              <a:defRPr lang="en-US" sz="1200" b="0" u="none" strike="noStrike">
-                <a:solidFill>
-                  <a:schemeClr val="dk1">
-                    <a:tint val="75000"/>
-                  </a:schemeClr>
-                </a:solidFill>
-                <a:effectLst/>
-                <a:uFillTx/>
-                <a:latin typeface="Calibri"/>
-              </a:defRPr>
-            </a:lvl1pPr>
-          </a:lstStyle>
-          <a:p>
-            <a:pPr indent="0" algn="r" defTabSz="457200">
-              <a:lnSpc>
-                <a:spcPct val="100000"/>
-              </a:lnSpc>
-              <a:buNone/>
-            </a:pPr>
-            <a:fld id="{C2EB2EBA-BE8A-4F90-9DB6-164D539B862D}" type="slidenum">
-              <a:rPr lang="en-US" sz="1200" b="0" u="none" strike="noStrike">
-                <a:solidFill>
-                  <a:schemeClr val="dk1">
-                    <a:tint val="75000"/>
-                  </a:schemeClr>
-                </a:solidFill>
-                <a:effectLst/>
-                <a:uFillTx/>
-                <a:latin typeface="Calibri"/>
               </a:rPr>
               <a:t>&lt;number&gt;</a:t>
             </a:fld>
@@ -7692,1030 +8952,6 @@
               <a:effectLst/>
               <a:uFillTx/>
               <a:latin typeface="Times New Roman"/>
-            </a:endParaRPr>
-          </a:p>
-        </p:txBody>
-      </p:sp>
-    </p:spTree>
-  </p:cSld>
-  <p:clrMapOvr>
-    <a:masterClrMapping/>
-  </p:clrMapOvr>
-</p:sldLayout>
-</file>
-
-<file path=ppt/slideLayouts/slideLayout8.xml><?xml version="1.0" encoding="utf-8"?>
-<p:sldLayout xmlns:a="http://schemas.openxmlformats.org/drawingml/2006/main" xmlns:p="http://schemas.openxmlformats.org/presentationml/2006/main" xmlns:r="http://schemas.openxmlformats.org/officeDocument/2006/relationships" xmlns:p14="http://schemas.microsoft.com/office/powerpoint/2010/main" xmlns:p15="http://schemas.microsoft.com/office/powerpoint/2012/main" xmlns:mc="http://schemas.openxmlformats.org/markup-compatibility/2006" type="titleOnly" preserve="1">
-  <p:cSld name="Title Only">
-    <p:bg>
-      <p:bgPr>
-        <a:solidFill>
-          <a:srgbClr val="FFFFFF"/>
-        </a:solidFill>
-      </p:bgPr>
-    </p:bg>
-    <p:spTree>
-      <p:nvGrpSpPr>
-        <p:cNvPr id="1" name=""/>
-        <p:cNvGrpSpPr/>
-        <p:nvPr/>
-      </p:nvGrpSpPr>
-      <p:grpSpPr>
-        <a:xfrm>
-          <a:off x="0" y="0"/>
-          <a:ext cx="0" cy="0"/>
-          <a:chOff x="0" y="0"/>
-          <a:chExt cx="0" cy="0"/>
-        </a:xfrm>
-      </p:grpSpPr>
-      <p:sp>
-        <p:nvSpPr>
-          <p:cNvPr id="40" name="PlaceHolder 1"/>
-          <p:cNvSpPr>
-            <a:spLocks noGrp="1"/>
-          </p:cNvSpPr>
-          <p:nvPr>
-            <p:ph type="title"/>
-          </p:nvPr>
-        </p:nvSpPr>
-        <p:spPr>
-          <a:xfrm>
-            <a:off x="457200" y="274680"/>
-            <a:ext cx="8229240" cy="1142640"/>
-          </a:xfrm>
-          <a:prstGeom prst="rect">
-            <a:avLst/>
-          </a:prstGeom>
-          <a:noFill/>
-          <a:ln w="0">
-            <a:noFill/>
-          </a:ln>
-        </p:spPr>
-        <p:txBody>
-          <a:bodyPr lIns="91440" tIns="45720" rIns="91440" bIns="45720" anchor="ctr">
-            <a:noAutofit/>
-          </a:bodyPr>
-          <a:lstStyle>
-            <a:lvl1pPr indent="0" algn="ctr" defTabSz="457200">
-              <a:lnSpc>
-                <a:spcPct val="100000"/>
-              </a:lnSpc>
-              <a:buNone/>
-              <a:defRPr lang="en-US" sz="4400" b="0" u="none" strike="noStrike">
-                <a:solidFill>
-                  <a:schemeClr val="dk1"/>
-                </a:solidFill>
-                <a:effectLst/>
-                <a:uFillTx/>
-                <a:latin typeface="Calibri"/>
-              </a:defRPr>
-            </a:lvl1pPr>
-          </a:lstStyle>
-          <a:p>
-            <a:pPr indent="0" algn="ctr" defTabSz="457200">
-              <a:lnSpc>
-                <a:spcPct val="100000"/>
-              </a:lnSpc>
-              <a:buNone/>
-            </a:pPr>
-            <a:r>
-              <a:rPr lang="en-US" sz="4400" b="0" u="none" strike="noStrike">
-                <a:solidFill>
-                  <a:schemeClr val="dk1"/>
-                </a:solidFill>
-                <a:effectLst/>
-                <a:uFillTx/>
-                <a:latin typeface="Calibri"/>
-              </a:rPr>
-              <a:t>Click to edit Master title style</a:t>
-            </a:r>
-            <a:endParaRPr lang="en-US" sz="4400" b="0" u="none" strike="noStrike">
-              <a:solidFill>
-                <a:schemeClr val="dk1"/>
-              </a:solidFill>
-              <a:effectLst/>
-              <a:uFillTx/>
-              <a:latin typeface="Calibri"/>
-            </a:endParaRPr>
-          </a:p>
-        </p:txBody>
-      </p:sp>
-      <p:sp>
-        <p:nvSpPr>
-          <p:cNvPr id="41" name="PlaceHolder 2"/>
-          <p:cNvSpPr>
-            <a:spLocks noGrp="1"/>
-          </p:cNvSpPr>
-          <p:nvPr>
-            <p:ph type="dt" idx="22"/>
-          </p:nvPr>
-        </p:nvSpPr>
-        <p:spPr>
-          <a:xfrm>
-            <a:off x="457200" y="6356520"/>
-            <a:ext cx="2133360" cy="364680"/>
-          </a:xfrm>
-          <a:prstGeom prst="rect">
-            <a:avLst/>
-          </a:prstGeom>
-          <a:noFill/>
-          <a:ln w="0">
-            <a:noFill/>
-          </a:ln>
-        </p:spPr>
-        <p:txBody>
-          <a:bodyPr lIns="91440" tIns="45720" rIns="91440" bIns="45720" anchor="ctr">
-            <a:noAutofit/>
-          </a:bodyPr>
-          <a:lstStyle>
-            <a:lvl1pPr indent="0" algn="l" defTabSz="457200">
-              <a:lnSpc>
-                <a:spcPct val="100000"/>
-              </a:lnSpc>
-              <a:buNone/>
-              <a:defRPr lang="en-US" sz="1200" b="0" u="none" strike="noStrike">
-                <a:solidFill>
-                  <a:schemeClr val="dk1">
-                    <a:tint val="75000"/>
-                  </a:schemeClr>
-                </a:solidFill>
-                <a:effectLst/>
-                <a:uFillTx/>
-                <a:latin typeface="Calibri"/>
-              </a:defRPr>
-            </a:lvl1pPr>
-          </a:lstStyle>
-          <a:p>
-            <a:pPr indent="0" algn="l" defTabSz="457200">
-              <a:lnSpc>
-                <a:spcPct val="100000"/>
-              </a:lnSpc>
-              <a:buNone/>
-            </a:pPr>
-            <a:r>
-              <a:rPr lang="en-US" sz="1200" b="0" u="none" strike="noStrike">
-                <a:solidFill>
-                  <a:schemeClr val="dk1">
-                    <a:tint val="75000"/>
-                  </a:schemeClr>
-                </a:solidFill>
-                <a:effectLst/>
-                <a:uFillTx/>
-                <a:latin typeface="Calibri"/>
-              </a:rPr>
-              <a:t>&lt;date/time&gt;</a:t>
-            </a:r>
-            <a:endParaRPr lang="en-US" sz="1200" b="0" u="none" strike="noStrike">
-              <a:solidFill>
-                <a:srgbClr val="000000"/>
-              </a:solidFill>
-              <a:effectLst/>
-              <a:uFillTx/>
-              <a:latin typeface="Times New Roman"/>
-            </a:endParaRPr>
-          </a:p>
-        </p:txBody>
-      </p:sp>
-      <p:sp>
-        <p:nvSpPr>
-          <p:cNvPr id="42" name="PlaceHolder 3"/>
-          <p:cNvSpPr>
-            <a:spLocks noGrp="1"/>
-          </p:cNvSpPr>
-          <p:nvPr>
-            <p:ph type="ftr" idx="23"/>
-          </p:nvPr>
-        </p:nvSpPr>
-        <p:spPr>
-          <a:xfrm>
-            <a:off x="3124080" y="6356520"/>
-            <a:ext cx="2895120" cy="364680"/>
-          </a:xfrm>
-          <a:prstGeom prst="rect">
-            <a:avLst/>
-          </a:prstGeom>
-          <a:noFill/>
-          <a:ln w="0">
-            <a:noFill/>
-          </a:ln>
-        </p:spPr>
-        <p:txBody>
-          <a:bodyPr lIns="91440" tIns="45720" rIns="91440" bIns="45720" anchor="ctr">
-            <a:noAutofit/>
-          </a:bodyPr>
-          <a:lstStyle>
-            <a:lvl1pPr indent="0" algn="ctr">
-              <a:buNone/>
-              <a:defRPr lang="en-US" sz="1400" b="0" u="none" strike="noStrike">
-                <a:solidFill>
-                  <a:srgbClr val="000000"/>
-                </a:solidFill>
-                <a:effectLst/>
-                <a:uFillTx/>
-                <a:latin typeface="Times New Roman"/>
-              </a:defRPr>
-            </a:lvl1pPr>
-          </a:lstStyle>
-          <a:p>
-            <a:pPr indent="0" algn="ctr">
-              <a:buNone/>
-            </a:pPr>
-            <a:r>
-              <a:rPr lang="en-US" sz="1400" b="0" u="none" strike="noStrike">
-                <a:solidFill>
-                  <a:srgbClr val="000000"/>
-                </a:solidFill>
-                <a:effectLst/>
-                <a:uFillTx/>
-                <a:latin typeface="Times New Roman"/>
-              </a:rPr>
-              <a:t>&lt;footer&gt;</a:t>
-            </a:r>
-            <a:endParaRPr lang="en-US" sz="1400" b="0" u="none" strike="noStrike">
-              <a:solidFill>
-                <a:srgbClr val="000000"/>
-              </a:solidFill>
-              <a:effectLst/>
-              <a:uFillTx/>
-              <a:latin typeface="Times New Roman"/>
-            </a:endParaRPr>
-          </a:p>
-        </p:txBody>
-      </p:sp>
-      <p:sp>
-        <p:nvSpPr>
-          <p:cNvPr id="43" name="PlaceHolder 4"/>
-          <p:cNvSpPr>
-            <a:spLocks noGrp="1"/>
-          </p:cNvSpPr>
-          <p:nvPr>
-            <p:ph type="sldNum" idx="24"/>
-          </p:nvPr>
-        </p:nvSpPr>
-        <p:spPr>
-          <a:xfrm>
-            <a:off x="6553080" y="6356520"/>
-            <a:ext cx="2133360" cy="364680"/>
-          </a:xfrm>
-          <a:prstGeom prst="rect">
-            <a:avLst/>
-          </a:prstGeom>
-          <a:noFill/>
-          <a:ln w="0">
-            <a:noFill/>
-          </a:ln>
-        </p:spPr>
-        <p:txBody>
-          <a:bodyPr lIns="91440" tIns="45720" rIns="91440" bIns="45720" anchor="ctr">
-            <a:noAutofit/>
-          </a:bodyPr>
-          <a:lstStyle>
-            <a:lvl1pPr indent="0" algn="r" defTabSz="457200">
-              <a:lnSpc>
-                <a:spcPct val="100000"/>
-              </a:lnSpc>
-              <a:buNone/>
-              <a:defRPr lang="en-US" sz="1200" b="0" u="none" strike="noStrike">
-                <a:solidFill>
-                  <a:schemeClr val="dk1">
-                    <a:tint val="75000"/>
-                  </a:schemeClr>
-                </a:solidFill>
-                <a:effectLst/>
-                <a:uFillTx/>
-                <a:latin typeface="Calibri"/>
-              </a:defRPr>
-            </a:lvl1pPr>
-          </a:lstStyle>
-          <a:p>
-            <a:pPr indent="0" algn="r" defTabSz="457200">
-              <a:lnSpc>
-                <a:spcPct val="100000"/>
-              </a:lnSpc>
-              <a:buNone/>
-            </a:pPr>
-            <a:fld id="{199C60D3-6EDF-4B09-99A9-5BB5975E09E2}" type="slidenum">
-              <a:rPr lang="en-US" sz="1200" b="0" u="none" strike="noStrike">
-                <a:solidFill>
-                  <a:schemeClr val="dk1">
-                    <a:tint val="75000"/>
-                  </a:schemeClr>
-                </a:solidFill>
-                <a:effectLst/>
-                <a:uFillTx/>
-                <a:latin typeface="Calibri"/>
-              </a:rPr>
-              <a:t>&lt;number&gt;</a:t>
-            </a:fld>
-            <a:endParaRPr lang="en-US" sz="1200" b="0" u="none" strike="noStrike">
-              <a:solidFill>
-                <a:srgbClr val="000000"/>
-              </a:solidFill>
-              <a:effectLst/>
-              <a:uFillTx/>
-              <a:latin typeface="Times New Roman"/>
-            </a:endParaRPr>
-          </a:p>
-        </p:txBody>
-      </p:sp>
-    </p:spTree>
-  </p:cSld>
-  <p:clrMapOvr>
-    <a:masterClrMapping/>
-  </p:clrMapOvr>
-</p:sldLayout>
-</file>
-
-<file path=ppt/slideLayouts/slideLayout9.xml><?xml version="1.0" encoding="utf-8"?>
-<p:sldLayout xmlns:a="http://schemas.openxmlformats.org/drawingml/2006/main" xmlns:p="http://schemas.openxmlformats.org/presentationml/2006/main" xmlns:r="http://schemas.openxmlformats.org/officeDocument/2006/relationships" xmlns:p14="http://schemas.microsoft.com/office/powerpoint/2010/main" xmlns:p15="http://schemas.microsoft.com/office/powerpoint/2012/main" xmlns:mc="http://schemas.openxmlformats.org/markup-compatibility/2006" type="blank" preserve="1">
-  <p:cSld name="Blank">
-    <p:bg>
-      <p:bgPr>
-        <a:solidFill>
-          <a:srgbClr val="FFFFFF"/>
-        </a:solidFill>
-      </p:bgPr>
-    </p:bg>
-    <p:spTree>
-      <p:nvGrpSpPr>
-        <p:cNvPr id="1" name=""/>
-        <p:cNvGrpSpPr/>
-        <p:nvPr/>
-      </p:nvGrpSpPr>
-      <p:grpSpPr>
-        <a:xfrm>
-          <a:off x="0" y="0"/>
-          <a:ext cx="0" cy="0"/>
-          <a:chOff x="0" y="0"/>
-          <a:chExt cx="0" cy="0"/>
-        </a:xfrm>
-      </p:grpSpPr>
-      <p:sp>
-        <p:nvSpPr>
-          <p:cNvPr id="44" name="PlaceHolder 1"/>
-          <p:cNvSpPr>
-            <a:spLocks noGrp="1"/>
-          </p:cNvSpPr>
-          <p:nvPr>
-            <p:ph type="dt" idx="25"/>
-          </p:nvPr>
-        </p:nvSpPr>
-        <p:spPr>
-          <a:xfrm>
-            <a:off x="457200" y="6356520"/>
-            <a:ext cx="2133360" cy="364680"/>
-          </a:xfrm>
-          <a:prstGeom prst="rect">
-            <a:avLst/>
-          </a:prstGeom>
-          <a:noFill/>
-          <a:ln w="0">
-            <a:noFill/>
-          </a:ln>
-        </p:spPr>
-        <p:txBody>
-          <a:bodyPr lIns="91440" tIns="45720" rIns="91440" bIns="45720" anchor="ctr">
-            <a:noAutofit/>
-          </a:bodyPr>
-          <a:lstStyle>
-            <a:lvl1pPr indent="0" algn="l" defTabSz="457200">
-              <a:lnSpc>
-                <a:spcPct val="100000"/>
-              </a:lnSpc>
-              <a:buNone/>
-              <a:defRPr lang="en-US" sz="1200" b="0" u="none" strike="noStrike">
-                <a:solidFill>
-                  <a:schemeClr val="dk1">
-                    <a:tint val="75000"/>
-                  </a:schemeClr>
-                </a:solidFill>
-                <a:effectLst/>
-                <a:uFillTx/>
-                <a:latin typeface="Calibri"/>
-              </a:defRPr>
-            </a:lvl1pPr>
-          </a:lstStyle>
-          <a:p>
-            <a:pPr indent="0" algn="l" defTabSz="457200">
-              <a:lnSpc>
-                <a:spcPct val="100000"/>
-              </a:lnSpc>
-              <a:buNone/>
-            </a:pPr>
-            <a:r>
-              <a:rPr lang="en-US" sz="1200" b="0" u="none" strike="noStrike">
-                <a:solidFill>
-                  <a:schemeClr val="dk1">
-                    <a:tint val="75000"/>
-                  </a:schemeClr>
-                </a:solidFill>
-                <a:effectLst/>
-                <a:uFillTx/>
-                <a:latin typeface="Calibri"/>
-              </a:rPr>
-              <a:t>&lt;date/time&gt;</a:t>
-            </a:r>
-            <a:endParaRPr lang="en-US" sz="1200" b="0" u="none" strike="noStrike">
-              <a:solidFill>
-                <a:srgbClr val="000000"/>
-              </a:solidFill>
-              <a:effectLst/>
-              <a:uFillTx/>
-              <a:latin typeface="Times New Roman"/>
-            </a:endParaRPr>
-          </a:p>
-        </p:txBody>
-      </p:sp>
-      <p:sp>
-        <p:nvSpPr>
-          <p:cNvPr id="45" name="PlaceHolder 2"/>
-          <p:cNvSpPr>
-            <a:spLocks noGrp="1"/>
-          </p:cNvSpPr>
-          <p:nvPr>
-            <p:ph type="ftr" idx="26"/>
-          </p:nvPr>
-        </p:nvSpPr>
-        <p:spPr>
-          <a:xfrm>
-            <a:off x="3124080" y="6356520"/>
-            <a:ext cx="2895120" cy="364680"/>
-          </a:xfrm>
-          <a:prstGeom prst="rect">
-            <a:avLst/>
-          </a:prstGeom>
-          <a:noFill/>
-          <a:ln w="0">
-            <a:noFill/>
-          </a:ln>
-        </p:spPr>
-        <p:txBody>
-          <a:bodyPr lIns="91440" tIns="45720" rIns="91440" bIns="45720" anchor="ctr">
-            <a:noAutofit/>
-          </a:bodyPr>
-          <a:lstStyle>
-            <a:lvl1pPr indent="0" algn="ctr">
-              <a:buNone/>
-              <a:defRPr lang="en-US" sz="1400" b="0" u="none" strike="noStrike">
-                <a:solidFill>
-                  <a:srgbClr val="000000"/>
-                </a:solidFill>
-                <a:effectLst/>
-                <a:uFillTx/>
-                <a:latin typeface="Times New Roman"/>
-              </a:defRPr>
-            </a:lvl1pPr>
-          </a:lstStyle>
-          <a:p>
-            <a:pPr indent="0" algn="ctr">
-              <a:buNone/>
-            </a:pPr>
-            <a:r>
-              <a:rPr lang="en-US" sz="1400" b="0" u="none" strike="noStrike">
-                <a:solidFill>
-                  <a:srgbClr val="000000"/>
-                </a:solidFill>
-                <a:effectLst/>
-                <a:uFillTx/>
-                <a:latin typeface="Times New Roman"/>
-              </a:rPr>
-              <a:t>&lt;footer&gt;</a:t>
-            </a:r>
-            <a:endParaRPr lang="en-US" sz="1400" b="0" u="none" strike="noStrike">
-              <a:solidFill>
-                <a:srgbClr val="000000"/>
-              </a:solidFill>
-              <a:effectLst/>
-              <a:uFillTx/>
-              <a:latin typeface="Times New Roman"/>
-            </a:endParaRPr>
-          </a:p>
-        </p:txBody>
-      </p:sp>
-      <p:sp>
-        <p:nvSpPr>
-          <p:cNvPr id="46" name="PlaceHolder 3"/>
-          <p:cNvSpPr>
-            <a:spLocks noGrp="1"/>
-          </p:cNvSpPr>
-          <p:nvPr>
-            <p:ph type="sldNum" idx="27"/>
-          </p:nvPr>
-        </p:nvSpPr>
-        <p:spPr>
-          <a:xfrm>
-            <a:off x="6553080" y="6356520"/>
-            <a:ext cx="2133360" cy="364680"/>
-          </a:xfrm>
-          <a:prstGeom prst="rect">
-            <a:avLst/>
-          </a:prstGeom>
-          <a:noFill/>
-          <a:ln w="0">
-            <a:noFill/>
-          </a:ln>
-        </p:spPr>
-        <p:txBody>
-          <a:bodyPr lIns="91440" tIns="45720" rIns="91440" bIns="45720" anchor="ctr">
-            <a:noAutofit/>
-          </a:bodyPr>
-          <a:lstStyle>
-            <a:lvl1pPr indent="0" algn="r" defTabSz="457200">
-              <a:lnSpc>
-                <a:spcPct val="100000"/>
-              </a:lnSpc>
-              <a:buNone/>
-              <a:defRPr lang="en-US" sz="1200" b="0" u="none" strike="noStrike">
-                <a:solidFill>
-                  <a:schemeClr val="dk1">
-                    <a:tint val="75000"/>
-                  </a:schemeClr>
-                </a:solidFill>
-                <a:effectLst/>
-                <a:uFillTx/>
-                <a:latin typeface="Calibri"/>
-              </a:defRPr>
-            </a:lvl1pPr>
-          </a:lstStyle>
-          <a:p>
-            <a:pPr indent="0" algn="r" defTabSz="457200">
-              <a:lnSpc>
-                <a:spcPct val="100000"/>
-              </a:lnSpc>
-              <a:buNone/>
-            </a:pPr>
-            <a:fld id="{87FB0267-BB54-4D24-B570-861E0D8DD222}" type="slidenum">
-              <a:rPr lang="en-US" sz="1200" b="0" u="none" strike="noStrike">
-                <a:solidFill>
-                  <a:schemeClr val="dk1">
-                    <a:tint val="75000"/>
-                  </a:schemeClr>
-                </a:solidFill>
-                <a:effectLst/>
-                <a:uFillTx/>
-                <a:latin typeface="Calibri"/>
-              </a:rPr>
-              <a:t>&lt;number&gt;</a:t>
-            </a:fld>
-            <a:endParaRPr lang="en-US" sz="1200" b="0" u="none" strike="noStrike">
-              <a:solidFill>
-                <a:srgbClr val="000000"/>
-              </a:solidFill>
-              <a:effectLst/>
-              <a:uFillTx/>
-              <a:latin typeface="Times New Roman"/>
-            </a:endParaRPr>
-          </a:p>
-        </p:txBody>
-      </p:sp>
-      <p:sp>
-        <p:nvSpPr>
-          <p:cNvPr id="47" name="PlaceHolder 4"/>
-          <p:cNvSpPr>
-            <a:spLocks noGrp="1"/>
-          </p:cNvSpPr>
-          <p:nvPr>
-            <p:ph type="title"/>
-          </p:nvPr>
-        </p:nvSpPr>
-        <p:spPr>
-          <a:xfrm>
-            <a:off x="609480" y="273600"/>
-            <a:ext cx="10972080" cy="1144800"/>
-          </a:xfrm>
-          <a:prstGeom prst="rect">
-            <a:avLst/>
-          </a:prstGeom>
-          <a:noFill/>
-          <a:ln w="0">
-            <a:noFill/>
-          </a:ln>
-        </p:spPr>
-        <p:txBody>
-          <a:bodyPr lIns="0" tIns="0" rIns="0" bIns="0" anchor="ctr">
-            <a:noAutofit/>
-          </a:bodyPr>
-          <a:lstStyle>
-            <a:lvl1pPr indent="0" algn="ctr" defTabSz="457200">
-              <a:buNone/>
-              <a:defRPr lang="en-US" sz="4400" b="0" u="none" strike="noStrike">
-                <a:solidFill>
-                  <a:schemeClr val="dk1"/>
-                </a:solidFill>
-                <a:effectLst/>
-                <a:uFillTx/>
-                <a:latin typeface="Calibri"/>
-              </a:defRPr>
-            </a:lvl1pPr>
-          </a:lstStyle>
-          <a:p>
-            <a:pPr indent="0" algn="ctr" defTabSz="457200">
-              <a:buNone/>
-            </a:pPr>
-            <a:r>
-              <a:rPr lang="en-US" sz="4400" b="0" u="none" strike="noStrike">
-                <a:solidFill>
-                  <a:schemeClr val="dk1"/>
-                </a:solidFill>
-                <a:effectLst/>
-                <a:uFillTx/>
-                <a:latin typeface="Calibri"/>
-              </a:rPr>
-              <a:t>Click to edit the title text format</a:t>
-            </a:r>
-            <a:endParaRPr lang="en-US" sz="4400" b="0" u="none" strike="noStrike">
-              <a:solidFill>
-                <a:schemeClr val="dk1"/>
-              </a:solidFill>
-              <a:effectLst/>
-              <a:uFillTx/>
-              <a:latin typeface="Calibri"/>
-            </a:endParaRPr>
-          </a:p>
-        </p:txBody>
-      </p:sp>
-      <p:sp>
-        <p:nvSpPr>
-          <p:cNvPr id="48" name="PlaceHolder 5"/>
-          <p:cNvSpPr>
-            <a:spLocks noGrp="1"/>
-          </p:cNvSpPr>
-          <p:nvPr>
-            <p:ph type="body"/>
-          </p:nvPr>
-        </p:nvSpPr>
-        <p:spPr>
-          <a:xfrm>
-            <a:off x="609480" y="1604520"/>
-            <a:ext cx="10972080" cy="3977280"/>
-          </a:xfrm>
-          <a:prstGeom prst="rect">
-            <a:avLst/>
-          </a:prstGeom>
-          <a:noFill/>
-          <a:ln w="0">
-            <a:noFill/>
-          </a:ln>
-        </p:spPr>
-        <p:txBody>
-          <a:bodyPr lIns="0" tIns="0" rIns="0" bIns="0" anchor="t">
-            <a:normAutofit/>
-          </a:bodyPr>
-          <a:lstStyle>
-            <a:lvl1pPr algn="l" defTabSz="457200">
-              <a:spcBef>
-                <a:spcPts val="641"/>
-              </a:spcBef>
-              <a:buClr>
-                <a:srgbClr val="000000"/>
-              </a:buClr>
-              <a:buFont typeface="Arial"/>
-              <a:buChar char="•"/>
-              <a:defRPr lang="en-US" sz="3200" b="0" u="none" strike="noStrike">
-                <a:solidFill>
-                  <a:schemeClr val="dk1"/>
-                </a:solidFill>
-                <a:effectLst/>
-                <a:uFillTx/>
-                <a:latin typeface="Calibri"/>
-              </a:defRPr>
-            </a:lvl1pPr>
-            <a:lvl2pPr lvl="1" algn="l" defTabSz="457200">
-              <a:spcBef>
-                <a:spcPts val="561"/>
-              </a:spcBef>
-              <a:buClr>
-                <a:srgbClr val="000000"/>
-              </a:buClr>
-              <a:buSzPct val="75000"/>
-              <a:buFont typeface="Symbol" charset="2"/>
-              <a:buChar char=""/>
-              <a:defRPr lang="en-US" sz="2800" b="0" u="none" strike="noStrike">
-                <a:solidFill>
-                  <a:schemeClr val="dk1"/>
-                </a:solidFill>
-                <a:effectLst/>
-                <a:uFillTx/>
-                <a:latin typeface="Calibri"/>
-              </a:defRPr>
-            </a:lvl2pPr>
-            <a:lvl3pPr lvl="2" algn="l" defTabSz="457200">
-              <a:spcBef>
-                <a:spcPts val="479"/>
-              </a:spcBef>
-              <a:buClr>
-                <a:srgbClr val="000000"/>
-              </a:buClr>
-              <a:buSzPct val="45000"/>
-              <a:buFont typeface="Wingdings" charset="2"/>
-              <a:buChar char=""/>
-              <a:defRPr lang="en-US" sz="2400" b="0" u="none" strike="noStrike">
-                <a:solidFill>
-                  <a:schemeClr val="dk1"/>
-                </a:solidFill>
-                <a:effectLst/>
-                <a:uFillTx/>
-                <a:latin typeface="Calibri"/>
-              </a:defRPr>
-            </a:lvl3pPr>
-            <a:lvl4pPr lvl="3" algn="l" defTabSz="457200">
-              <a:spcBef>
-                <a:spcPts val="400"/>
-              </a:spcBef>
-              <a:buClr>
-                <a:srgbClr val="000000"/>
-              </a:buClr>
-              <a:buSzPct val="75000"/>
-              <a:buFont typeface="Symbol" charset="2"/>
-              <a:buChar char=""/>
-              <a:defRPr lang="en-US" sz="2000" b="0" u="none" strike="noStrike">
-                <a:solidFill>
-                  <a:schemeClr val="dk1"/>
-                </a:solidFill>
-                <a:effectLst/>
-                <a:uFillTx/>
-                <a:latin typeface="Calibri"/>
-              </a:defRPr>
-            </a:lvl4pPr>
-            <a:lvl5pPr lvl="4" algn="l" defTabSz="457200">
-              <a:spcBef>
-                <a:spcPts val="400"/>
-              </a:spcBef>
-              <a:buClr>
-                <a:srgbClr val="000000"/>
-              </a:buClr>
-              <a:buSzPct val="45000"/>
-              <a:buFont typeface="Wingdings" charset="2"/>
-              <a:buChar char=""/>
-              <a:defRPr lang="en-US" sz="2000" b="0" u="none" strike="noStrike">
-                <a:solidFill>
-                  <a:schemeClr val="dk1"/>
-                </a:solidFill>
-                <a:effectLst/>
-                <a:uFillTx/>
-                <a:latin typeface="Calibri"/>
-              </a:defRPr>
-            </a:lvl5pPr>
-            <a:lvl6pPr lvl="5" algn="l" defTabSz="457200">
-              <a:spcBef>
-                <a:spcPts val="283"/>
-              </a:spcBef>
-              <a:buClr>
-                <a:srgbClr val="000000"/>
-              </a:buClr>
-              <a:buSzPct val="45000"/>
-              <a:buFont typeface="Wingdings" charset="2"/>
-              <a:buChar char=""/>
-              <a:defRPr lang="en-US" sz="2000" b="0" u="none" strike="noStrike">
-                <a:solidFill>
-                  <a:schemeClr val="dk1"/>
-                </a:solidFill>
-                <a:effectLst/>
-                <a:uFillTx/>
-                <a:latin typeface="Calibri"/>
-              </a:defRPr>
-            </a:lvl6pPr>
-            <a:lvl7pPr lvl="6" algn="l" defTabSz="457200">
-              <a:spcBef>
-                <a:spcPts val="283"/>
-              </a:spcBef>
-              <a:buClr>
-                <a:srgbClr val="000000"/>
-              </a:buClr>
-              <a:buSzPct val="45000"/>
-              <a:buFont typeface="Wingdings" charset="2"/>
-              <a:buChar char=""/>
-              <a:defRPr lang="en-US" sz="2000" b="0" u="none" strike="noStrike">
-                <a:solidFill>
-                  <a:schemeClr val="dk1"/>
-                </a:solidFill>
-                <a:effectLst/>
-                <a:uFillTx/>
-                <a:latin typeface="Calibri"/>
-              </a:defRPr>
-            </a:lvl7pPr>
-          </a:lstStyle>
-          <a:p>
-            <a:pPr marL="343080" indent="-343080" algn="l" defTabSz="457200">
-              <a:spcBef>
-                <a:spcPts val="641"/>
-              </a:spcBef>
-              <a:buClr>
-                <a:srgbClr val="000000"/>
-              </a:buClr>
-              <a:buFont typeface="Arial"/>
-              <a:buChar char="•"/>
-            </a:pPr>
-            <a:r>
-              <a:rPr lang="en-US" sz="3200" b="0" u="none" strike="noStrike">
-                <a:solidFill>
-                  <a:schemeClr val="dk1"/>
-                </a:solidFill>
-                <a:effectLst/>
-                <a:uFillTx/>
-                <a:latin typeface="Calibri"/>
-              </a:rPr>
-              <a:t>Click to edit the outline text format</a:t>
-            </a:r>
-            <a:endParaRPr lang="en-US" sz="3200" b="0" u="none" strike="noStrike">
-              <a:solidFill>
-                <a:schemeClr val="dk1"/>
-              </a:solidFill>
-              <a:effectLst/>
-              <a:uFillTx/>
-              <a:latin typeface="Calibri"/>
-            </a:endParaRPr>
-          </a:p>
-          <a:p>
-            <a:pPr marL="864000" lvl="1" indent="-324000" algn="l" defTabSz="457200">
-              <a:spcBef>
-                <a:spcPts val="561"/>
-              </a:spcBef>
-              <a:buClr>
-                <a:srgbClr val="000000"/>
-              </a:buClr>
-              <a:buSzPct val="75000"/>
-              <a:buFont typeface="Symbol" charset="2"/>
-              <a:buChar char=""/>
-            </a:pPr>
-            <a:r>
-              <a:rPr lang="en-US" sz="2800" b="0" u="none" strike="noStrike">
-                <a:solidFill>
-                  <a:schemeClr val="dk1"/>
-                </a:solidFill>
-                <a:effectLst/>
-                <a:uFillTx/>
-                <a:latin typeface="Calibri"/>
-              </a:rPr>
-              <a:t>Second Outline Level</a:t>
-            </a:r>
-            <a:endParaRPr lang="en-US" sz="2800" b="0" u="none" strike="noStrike">
-              <a:solidFill>
-                <a:schemeClr val="dk1"/>
-              </a:solidFill>
-              <a:effectLst/>
-              <a:uFillTx/>
-              <a:latin typeface="Calibri"/>
-            </a:endParaRPr>
-          </a:p>
-          <a:p>
-            <a:pPr marL="1296000" lvl="2" indent="-288000" algn="l" defTabSz="457200">
-              <a:spcBef>
-                <a:spcPts val="479"/>
-              </a:spcBef>
-              <a:buClr>
-                <a:srgbClr val="000000"/>
-              </a:buClr>
-              <a:buSzPct val="45000"/>
-              <a:buFont typeface="Wingdings" charset="2"/>
-              <a:buChar char=""/>
-            </a:pPr>
-            <a:r>
-              <a:rPr lang="en-US" sz="2400" b="0" u="none" strike="noStrike">
-                <a:solidFill>
-                  <a:schemeClr val="dk1"/>
-                </a:solidFill>
-                <a:effectLst/>
-                <a:uFillTx/>
-                <a:latin typeface="Calibri"/>
-              </a:rPr>
-              <a:t>Third Outline Level</a:t>
-            </a:r>
-            <a:endParaRPr lang="en-US" sz="2400" b="0" u="none" strike="noStrike">
-              <a:solidFill>
-                <a:schemeClr val="dk1"/>
-              </a:solidFill>
-              <a:effectLst/>
-              <a:uFillTx/>
-              <a:latin typeface="Calibri"/>
-            </a:endParaRPr>
-          </a:p>
-          <a:p>
-            <a:pPr marL="1728000" lvl="3" indent="-216000" algn="l" defTabSz="457200">
-              <a:spcBef>
-                <a:spcPts val="400"/>
-              </a:spcBef>
-              <a:buClr>
-                <a:srgbClr val="000000"/>
-              </a:buClr>
-              <a:buSzPct val="75000"/>
-              <a:buFont typeface="Symbol" charset="2"/>
-              <a:buChar char=""/>
-            </a:pPr>
-            <a:r>
-              <a:rPr lang="en-US" sz="2000" b="0" u="none" strike="noStrike">
-                <a:solidFill>
-                  <a:schemeClr val="dk1"/>
-                </a:solidFill>
-                <a:effectLst/>
-                <a:uFillTx/>
-                <a:latin typeface="Calibri"/>
-              </a:rPr>
-              <a:t>Fourth Outline Level</a:t>
-            </a:r>
-            <a:endParaRPr lang="en-US" sz="2000" b="0" u="none" strike="noStrike">
-              <a:solidFill>
-                <a:schemeClr val="dk1"/>
-              </a:solidFill>
-              <a:effectLst/>
-              <a:uFillTx/>
-              <a:latin typeface="Calibri"/>
-            </a:endParaRPr>
-          </a:p>
-          <a:p>
-            <a:pPr marL="2160000" lvl="4" indent="-216000" algn="l" defTabSz="457200">
-              <a:spcBef>
-                <a:spcPts val="400"/>
-              </a:spcBef>
-              <a:buClr>
-                <a:srgbClr val="000000"/>
-              </a:buClr>
-              <a:buSzPct val="45000"/>
-              <a:buFont typeface="Wingdings" charset="2"/>
-              <a:buChar char=""/>
-            </a:pPr>
-            <a:r>
-              <a:rPr lang="en-US" sz="2000" b="0" u="none" strike="noStrike">
-                <a:solidFill>
-                  <a:schemeClr val="dk1"/>
-                </a:solidFill>
-                <a:effectLst/>
-                <a:uFillTx/>
-                <a:latin typeface="Calibri"/>
-              </a:rPr>
-              <a:t>Fifth Outline Level</a:t>
-            </a:r>
-            <a:endParaRPr lang="en-US" sz="2000" b="0" u="none" strike="noStrike">
-              <a:solidFill>
-                <a:schemeClr val="dk1"/>
-              </a:solidFill>
-              <a:effectLst/>
-              <a:uFillTx/>
-              <a:latin typeface="Calibri"/>
-            </a:endParaRPr>
-          </a:p>
-          <a:p>
-            <a:pPr marL="2592000" lvl="5" indent="-216000" algn="l" defTabSz="457200">
-              <a:spcBef>
-                <a:spcPts val="283"/>
-              </a:spcBef>
-              <a:buClr>
-                <a:srgbClr val="000000"/>
-              </a:buClr>
-              <a:buSzPct val="45000"/>
-              <a:buFont typeface="Wingdings" charset="2"/>
-              <a:buChar char=""/>
-            </a:pPr>
-            <a:r>
-              <a:rPr lang="en-US" sz="2000" b="0" u="none" strike="noStrike">
-                <a:solidFill>
-                  <a:schemeClr val="dk1"/>
-                </a:solidFill>
-                <a:effectLst/>
-                <a:uFillTx/>
-                <a:latin typeface="Calibri"/>
-              </a:rPr>
-              <a:t>Sixth Outline Level</a:t>
-            </a:r>
-            <a:endParaRPr lang="en-US" sz="2000" b="0" u="none" strike="noStrike">
-              <a:solidFill>
-                <a:schemeClr val="dk1"/>
-              </a:solidFill>
-              <a:effectLst/>
-              <a:uFillTx/>
-              <a:latin typeface="Calibri"/>
-            </a:endParaRPr>
-          </a:p>
-          <a:p>
-            <a:pPr marL="3024000" lvl="6" indent="-216000" algn="l" defTabSz="457200">
-              <a:spcBef>
-                <a:spcPts val="283"/>
-              </a:spcBef>
-              <a:buClr>
-                <a:srgbClr val="000000"/>
-              </a:buClr>
-              <a:buSzPct val="45000"/>
-              <a:buFont typeface="Wingdings" charset="2"/>
-              <a:buChar char=""/>
-            </a:pPr>
-            <a:r>
-              <a:rPr lang="en-US" sz="2000" b="0" u="none" strike="noStrike">
-                <a:solidFill>
-                  <a:schemeClr val="dk1"/>
-                </a:solidFill>
-                <a:effectLst/>
-                <a:uFillTx/>
-                <a:latin typeface="Calibri"/>
-              </a:rPr>
-              <a:t>Seventh Outline Level</a:t>
-            </a:r>
-            <a:endParaRPr lang="en-US" sz="2000" b="0" u="none" strike="noStrike">
-              <a:solidFill>
-                <a:schemeClr val="dk1"/>
-              </a:solidFill>
-              <a:effectLst/>
-              <a:uFillTx/>
-              <a:latin typeface="Calibri"/>
             </a:endParaRPr>
           </a:p>
         </p:txBody>
@@ -8797,7 +9033,7 @@
         <p:spPr>
           <a:xfrm>
             <a:off x="731520" y="731520"/>
-            <a:ext cx="10728360" cy="5394600"/>
+            <a:ext cx="10728000" cy="5394240"/>
           </a:xfrm>
           <a:prstGeom prst="roundRect">
             <a:avLst>
@@ -8859,7 +9095,7 @@
         <p:spPr>
           <a:xfrm>
             <a:off x="1097280" y="1188720"/>
-            <a:ext cx="9966600" cy="3164400"/>
+            <a:ext cx="9966240" cy="3163680"/>
           </a:xfrm>
           <a:prstGeom prst="rect">
             <a:avLst/>
@@ -9018,7 +9254,7 @@
         <p:spPr>
           <a:xfrm>
             <a:off x="731520" y="365760"/>
-            <a:ext cx="10698120" cy="273960"/>
+            <a:ext cx="10697760" cy="273600"/>
           </a:xfrm>
           <a:prstGeom prst="rect">
             <a:avLst/>
@@ -9075,7 +9311,7 @@
         <p:spPr>
           <a:xfrm>
             <a:off x="731520" y="640080"/>
-            <a:ext cx="10728360" cy="776880"/>
+            <a:ext cx="10728000" cy="776520"/>
           </a:xfrm>
           <a:prstGeom prst="rect">
             <a:avLst/>
@@ -9132,7 +9368,7 @@
         <p:spPr>
           <a:xfrm>
             <a:off x="731520" y="1444680"/>
-            <a:ext cx="10728360" cy="25200"/>
+            <a:ext cx="10728000" cy="24840"/>
           </a:xfrm>
           <a:prstGeom prst="rect">
             <a:avLst/>
@@ -9189,7 +9425,7 @@
         <p:spPr>
           <a:xfrm>
             <a:off x="731520" y="1645920"/>
-            <a:ext cx="5211720" cy="4754520"/>
+            <a:ext cx="5211360" cy="4754160"/>
           </a:xfrm>
           <a:prstGeom prst="roundRect">
             <a:avLst>
@@ -9251,7 +9487,7 @@
         <p:spPr>
           <a:xfrm>
             <a:off x="914400" y="1783080"/>
-            <a:ext cx="4845960" cy="4480200"/>
+            <a:ext cx="4845600" cy="4479840"/>
           </a:xfrm>
           <a:prstGeom prst="rect">
             <a:avLst/>
@@ -9471,7 +9707,7 @@
         <p:spPr>
           <a:xfrm>
             <a:off x="6248160" y="1645920"/>
-            <a:ext cx="5211720" cy="4754520"/>
+            <a:ext cx="5211360" cy="4754160"/>
           </a:xfrm>
           <a:prstGeom prst="roundRect">
             <a:avLst>
@@ -9530,7 +9766,7 @@
         <p:spPr>
           <a:xfrm>
             <a:off x="6431040" y="1783080"/>
-            <a:ext cx="4845960" cy="4480200"/>
+            <a:ext cx="4845600" cy="4479840"/>
           </a:xfrm>
           <a:prstGeom prst="rect">
             <a:avLst/>
@@ -9787,7 +10023,7 @@
         <p:spPr>
           <a:xfrm>
             <a:off x="731520" y="365760"/>
-            <a:ext cx="10698120" cy="273960"/>
+            <a:ext cx="10697760" cy="273600"/>
           </a:xfrm>
           <a:prstGeom prst="rect">
             <a:avLst/>
@@ -9844,7 +10080,7 @@
         <p:spPr>
           <a:xfrm>
             <a:off x="731520" y="640080"/>
-            <a:ext cx="10728360" cy="776880"/>
+            <a:ext cx="10728000" cy="776520"/>
           </a:xfrm>
           <a:prstGeom prst="rect">
             <a:avLst/>
@@ -9901,7 +10137,7 @@
         <p:spPr>
           <a:xfrm>
             <a:off x="731520" y="1444680"/>
-            <a:ext cx="10728360" cy="25200"/>
+            <a:ext cx="10728000" cy="24840"/>
           </a:xfrm>
           <a:prstGeom prst="rect">
             <a:avLst/>
@@ -9958,7 +10194,7 @@
         <p:spPr>
           <a:xfrm>
             <a:off x="731520" y="1645920"/>
-            <a:ext cx="3382920" cy="2468520"/>
+            <a:ext cx="3382560" cy="2468160"/>
           </a:xfrm>
           <a:prstGeom prst="roundRect">
             <a:avLst>
@@ -10020,7 +10256,7 @@
         <p:spPr>
           <a:xfrm>
             <a:off x="868680" y="1737360"/>
-            <a:ext cx="3108600" cy="2285640"/>
+            <a:ext cx="3108240" cy="2285280"/>
           </a:xfrm>
           <a:prstGeom prst="rect">
             <a:avLst/>
@@ -10058,7 +10294,18 @@
                 <a:uFillTx/>
                 <a:latin typeface="Georgia"/>
               </a:rPr>
-              <a:t>Federal Internet Exchanges (FIX)</a:t>
+              <a:t>Federal Internet </a:t>
+            </a:r>
+            <a:r>
+              <a:rPr lang="en-US" sz="1600" b="1" u="none" strike="noStrike">
+                <a:solidFill>
+                  <a:srgbClr val="0284C7"/>
+                </a:solidFill>
+                <a:effectLst/>
+                <a:uFillTx/>
+                <a:latin typeface="Georgia"/>
+              </a:rPr>
+              <a:t>Exchanges (FIX)</a:t>
             </a:r>
             <a:endParaRPr lang="en-US" sz="1600" b="0" u="none" strike="noStrike">
               <a:solidFill>
@@ -10084,7 +10331,40 @@
                 <a:uFillTx/>
                 <a:latin typeface="Arial"/>
               </a:rPr>
-              <a:t>Puntos de intercambio gubernamentales (FIX-East/West en NASA Ames y U. Maryland). Estrictamente vedados al tráfico comercial civil.</a:t>
+              <a:t>Puntos de intercambio gubernamentales </a:t>
+            </a:r>
+            <a:r>
+              <a:rPr lang="en-US" sz="1300" b="0" u="none" strike="noStrike">
+                <a:solidFill>
+                  <a:srgbClr val="0F172A"/>
+                </a:solidFill>
+                <a:effectLst/>
+                <a:uFillTx/>
+                <a:latin typeface="Arial"/>
+              </a:rPr>
+              <a:t>(FIX-East/West en NASA Ames y U. </a:t>
+            </a:r>
+            <a:r>
+              <a:rPr lang="en-US" sz="1300" b="0" u="none" strike="noStrike">
+                <a:solidFill>
+                  <a:srgbClr val="0F172A"/>
+                </a:solidFill>
+                <a:effectLst/>
+                <a:uFillTx/>
+                <a:latin typeface="Arial"/>
+              </a:rPr>
+              <a:t>Maryland). Estrictamente vedados al </a:t>
+            </a:r>
+            <a:r>
+              <a:rPr lang="en-US" sz="1300" b="0" u="none" strike="noStrike">
+                <a:solidFill>
+                  <a:srgbClr val="0F172A"/>
+                </a:solidFill>
+                <a:effectLst/>
+                <a:uFillTx/>
+                <a:latin typeface="Arial"/>
+              </a:rPr>
+              <a:t>tráfico comercial civil.</a:t>
             </a:r>
             <a:endParaRPr lang="en-US" sz="1300" b="0" u="none" strike="noStrike">
               <a:solidFill>
@@ -10106,7 +10386,7 @@
         <p:spPr>
           <a:xfrm>
             <a:off x="4389120" y="1645920"/>
-            <a:ext cx="3382920" cy="2468520"/>
+            <a:ext cx="3382560" cy="2468160"/>
           </a:xfrm>
           <a:prstGeom prst="roundRect">
             <a:avLst>
@@ -10168,7 +10448,7 @@
         <p:spPr>
           <a:xfrm>
             <a:off x="4526280" y="1737360"/>
-            <a:ext cx="3108600" cy="2285640"/>
+            <a:ext cx="3108240" cy="2285280"/>
           </a:xfrm>
           <a:prstGeom prst="rect">
             <a:avLst/>
@@ -10254,7 +10534,7 @@
         <p:spPr>
           <a:xfrm>
             <a:off x="8046720" y="1645920"/>
-            <a:ext cx="3382920" cy="2468520"/>
+            <a:ext cx="3382560" cy="2468160"/>
           </a:xfrm>
           <a:prstGeom prst="roundRect">
             <a:avLst>
@@ -10316,7 +10596,7 @@
         <p:spPr>
           <a:xfrm>
             <a:off x="8183880" y="1737360"/>
-            <a:ext cx="3108600" cy="2285640"/>
+            <a:ext cx="3108240" cy="2285280"/>
           </a:xfrm>
           <a:prstGeom prst="rect">
             <a:avLst/>
@@ -10354,7 +10634,18 @@
                 <a:uFillTx/>
                 <a:latin typeface="Georgia"/>
               </a:rPr>
-              <a:t>Network Access Points (NAPs 1993)</a:t>
+              <a:t>Network Access Points </a:t>
+            </a:r>
+            <a:r>
+              <a:rPr lang="en-US" sz="1600" b="1" u="none" strike="noStrike">
+                <a:solidFill>
+                  <a:srgbClr val="D97706"/>
+                </a:solidFill>
+                <a:effectLst/>
+                <a:uFillTx/>
+                <a:latin typeface="Georgia"/>
+              </a:rPr>
+              <a:t>(NAPs 1993)</a:t>
             </a:r>
             <a:endParaRPr lang="en-US" sz="1600" b="0" u="none" strike="noStrike">
               <a:solidFill>
@@ -10380,7 +10671,40 @@
                 <a:uFillTx/>
                 <a:latin typeface="Arial"/>
               </a:rPr>
-              <a:t>Licitación de la NSF para privatizar la dorsal (PacBell, Ameritech, Sprint, MFS). Intentaron usar matrices ATM con PVCs dedicados.</a:t>
+              <a:t>Licitación de la NSF para privatizar la </a:t>
+            </a:r>
+            <a:r>
+              <a:rPr lang="en-US" sz="1300" b="0" u="none" strike="noStrike">
+                <a:solidFill>
+                  <a:srgbClr val="0F172A"/>
+                </a:solidFill>
+                <a:effectLst/>
+                <a:uFillTx/>
+                <a:latin typeface="Arial"/>
+              </a:rPr>
+              <a:t>dorsal (PacBell, Ameritech, Sprint, </a:t>
+            </a:r>
+            <a:r>
+              <a:rPr lang="en-US" sz="1300" b="0" u="none" strike="noStrike">
+                <a:solidFill>
+                  <a:srgbClr val="0F172A"/>
+                </a:solidFill>
+                <a:effectLst/>
+                <a:uFillTx/>
+                <a:latin typeface="Arial"/>
+              </a:rPr>
+              <a:t>MFS). Intentaron usar matrices ATM con </a:t>
+            </a:r>
+            <a:r>
+              <a:rPr lang="en-US" sz="1300" b="0" u="none" strike="noStrike">
+                <a:solidFill>
+                  <a:srgbClr val="0F172A"/>
+                </a:solidFill>
+                <a:effectLst/>
+                <a:uFillTx/>
+                <a:latin typeface="Arial"/>
+              </a:rPr>
+              <a:t>PVCs dedicados.</a:t>
             </a:r>
             <a:endParaRPr lang="en-US" sz="1300" b="0" u="none" strike="noStrike">
               <a:solidFill>
@@ -10402,7 +10726,7 @@
         <p:spPr>
           <a:xfrm>
             <a:off x="731520" y="4297680"/>
-            <a:ext cx="10728360" cy="2102760"/>
+            <a:ext cx="10728000" cy="2102400"/>
           </a:xfrm>
           <a:prstGeom prst="roundRect">
             <a:avLst>
@@ -10461,7 +10785,7 @@
         <p:spPr>
           <a:xfrm>
             <a:off x="914400" y="4389120"/>
-            <a:ext cx="10362600" cy="1919880"/>
+            <a:ext cx="10362240" cy="1919520"/>
           </a:xfrm>
           <a:prstGeom prst="rect">
             <a:avLst/>
@@ -10678,7 +11002,7 @@
         <p:spPr>
           <a:xfrm>
             <a:off x="731520" y="365760"/>
-            <a:ext cx="10698120" cy="273960"/>
+            <a:ext cx="10697760" cy="273600"/>
           </a:xfrm>
           <a:prstGeom prst="rect">
             <a:avLst/>
@@ -10735,7 +11059,7 @@
         <p:spPr>
           <a:xfrm>
             <a:off x="731520" y="640080"/>
-            <a:ext cx="10728360" cy="776880"/>
+            <a:ext cx="10728000" cy="776520"/>
           </a:xfrm>
           <a:prstGeom prst="rect">
             <a:avLst/>
@@ -10792,7 +11116,7 @@
         <p:spPr>
           <a:xfrm>
             <a:off x="731520" y="1444680"/>
-            <a:ext cx="10728360" cy="25200"/>
+            <a:ext cx="10728000" cy="24840"/>
           </a:xfrm>
           <a:prstGeom prst="rect">
             <a:avLst/>
@@ -10849,7 +11173,7 @@
         <p:spPr>
           <a:xfrm>
             <a:off x="731520" y="1645920"/>
-            <a:ext cx="5211720" cy="4754520"/>
+            <a:ext cx="5211360" cy="4754160"/>
           </a:xfrm>
           <a:prstGeom prst="roundRect">
             <a:avLst>
@@ -10911,7 +11235,7 @@
         <p:spPr>
           <a:xfrm>
             <a:off x="914400" y="1783080"/>
-            <a:ext cx="4845960" cy="4480200"/>
+            <a:ext cx="4845600" cy="4479840"/>
           </a:xfrm>
           <a:prstGeom prst="rect">
             <a:avLst/>
@@ -11091,7 +11415,7 @@
         <p:spPr>
           <a:xfrm>
             <a:off x="6248160" y="1645920"/>
-            <a:ext cx="5211720" cy="4754520"/>
+            <a:ext cx="5211360" cy="4754160"/>
           </a:xfrm>
           <a:prstGeom prst="roundRect">
             <a:avLst>
@@ -11150,7 +11474,7 @@
         <p:spPr>
           <a:xfrm>
             <a:off x="6431040" y="1783080"/>
-            <a:ext cx="4845960" cy="4480200"/>
+            <a:ext cx="4845600" cy="4479840"/>
           </a:xfrm>
           <a:prstGeom prst="rect">
             <a:avLst/>
@@ -11367,7 +11691,7 @@
         <p:spPr>
           <a:xfrm>
             <a:off x="731520" y="365760"/>
-            <a:ext cx="10698120" cy="273960"/>
+            <a:ext cx="10697760" cy="273600"/>
           </a:xfrm>
           <a:prstGeom prst="rect">
             <a:avLst/>
@@ -11424,7 +11748,7 @@
         <p:spPr>
           <a:xfrm>
             <a:off x="731520" y="640080"/>
-            <a:ext cx="10728360" cy="776880"/>
+            <a:ext cx="10728000" cy="776520"/>
           </a:xfrm>
           <a:prstGeom prst="rect">
             <a:avLst/>
@@ -11481,7 +11805,7 @@
         <p:spPr>
           <a:xfrm>
             <a:off x="731520" y="1444680"/>
-            <a:ext cx="10728360" cy="25200"/>
+            <a:ext cx="10728000" cy="24840"/>
           </a:xfrm>
           <a:prstGeom prst="rect">
             <a:avLst/>
@@ -11538,7 +11862,7 @@
         <p:spPr>
           <a:xfrm>
             <a:off x="731520" y="1645920"/>
-            <a:ext cx="5211720" cy="4754520"/>
+            <a:ext cx="5211360" cy="4754160"/>
           </a:xfrm>
           <a:prstGeom prst="roundRect">
             <a:avLst>
@@ -11600,7 +11924,7 @@
         <p:spPr>
           <a:xfrm>
             <a:off x="914400" y="1783080"/>
-            <a:ext cx="4845960" cy="4480200"/>
+            <a:ext cx="4845600" cy="4479840"/>
           </a:xfrm>
           <a:prstGeom prst="rect">
             <a:avLst/>
@@ -11780,7 +12104,7 @@
         <p:spPr>
           <a:xfrm>
             <a:off x="6248160" y="1645920"/>
-            <a:ext cx="5211720" cy="4754520"/>
+            <a:ext cx="5211360" cy="4754160"/>
           </a:xfrm>
           <a:prstGeom prst="roundRect">
             <a:avLst>
@@ -11839,7 +12163,7 @@
         <p:spPr>
           <a:xfrm>
             <a:off x="6431040" y="1783080"/>
-            <a:ext cx="4845960" cy="4480200"/>
+            <a:ext cx="4845600" cy="4479840"/>
           </a:xfrm>
           <a:prstGeom prst="rect">
             <a:avLst/>
@@ -12056,7 +12380,7 @@
         <p:spPr>
           <a:xfrm>
             <a:off x="731520" y="365760"/>
-            <a:ext cx="10698120" cy="273960"/>
+            <a:ext cx="10697760" cy="273600"/>
           </a:xfrm>
           <a:prstGeom prst="rect">
             <a:avLst/>
@@ -12113,7 +12437,7 @@
         <p:spPr>
           <a:xfrm>
             <a:off x="731520" y="640080"/>
-            <a:ext cx="10728360" cy="776880"/>
+            <a:ext cx="10728000" cy="776520"/>
           </a:xfrm>
           <a:prstGeom prst="rect">
             <a:avLst/>
@@ -12170,7 +12494,7 @@
         <p:spPr>
           <a:xfrm>
             <a:off x="731520" y="1444680"/>
-            <a:ext cx="10728360" cy="25200"/>
+            <a:ext cx="10728000" cy="24840"/>
           </a:xfrm>
           <a:prstGeom prst="rect">
             <a:avLst/>
@@ -12227,7 +12551,7 @@
         <p:spPr>
           <a:xfrm>
             <a:off x="731520" y="1645920"/>
-            <a:ext cx="3382920" cy="2468520"/>
+            <a:ext cx="3382560" cy="2468160"/>
           </a:xfrm>
           <a:prstGeom prst="roundRect">
             <a:avLst>
@@ -12289,7 +12613,7 @@
         <p:spPr>
           <a:xfrm>
             <a:off x="868680" y="1737360"/>
-            <a:ext cx="3108600" cy="1563480"/>
+            <a:ext cx="3108240" cy="1562760"/>
           </a:xfrm>
           <a:prstGeom prst="rect">
             <a:avLst/>
@@ -12353,7 +12677,7 @@
                 <a:uFillTx/>
                 <a:latin typeface="Arial"/>
               </a:rPr>
-              <a:t>BGP tradicional toma decisiones de enrutamiento basadas exclusivamente en el prefijo IP de destino. No puede tomar decisiones por puerto L4, aplicación o calidad de servicio.</a:t>
+              <a:t>BGP tradicional toma decisiones de enrutamiento basadas exclusivamente en el prefijo IP de destino. No puede tomar decisiones por puerto, aplicación o calidad de servicio.</a:t>
             </a:r>
             <a:endParaRPr lang="en-US" sz="1200" b="0" u="none" strike="noStrike">
               <a:solidFill>
@@ -12375,7 +12699,7 @@
         <p:spPr>
           <a:xfrm>
             <a:off x="4389120" y="1645920"/>
-            <a:ext cx="3382920" cy="2468520"/>
+            <a:ext cx="3382560" cy="2468160"/>
           </a:xfrm>
           <a:prstGeom prst="roundRect">
             <a:avLst>
@@ -12437,7 +12761,7 @@
         <p:spPr>
           <a:xfrm>
             <a:off x="4526280" y="1737360"/>
-            <a:ext cx="3108600" cy="1380600"/>
+            <a:ext cx="3108240" cy="1379880"/>
           </a:xfrm>
           <a:prstGeom prst="rect">
             <a:avLst/>
@@ -12523,7 +12847,7 @@
         <p:spPr>
           <a:xfrm>
             <a:off x="8046720" y="1645920"/>
-            <a:ext cx="3382920" cy="2468520"/>
+            <a:ext cx="3382560" cy="2468160"/>
           </a:xfrm>
           <a:prstGeom prst="roundRect">
             <a:avLst>
@@ -12585,7 +12909,7 @@
         <p:spPr>
           <a:xfrm>
             <a:off x="8183880" y="1737360"/>
-            <a:ext cx="3108600" cy="2285640"/>
+            <a:ext cx="3108240" cy="2285280"/>
           </a:xfrm>
           <a:prstGeom prst="rect">
             <a:avLst/>
@@ -12671,7 +12995,7 @@
         <p:spPr>
           <a:xfrm>
             <a:off x="731520" y="4297680"/>
-            <a:ext cx="10728360" cy="2102760"/>
+            <a:ext cx="10728000" cy="2102400"/>
           </a:xfrm>
           <a:prstGeom prst="roundRect">
             <a:avLst>
@@ -12730,7 +13054,7 @@
         <p:spPr>
           <a:xfrm>
             <a:off x="914400" y="4389120"/>
-            <a:ext cx="10362600" cy="1919880"/>
+            <a:ext cx="10362240" cy="1919520"/>
           </a:xfrm>
           <a:prstGeom prst="rect">
             <a:avLst/>
@@ -12947,7 +13271,7 @@
         <p:spPr>
           <a:xfrm>
             <a:off x="731520" y="365760"/>
-            <a:ext cx="10698120" cy="273960"/>
+            <a:ext cx="10697760" cy="273600"/>
           </a:xfrm>
           <a:prstGeom prst="rect">
             <a:avLst/>
@@ -13004,7 +13328,7 @@
         <p:spPr>
           <a:xfrm>
             <a:off x="731520" y="640080"/>
-            <a:ext cx="10728360" cy="776880"/>
+            <a:ext cx="10728000" cy="776520"/>
           </a:xfrm>
           <a:prstGeom prst="rect">
             <a:avLst/>
@@ -13061,7 +13385,7 @@
         <p:spPr>
           <a:xfrm>
             <a:off x="731520" y="1444680"/>
-            <a:ext cx="10728360" cy="25200"/>
+            <a:ext cx="10728000" cy="24840"/>
           </a:xfrm>
           <a:prstGeom prst="rect">
             <a:avLst/>
@@ -13118,7 +13442,7 @@
         <p:spPr>
           <a:xfrm>
             <a:off x="731520" y="1645920"/>
-            <a:ext cx="10728360" cy="4845960"/>
+            <a:ext cx="10728000" cy="4845600"/>
           </a:xfrm>
           <a:prstGeom prst="rect">
             <a:avLst/>
